--- a/docs/Rail_Saarthi_Pitch.pptx
+++ b/docs/Rail_Saarthi_Pitch.pptx
@@ -9182,7 +9182,7 @@
                 </a:solidFill>
                 <a:latin typeface="Calibri"/>
               </a:rPr>
-              <a:t>Python services  ·  event bus  ·  PostgreSQL  ·  React frontend  ·  Hive agent framework</a:t>
+              <a:t>FastAPI  ·  in-process event bus  ·  SQLite  ·  React  ·  Hive agents</a:t>
             </a:r>
           </a:p>
         </p:txBody>

--- a/docs/Rail_Saarthi_Pitch.pptx
+++ b/docs/Rail_Saarthi_Pitch.pptx
@@ -3263,7 +3263,7 @@
                 </a:solidFill>
                 <a:latin typeface="Calibri"/>
               </a:rPr>
-              <a:t>Multi-agent AI that keeps trains on time — in real time.</a:t>
+              <a:t>Multi-agent AI that keeps trains on time, in real time.</a:t>
             </a:r>
           </a:p>
         </p:txBody>
@@ -3586,7 +3586,7 @@
                 </a:solidFill>
                 <a:latin typeface="Calibri"/>
               </a:rPr>
-              <a:t>India's railways are falling behind — </a:t>
+              <a:t>India's railways are falling behind, </a:t>
             </a:r>
             <a:r>
               <a:rPr sz="4000" b="1" i="0">
@@ -3656,8 +3656,8 @@
         </p:nvSpPr>
         <p:spPr>
           <a:xfrm>
-            <a:off x="1005840" y="3063240"/>
-            <a:ext cx="4754880" cy="457200"/>
+            <a:off x="1005840" y="3108960"/>
+            <a:ext cx="4937760" cy="365760"/>
           </a:xfrm>
           <a:prstGeom prst="rect">
             <a:avLst/>
@@ -3679,13 +3679,13 @@
               </a:spcAft>
             </a:pPr>
             <a:r>
-              <a:rPr sz="1300" b="1" i="0" spc="200">
+              <a:rPr sz="1300" b="1" i="0" spc="150">
                 <a:solidFill>
                   <a:srgbClr val="9AA7BD"/>
                 </a:solidFill>
                 <a:latin typeface="Calibri"/>
               </a:rPr>
-              <a:t>ON-TIME PERFORMANCE</a:t>
+              <a:t>ON-TIME PERFORMANCE, KEY ROUTES</a:t>
             </a:r>
           </a:p>
         </p:txBody>
@@ -3698,8 +3698,8 @@
         </p:nvSpPr>
         <p:spPr>
           <a:xfrm>
-            <a:off x="1005840" y="3520440"/>
-            <a:ext cx="4937760" cy="1371600"/>
+            <a:off x="1005840" y="3657600"/>
+            <a:ext cx="4937760" cy="640080"/>
           </a:xfrm>
           <a:prstGeom prst="rect">
             <a:avLst/>
@@ -3721,7 +3721,7 @@
               </a:spcAft>
             </a:pPr>
             <a:r>
-              <a:rPr sz="4600" b="1" i="0">
+              <a:rPr sz="3200" b="1" i="0">
                 <a:solidFill>
                   <a:srgbClr val="9AA7BD"/>
                 </a:solidFill>
@@ -3730,22 +3730,13 @@
               <a:t>94.2%</a:t>
             </a:r>
             <a:r>
-              <a:rPr sz="4000" b="1" i="0">
-                <a:solidFill>
-                  <a:srgbClr val="FF9E1B"/>
-                </a:solidFill>
-                <a:latin typeface="Calibri"/>
-              </a:rPr>
-              <a:t>  →  </a:t>
-            </a:r>
-            <a:r>
-              <a:rPr sz="5800" b="1" i="0">
-                <a:solidFill>
-                  <a:srgbClr val="FF9E1B"/>
-                </a:solidFill>
-                <a:latin typeface="Calibri"/>
-              </a:rPr>
-              <a:t>73.6%</a:t>
+              <a:rPr sz="1400" b="0" i="0">
+                <a:solidFill>
+                  <a:srgbClr val="9AA7BD"/>
+                </a:solidFill>
+                <a:latin typeface="Calibri"/>
+              </a:rPr>
+              <a:t>   in 2020</a:t>
             </a:r>
           </a:p>
         </p:txBody>
@@ -3758,8 +3749,8 @@
         </p:nvSpPr>
         <p:spPr>
           <a:xfrm>
-            <a:off x="1005840" y="5029200"/>
-            <a:ext cx="4754880" cy="548640"/>
+            <a:off x="1005840" y="4297680"/>
+            <a:ext cx="4937760" cy="914400"/>
           </a:xfrm>
           <a:prstGeom prst="rect">
             <a:avLst/>
@@ -3781,20 +3772,71 @@
               </a:spcAft>
             </a:pPr>
             <a:r>
+              <a:rPr sz="5400" b="1" i="0">
+                <a:solidFill>
+                  <a:srgbClr val="FF9E1B"/>
+                </a:solidFill>
+                <a:latin typeface="Calibri"/>
+              </a:rPr>
+              <a:t>73.6%</a:t>
+            </a:r>
+            <a:r>
               <a:rPr sz="1400" b="0" i="0">
                 <a:solidFill>
                   <a:srgbClr val="9AA7BD"/>
                 </a:solidFill>
                 <a:latin typeface="Calibri"/>
               </a:rPr>
-              <a:t>Punctuality on key routes, 2020 → 2023</a:t>
-            </a:r>
-          </a:p>
-        </p:txBody>
-      </p:sp>
-      <p:sp>
-        <p:nvSpPr>
-          <p:cNvPr id="10" name="Rounded Rectangle 9"/>
+              <a:t>   by 2023</a:t>
+            </a:r>
+          </a:p>
+        </p:txBody>
+      </p:sp>
+      <p:sp>
+        <p:nvSpPr>
+          <p:cNvPr id="10" name="TextBox 9"/>
+          <p:cNvSpPr txBox="1"/>
+          <p:nvPr/>
+        </p:nvSpPr>
+        <p:spPr>
+          <a:xfrm>
+            <a:off x="1005840" y="5230368"/>
+            <a:ext cx="4937760" cy="365760"/>
+          </a:xfrm>
+          <a:prstGeom prst="rect">
+            <a:avLst/>
+          </a:prstGeom>
+          <a:noFill/>
+        </p:spPr>
+        <p:txBody>
+          <a:bodyPr wrap="square" anchor="t" lIns="0" rIns="0" tIns="0" bIns="0">
+            <a:spAutoFit/>
+          </a:bodyPr>
+          <a:lstStyle/>
+          <a:p>
+            <a:pPr algn="l">
+              <a:spcBef>
+                <a:spcPts val="0"/>
+              </a:spcBef>
+              <a:spcAft>
+                <a:spcPts val="0"/>
+              </a:spcAft>
+            </a:pPr>
+            <a:r>
+              <a:rPr sz="1300" b="0" i="1">
+                <a:solidFill>
+                  <a:srgbClr val="9AA7BD"/>
+                </a:solidFill>
+                <a:latin typeface="Calibri"/>
+              </a:rPr>
+              <a:t>A 20.6 point fall in just three years.</a:t>
+            </a:r>
+          </a:p>
+        </p:txBody>
+      </p:sp>
+      <p:sp>
+        <p:nvSpPr>
+          <p:cNvPr id="11" name="Rounded Rectangle 10"/>
           <p:cNvSpPr/>
           <p:nvPr/>
         </p:nvSpPr>
@@ -3842,7 +3884,7 @@
       </p:sp>
       <p:sp>
         <p:nvSpPr>
-          <p:cNvPr id="11" name="TextBox 10"/>
+          <p:cNvPr id="12" name="TextBox 11"/>
           <p:cNvSpPr txBox="1"/>
           <p:nvPr/>
         </p:nvSpPr>
@@ -3884,7 +3926,7 @@
       </p:sp>
       <p:sp>
         <p:nvSpPr>
-          <p:cNvPr id="12" name="TextBox 11"/>
+          <p:cNvPr id="13" name="TextBox 12"/>
           <p:cNvSpPr txBox="1"/>
           <p:nvPr/>
         </p:nvSpPr>
@@ -3929,7 +3971,7 @@
       </p:sp>
       <p:sp>
         <p:nvSpPr>
-          <p:cNvPr id="13" name="Rounded Rectangle 12"/>
+          <p:cNvPr id="14" name="Rounded Rectangle 13"/>
           <p:cNvSpPr/>
           <p:nvPr/>
         </p:nvSpPr>
@@ -3977,7 +4019,7 @@
       </p:sp>
       <p:sp>
         <p:nvSpPr>
-          <p:cNvPr id="14" name="TextBox 13"/>
+          <p:cNvPr id="15" name="TextBox 14"/>
           <p:cNvSpPr txBox="1"/>
           <p:nvPr/>
         </p:nvSpPr>
@@ -4019,7 +4061,7 @@
       </p:sp>
       <p:sp>
         <p:nvSpPr>
-          <p:cNvPr id="15" name="TextBox 14"/>
+          <p:cNvPr id="16" name="TextBox 15"/>
           <p:cNvSpPr txBox="1"/>
           <p:nvPr/>
         </p:nvSpPr>
@@ -4064,7 +4106,7 @@
       </p:sp>
       <p:sp>
         <p:nvSpPr>
-          <p:cNvPr id="16" name="Rounded Rectangle 15"/>
+          <p:cNvPr id="17" name="Rounded Rectangle 16"/>
           <p:cNvSpPr/>
           <p:nvPr/>
         </p:nvSpPr>
@@ -4112,7 +4154,7 @@
       </p:sp>
       <p:sp>
         <p:nvSpPr>
-          <p:cNvPr id="17" name="TextBox 16"/>
+          <p:cNvPr id="18" name="TextBox 17"/>
           <p:cNvSpPr txBox="1"/>
           <p:nvPr/>
         </p:nvSpPr>
@@ -4154,7 +4196,7 @@
       </p:sp>
       <p:sp>
         <p:nvSpPr>
-          <p:cNvPr id="18" name="TextBox 17"/>
+          <p:cNvPr id="19" name="TextBox 18"/>
           <p:cNvSpPr txBox="1"/>
           <p:nvPr/>
         </p:nvSpPr>
@@ -4199,7 +4241,7 @@
       </p:sp>
       <p:sp>
         <p:nvSpPr>
-          <p:cNvPr id="19" name="TextBox 18"/>
+          <p:cNvPr id="20" name="TextBox 19"/>
           <p:cNvSpPr txBox="1"/>
           <p:nvPr/>
         </p:nvSpPr>
@@ -4241,7 +4283,7 @@
       </p:sp>
       <p:sp>
         <p:nvSpPr>
-          <p:cNvPr id="20" name="TextBox 19"/>
+          <p:cNvPr id="21" name="TextBox 20"/>
           <p:cNvSpPr txBox="1"/>
           <p:nvPr/>
         </p:nvSpPr>
@@ -4645,7 +4687,7 @@
                 </a:solidFill>
                 <a:latin typeface="Calibri"/>
               </a:rPr>
-              <a:t>80% of key routes run over capacity — no slack to absorb a single slip.</a:t>
+              <a:t>80% of key routes run over capacity, with no slack to absorb a single slip.</a:t>
             </a:r>
           </a:p>
         </p:txBody>
@@ -5182,7 +5224,7 @@
                 </a:solidFill>
                 <a:latin typeface="Calibri"/>
               </a:rPr>
-              <a:t>Passengers learn of disruptions late, if at all — no live, trustworthy updates.</a:t>
+              <a:t>Passengers learn of disruptions late, if at all, with no live, trustworthy updates.</a:t>
             </a:r>
           </a:p>
         </p:txBody>
@@ -5316,7 +5358,7 @@
                 </a:solidFill>
                 <a:latin typeface="Calibri"/>
               </a:rPr>
-              <a:t>Freight–passenger conflict</a:t>
+              <a:t>Freight vs passenger conflict</a:t>
             </a:r>
           </a:p>
         </p:txBody>
@@ -5823,7 +5865,7 @@
                 </a:solidFill>
                 <a:latin typeface="Calibri"/>
               </a:rPr>
-              <a:t> — an agentic OS for Indian Railways</a:t>
+              <a:t>: an agentic OS for Indian Railways</a:t>
             </a:r>
           </a:p>
         </p:txBody>
@@ -6002,7 +6044,7 @@
                 </a:solidFill>
                 <a:latin typeface="Calibri"/>
               </a:rPr>
-              <a:t>A multi-agent AI system — Train, Station, Crew, Maintenance and Passenger agents coordinating on a live digital twin.</a:t>
+              <a:t>A multi-agent AI system: Train, Station, Crew, Maintenance and Passenger agents coordinating on a live digital twin.</a:t>
             </a:r>
           </a:p>
         </p:txBody>
@@ -6927,7 +6969,7 @@
                 </a:solidFill>
                 <a:latin typeface="Calibri"/>
               </a:rPr>
-              <a:t>live train positions on the NDLS–DDU line</a:t>
+              <a:t>live train positions on the NDLS to DDU line</a:t>
             </a:r>
           </a:p>
         </p:txBody>
@@ -10382,7 +10424,7 @@
                 </a:solidFill>
                 <a:latin typeface="Calibri"/>
               </a:rPr>
-              <a:t>Simulated results — pilot validation planned.</a:t>
+              <a:t>Simulated results. Pilot validation planned.</a:t>
             </a:r>
           </a:p>
         </p:txBody>

--- a/docs/Rail_Saarthi_Pitch.pptx
+++ b/docs/Rail_Saarthi_Pitch.pptx
@@ -13,6 +13,7 @@
     <p:sldId id="261" r:id="rId12"/>
     <p:sldId id="262" r:id="rId13"/>
     <p:sldId id="263" r:id="rId14"/>
+    <p:sldId id="264" r:id="rId15"/>
   </p:sldIdLst>
   <p:sldSz cx="12192000" cy="6858000" type="screen4x3"/>
   <p:notesSz cx="6858000" cy="9144000"/>
@@ -3117,20 +3118,6 @@
           </a:ln>
           <a:effectLst/>
         </p:spPr>
-        <p:style>
-          <a:lnRef idx="1">
-            <a:schemeClr val="accent1"/>
-          </a:lnRef>
-          <a:fillRef idx="3">
-            <a:schemeClr val="accent1"/>
-          </a:fillRef>
-          <a:effectRef idx="2">
-            <a:schemeClr val="accent1"/>
-          </a:effectRef>
-          <a:fontRef idx="minor">
-            <a:schemeClr val="lt1"/>
-          </a:fontRef>
-        </p:style>
         <p:txBody>
           <a:bodyPr rtlCol="0" anchor="ctr"/>
           <a:lstStyle/>
@@ -3161,20 +3148,6 @@
           </a:ln>
           <a:effectLst/>
         </p:spPr>
-        <p:style>
-          <a:lnRef idx="1">
-            <a:schemeClr val="accent1"/>
-          </a:lnRef>
-          <a:fillRef idx="3">
-            <a:schemeClr val="accent1"/>
-          </a:fillRef>
-          <a:effectRef idx="2">
-            <a:schemeClr val="accent1"/>
-          </a:effectRef>
-          <a:fontRef idx="minor">
-            <a:schemeClr val="lt1"/>
-          </a:fontRef>
-        </p:style>
         <p:txBody>
           <a:bodyPr rtlCol="0" anchor="ctr"/>
           <a:lstStyle/>
@@ -3242,7 +3215,7 @@
                 <a:solidFill>
                   <a:srgbClr val="F4F7FC"/>
                 </a:solidFill>
-                <a:latin typeface="Calibri"/>
+                <a:latin typeface="Arial"/>
               </a:rPr>
               <a:t>An agentic operating system for Indian Railways</a:t>
             </a:r>
@@ -3261,7 +3234,7 @@
                 <a:solidFill>
                   <a:srgbClr val="9AA7BD"/>
                 </a:solidFill>
-                <a:latin typeface="Calibri"/>
+                <a:latin typeface="Arial"/>
               </a:rPr>
               <a:t>Multi-agent AI that keeps trains on time, in real time.</a:t>
             </a:r>
@@ -3290,20 +3263,6 @@
           </a:ln>
           <a:effectLst/>
         </p:spPr>
-        <p:style>
-          <a:lnRef idx="1">
-            <a:schemeClr val="accent1"/>
-          </a:lnRef>
-          <a:fillRef idx="3">
-            <a:schemeClr val="accent1"/>
-          </a:fillRef>
-          <a:effectRef idx="2">
-            <a:schemeClr val="accent1"/>
-          </a:effectRef>
-          <a:fontRef idx="minor">
-            <a:schemeClr val="lt1"/>
-          </a:fontRef>
-        </p:style>
         <p:txBody>
           <a:bodyPr rtlCol="0" anchor="ctr"/>
           <a:lstStyle/>
@@ -3334,20 +3293,6 @@
           </a:ln>
           <a:effectLst/>
         </p:spPr>
-        <p:style>
-          <a:lnRef idx="1">
-            <a:schemeClr val="accent1"/>
-          </a:lnRef>
-          <a:fillRef idx="3">
-            <a:schemeClr val="accent1"/>
-          </a:fillRef>
-          <a:effectRef idx="2">
-            <a:schemeClr val="accent1"/>
-          </a:effectRef>
-          <a:fontRef idx="minor">
-            <a:schemeClr val="lt1"/>
-          </a:fontRef>
-        </p:style>
         <p:txBody>
           <a:bodyPr rtlCol="0" anchor="ctr"/>
           <a:lstStyle/>
@@ -3391,7 +3336,7 @@
                 <a:solidFill>
                   <a:srgbClr val="9AA7BD"/>
                 </a:solidFill>
-                <a:latin typeface="Calibri"/>
+                <a:latin typeface="Arial"/>
               </a:rPr>
               <a:t>FAR AWAY 2026  ·  Hackathon MVP  ·  built on Hive</a:t>
             </a:r>
@@ -3438,20 +3383,6 @@
           </a:ln>
           <a:effectLst/>
         </p:spPr>
-        <p:style>
-          <a:lnRef idx="1">
-            <a:schemeClr val="accent1"/>
-          </a:lnRef>
-          <a:fillRef idx="3">
-            <a:schemeClr val="accent1"/>
-          </a:fillRef>
-          <a:effectRef idx="2">
-            <a:schemeClr val="accent1"/>
-          </a:effectRef>
-          <a:fontRef idx="minor">
-            <a:schemeClr val="lt1"/>
-          </a:fontRef>
-        </p:style>
         <p:txBody>
           <a:bodyPr rtlCol="0" anchor="ctr"/>
           <a:lstStyle/>
@@ -3482,20 +3413,6 @@
           </a:ln>
           <a:effectLst/>
         </p:spPr>
-        <p:style>
-          <a:lnRef idx="1">
-            <a:schemeClr val="accent1"/>
-          </a:lnRef>
-          <a:fillRef idx="3">
-            <a:schemeClr val="accent1"/>
-          </a:fillRef>
-          <a:effectRef idx="2">
-            <a:schemeClr val="accent1"/>
-          </a:effectRef>
-          <a:fontRef idx="minor">
-            <a:schemeClr val="lt1"/>
-          </a:fontRef>
-        </p:style>
         <p:txBody>
           <a:bodyPr rtlCol="0" anchor="ctr"/>
           <a:lstStyle/>
@@ -3539,7 +3456,7 @@
                 <a:solidFill>
                   <a:srgbClr val="4A9EFF"/>
                 </a:solidFill>
-                <a:latin typeface="Calibri"/>
+                <a:latin typeface="Arial"/>
               </a:rPr>
               <a:t>THE PROBLEM</a:t>
             </a:r>
@@ -3584,7 +3501,7 @@
                 <a:solidFill>
                   <a:srgbClr val="F4F7FC"/>
                 </a:solidFill>
-                <a:latin typeface="Calibri"/>
+                <a:latin typeface="Arial"/>
               </a:rPr>
               <a:t>India's railways are falling behind, </a:t>
             </a:r>
@@ -3593,7 +3510,7 @@
                 <a:solidFill>
                   <a:srgbClr val="FF9E1B"/>
                 </a:solidFill>
-                <a:latin typeface="Calibri"/>
+                <a:latin typeface="Arial"/>
               </a:rPr>
               <a:t>on time.</a:t>
             </a:r>
@@ -3626,20 +3543,6 @@
           </a:ln>
           <a:effectLst/>
         </p:spPr>
-        <p:style>
-          <a:lnRef idx="1">
-            <a:schemeClr val="accent1"/>
-          </a:lnRef>
-          <a:fillRef idx="3">
-            <a:schemeClr val="accent1"/>
-          </a:fillRef>
-          <a:effectRef idx="2">
-            <a:schemeClr val="accent1"/>
-          </a:effectRef>
-          <a:fontRef idx="minor">
-            <a:schemeClr val="lt1"/>
-          </a:fontRef>
-        </p:style>
         <p:txBody>
           <a:bodyPr rtlCol="0" anchor="ctr"/>
           <a:lstStyle/>
@@ -3683,7 +3586,7 @@
                 <a:solidFill>
                   <a:srgbClr val="9AA7BD"/>
                 </a:solidFill>
-                <a:latin typeface="Calibri"/>
+                <a:latin typeface="Arial"/>
               </a:rPr>
               <a:t>ON-TIME PERFORMANCE, KEY ROUTES</a:t>
             </a:r>
@@ -3725,7 +3628,7 @@
                 <a:solidFill>
                   <a:srgbClr val="9AA7BD"/>
                 </a:solidFill>
-                <a:latin typeface="Calibri"/>
+                <a:latin typeface="Arial"/>
               </a:rPr>
               <a:t>94.2%</a:t>
             </a:r>
@@ -3734,7 +3637,7 @@
                 <a:solidFill>
                   <a:srgbClr val="9AA7BD"/>
                 </a:solidFill>
-                <a:latin typeface="Calibri"/>
+                <a:latin typeface="Arial"/>
               </a:rPr>
               <a:t>   in 2020</a:t>
             </a:r>
@@ -3776,7 +3679,7 @@
                 <a:solidFill>
                   <a:srgbClr val="FF9E1B"/>
                 </a:solidFill>
-                <a:latin typeface="Calibri"/>
+                <a:latin typeface="Arial"/>
               </a:rPr>
               <a:t>73.6%</a:t>
             </a:r>
@@ -3785,7 +3688,7 @@
                 <a:solidFill>
                   <a:srgbClr val="9AA7BD"/>
                 </a:solidFill>
-                <a:latin typeface="Calibri"/>
+                <a:latin typeface="Arial"/>
               </a:rPr>
               <a:t>   by 2023</a:t>
             </a:r>
@@ -3827,7 +3730,7 @@
                 <a:solidFill>
                   <a:srgbClr val="9AA7BD"/>
                 </a:solidFill>
-                <a:latin typeface="Calibri"/>
+                <a:latin typeface="Arial"/>
               </a:rPr>
               <a:t>A 20.6 point fall in just three years.</a:t>
             </a:r>
@@ -3860,20 +3763,6 @@
           </a:ln>
           <a:effectLst/>
         </p:spPr>
-        <p:style>
-          <a:lnRef idx="1">
-            <a:schemeClr val="accent1"/>
-          </a:lnRef>
-          <a:fillRef idx="3">
-            <a:schemeClr val="accent1"/>
-          </a:fillRef>
-          <a:effectRef idx="2">
-            <a:schemeClr val="accent1"/>
-          </a:effectRef>
-          <a:fontRef idx="minor">
-            <a:schemeClr val="lt1"/>
-          </a:fontRef>
-        </p:style>
         <p:txBody>
           <a:bodyPr rtlCol="0" anchor="ctr"/>
           <a:lstStyle/>
@@ -3917,7 +3806,7 @@
                 <a:solidFill>
                   <a:srgbClr val="4A9EFF"/>
                 </a:solidFill>
-                <a:latin typeface="Calibri"/>
+                <a:latin typeface="Arial"/>
               </a:rPr>
               <a:t>19M</a:t>
             </a:r>
@@ -3962,7 +3851,7 @@
                 <a:solidFill>
                   <a:srgbClr val="F4F7FC"/>
                 </a:solidFill>
-                <a:latin typeface="Calibri"/>
+                <a:latin typeface="Arial"/>
               </a:rPr>
               <a:t>passengers carried every single day</a:t>
             </a:r>
@@ -3995,20 +3884,6 @@
           </a:ln>
           <a:effectLst/>
         </p:spPr>
-        <p:style>
-          <a:lnRef idx="1">
-            <a:schemeClr val="accent1"/>
-          </a:lnRef>
-          <a:fillRef idx="3">
-            <a:schemeClr val="accent1"/>
-          </a:fillRef>
-          <a:effectRef idx="2">
-            <a:schemeClr val="accent1"/>
-          </a:effectRef>
-          <a:fontRef idx="minor">
-            <a:schemeClr val="lt1"/>
-          </a:fontRef>
-        </p:style>
         <p:txBody>
           <a:bodyPr rtlCol="0" anchor="ctr"/>
           <a:lstStyle/>
@@ -4052,7 +3927,7 @@
                 <a:solidFill>
                   <a:srgbClr val="4A9EFF"/>
                 </a:solidFill>
-                <a:latin typeface="Calibri"/>
+                <a:latin typeface="Arial"/>
               </a:rPr>
               <a:t>69,000 km</a:t>
             </a:r>
@@ -4097,7 +3972,7 @@
                 <a:solidFill>
                   <a:srgbClr val="F4F7FC"/>
                 </a:solidFill>
-                <a:latin typeface="Calibri"/>
+                <a:latin typeface="Arial"/>
               </a:rPr>
               <a:t>of track across the network</a:t>
             </a:r>
@@ -4130,20 +4005,6 @@
           </a:ln>
           <a:effectLst/>
         </p:spPr>
-        <p:style>
-          <a:lnRef idx="1">
-            <a:schemeClr val="accent1"/>
-          </a:lnRef>
-          <a:fillRef idx="3">
-            <a:schemeClr val="accent1"/>
-          </a:fillRef>
-          <a:effectRef idx="2">
-            <a:schemeClr val="accent1"/>
-          </a:effectRef>
-          <a:fontRef idx="minor">
-            <a:schemeClr val="lt1"/>
-          </a:fontRef>
-        </p:style>
         <p:txBody>
           <a:bodyPr rtlCol="0" anchor="ctr"/>
           <a:lstStyle/>
@@ -4187,7 +4048,7 @@
                 <a:solidFill>
                   <a:srgbClr val="4A9EFF"/>
                 </a:solidFill>
-                <a:latin typeface="Calibri"/>
+                <a:latin typeface="Arial"/>
               </a:rPr>
               <a:t>0</a:t>
             </a:r>
@@ -4232,7 +4093,7 @@
                 <a:solidFill>
                   <a:srgbClr val="F4F7FC"/>
                 </a:solidFill>
-                <a:latin typeface="Calibri"/>
+                <a:latin typeface="Arial"/>
               </a:rPr>
               <a:t>real-time, system-wide intelligence today</a:t>
             </a:r>
@@ -4274,7 +4135,7 @@
                 <a:solidFill>
                   <a:srgbClr val="9AA7BD"/>
                 </a:solidFill>
-                <a:latin typeface="Calibri"/>
+                <a:latin typeface="Arial"/>
               </a:rPr>
               <a:t>01</a:t>
             </a:r>
@@ -4316,7 +4177,7 @@
                 <a:solidFill>
                   <a:srgbClr val="9AA7BD"/>
                 </a:solidFill>
-                <a:latin typeface="Calibri"/>
+                <a:latin typeface="Arial"/>
               </a:rPr>
               <a:t>Rail Saarthi</a:t>
             </a:r>
@@ -4363,20 +4224,6 @@
           </a:ln>
           <a:effectLst/>
         </p:spPr>
-        <p:style>
-          <a:lnRef idx="1">
-            <a:schemeClr val="accent1"/>
-          </a:lnRef>
-          <a:fillRef idx="3">
-            <a:schemeClr val="accent1"/>
-          </a:fillRef>
-          <a:effectRef idx="2">
-            <a:schemeClr val="accent1"/>
-          </a:effectRef>
-          <a:fontRef idx="minor">
-            <a:schemeClr val="lt1"/>
-          </a:fontRef>
-        </p:style>
         <p:txBody>
           <a:bodyPr rtlCol="0" anchor="ctr"/>
           <a:lstStyle/>
@@ -4407,20 +4254,6 @@
           </a:ln>
           <a:effectLst/>
         </p:spPr>
-        <p:style>
-          <a:lnRef idx="1">
-            <a:schemeClr val="accent1"/>
-          </a:lnRef>
-          <a:fillRef idx="3">
-            <a:schemeClr val="accent1"/>
-          </a:fillRef>
-          <a:effectRef idx="2">
-            <a:schemeClr val="accent1"/>
-          </a:effectRef>
-          <a:fontRef idx="minor">
-            <a:schemeClr val="lt1"/>
-          </a:fontRef>
-        </p:style>
         <p:txBody>
           <a:bodyPr rtlCol="0" anchor="ctr"/>
           <a:lstStyle/>
@@ -4464,7 +4297,7 @@
                 <a:solidFill>
                   <a:srgbClr val="4A9EFF"/>
                 </a:solidFill>
-                <a:latin typeface="Calibri"/>
+                <a:latin typeface="Arial"/>
               </a:rPr>
               <a:t>CURRENT PAIN POINTS</a:t>
             </a:r>
@@ -4506,7 +4339,7 @@
                 <a:solidFill>
                   <a:srgbClr val="F4F7FC"/>
                 </a:solidFill>
-                <a:latin typeface="Calibri"/>
+                <a:latin typeface="Arial"/>
               </a:rPr>
               <a:t>Where the system breaks down today</a:t>
             </a:r>
@@ -4539,20 +4372,6 @@
           </a:ln>
           <a:effectLst/>
         </p:spPr>
-        <p:style>
-          <a:lnRef idx="1">
-            <a:schemeClr val="accent1"/>
-          </a:lnRef>
-          <a:fillRef idx="3">
-            <a:schemeClr val="accent1"/>
-          </a:fillRef>
-          <a:effectRef idx="2">
-            <a:schemeClr val="accent1"/>
-          </a:effectRef>
-          <a:fontRef idx="minor">
-            <a:schemeClr val="lt1"/>
-          </a:fontRef>
-        </p:style>
         <p:txBody>
           <a:bodyPr rtlCol="0" anchor="ctr"/>
           <a:lstStyle/>
@@ -4583,20 +4402,6 @@
           </a:ln>
           <a:effectLst/>
         </p:spPr>
-        <p:style>
-          <a:lnRef idx="1">
-            <a:schemeClr val="accent1"/>
-          </a:lnRef>
-          <a:fillRef idx="3">
-            <a:schemeClr val="accent1"/>
-          </a:fillRef>
-          <a:effectRef idx="2">
-            <a:schemeClr val="accent1"/>
-          </a:effectRef>
-          <a:fontRef idx="minor">
-            <a:schemeClr val="lt1"/>
-          </a:fontRef>
-        </p:style>
         <p:txBody>
           <a:bodyPr rtlCol="0" anchor="ctr"/>
           <a:lstStyle/>
@@ -4640,7 +4445,7 @@
                 <a:solidFill>
                   <a:srgbClr val="F4F7FC"/>
                 </a:solidFill>
-                <a:latin typeface="Calibri"/>
+                <a:latin typeface="Arial"/>
               </a:rPr>
               <a:t>Chronic delays</a:t>
             </a:r>
@@ -4685,7 +4490,7 @@
                 <a:solidFill>
                   <a:srgbClr val="9AA7BD"/>
                 </a:solidFill>
-                <a:latin typeface="Calibri"/>
+                <a:latin typeface="Arial"/>
               </a:rPr>
               <a:t>80% of key routes run over capacity, with no slack to absorb a single slip.</a:t>
             </a:r>
@@ -4718,20 +4523,6 @@
           </a:ln>
           <a:effectLst/>
         </p:spPr>
-        <p:style>
-          <a:lnRef idx="1">
-            <a:schemeClr val="accent1"/>
-          </a:lnRef>
-          <a:fillRef idx="3">
-            <a:schemeClr val="accent1"/>
-          </a:fillRef>
-          <a:effectRef idx="2">
-            <a:schemeClr val="accent1"/>
-          </a:effectRef>
-          <a:fontRef idx="minor">
-            <a:schemeClr val="lt1"/>
-          </a:fontRef>
-        </p:style>
         <p:txBody>
           <a:bodyPr rtlCol="0" anchor="ctr"/>
           <a:lstStyle/>
@@ -4762,20 +4553,6 @@
           </a:ln>
           <a:effectLst/>
         </p:spPr>
-        <p:style>
-          <a:lnRef idx="1">
-            <a:schemeClr val="accent1"/>
-          </a:lnRef>
-          <a:fillRef idx="3">
-            <a:schemeClr val="accent1"/>
-          </a:fillRef>
-          <a:effectRef idx="2">
-            <a:schemeClr val="accent1"/>
-          </a:effectRef>
-          <a:fontRef idx="minor">
-            <a:schemeClr val="lt1"/>
-          </a:fontRef>
-        </p:style>
         <p:txBody>
           <a:bodyPr rtlCol="0" anchor="ctr"/>
           <a:lstStyle/>
@@ -4819,7 +4596,7 @@
                 <a:solidFill>
                   <a:srgbClr val="F4F7FC"/>
                 </a:solidFill>
-                <a:latin typeface="Calibri"/>
+                <a:latin typeface="Arial"/>
               </a:rPr>
               <a:t>Fragmented scheduling</a:t>
             </a:r>
@@ -4864,7 +4641,7 @@
                 <a:solidFill>
                   <a:srgbClr val="9AA7BD"/>
                 </a:solidFill>
-                <a:latin typeface="Calibri"/>
+                <a:latin typeface="Arial"/>
               </a:rPr>
               <a:t>Crew and platform assignments juggled by hand, control center to control center.</a:t>
             </a:r>
@@ -4897,20 +4674,6 @@
           </a:ln>
           <a:effectLst/>
         </p:spPr>
-        <p:style>
-          <a:lnRef idx="1">
-            <a:schemeClr val="accent1"/>
-          </a:lnRef>
-          <a:fillRef idx="3">
-            <a:schemeClr val="accent1"/>
-          </a:fillRef>
-          <a:effectRef idx="2">
-            <a:schemeClr val="accent1"/>
-          </a:effectRef>
-          <a:fontRef idx="minor">
-            <a:schemeClr val="lt1"/>
-          </a:fontRef>
-        </p:style>
         <p:txBody>
           <a:bodyPr rtlCol="0" anchor="ctr"/>
           <a:lstStyle/>
@@ -4941,20 +4704,6 @@
           </a:ln>
           <a:effectLst/>
         </p:spPr>
-        <p:style>
-          <a:lnRef idx="1">
-            <a:schemeClr val="accent1"/>
-          </a:lnRef>
-          <a:fillRef idx="3">
-            <a:schemeClr val="accent1"/>
-          </a:fillRef>
-          <a:effectRef idx="2">
-            <a:schemeClr val="accent1"/>
-          </a:effectRef>
-          <a:fontRef idx="minor">
-            <a:schemeClr val="lt1"/>
-          </a:fontRef>
-        </p:style>
         <p:txBody>
           <a:bodyPr rtlCol="0" anchor="ctr"/>
           <a:lstStyle/>
@@ -4998,7 +4747,7 @@
                 <a:solidFill>
                   <a:srgbClr val="F4F7FC"/>
                 </a:solidFill>
-                <a:latin typeface="Calibri"/>
+                <a:latin typeface="Arial"/>
               </a:rPr>
               <a:t>Aging infrastructure</a:t>
             </a:r>
@@ -5043,7 +4792,7 @@
                 <a:solidFill>
                   <a:srgbClr val="9AA7BD"/>
                 </a:solidFill>
-                <a:latin typeface="Calibri"/>
+                <a:latin typeface="Arial"/>
               </a:rPr>
               <a:t>British-era signaling still gates throughput on critical sections.</a:t>
             </a:r>
@@ -5076,20 +4825,6 @@
           </a:ln>
           <a:effectLst/>
         </p:spPr>
-        <p:style>
-          <a:lnRef idx="1">
-            <a:schemeClr val="accent1"/>
-          </a:lnRef>
-          <a:fillRef idx="3">
-            <a:schemeClr val="accent1"/>
-          </a:fillRef>
-          <a:effectRef idx="2">
-            <a:schemeClr val="accent1"/>
-          </a:effectRef>
-          <a:fontRef idx="minor">
-            <a:schemeClr val="lt1"/>
-          </a:fontRef>
-        </p:style>
         <p:txBody>
           <a:bodyPr rtlCol="0" anchor="ctr"/>
           <a:lstStyle/>
@@ -5120,20 +4855,6 @@
           </a:ln>
           <a:effectLst/>
         </p:spPr>
-        <p:style>
-          <a:lnRef idx="1">
-            <a:schemeClr val="accent1"/>
-          </a:lnRef>
-          <a:fillRef idx="3">
-            <a:schemeClr val="accent1"/>
-          </a:fillRef>
-          <a:effectRef idx="2">
-            <a:schemeClr val="accent1"/>
-          </a:effectRef>
-          <a:fontRef idx="minor">
-            <a:schemeClr val="lt1"/>
-          </a:fontRef>
-        </p:style>
         <p:txBody>
           <a:bodyPr rtlCol="0" anchor="ctr"/>
           <a:lstStyle/>
@@ -5177,7 +4898,7 @@
                 <a:solidFill>
                   <a:srgbClr val="F4F7FC"/>
                 </a:solidFill>
-                <a:latin typeface="Calibri"/>
+                <a:latin typeface="Arial"/>
               </a:rPr>
               <a:t>No proactive comms</a:t>
             </a:r>
@@ -5222,7 +4943,7 @@
                 <a:solidFill>
                   <a:srgbClr val="9AA7BD"/>
                 </a:solidFill>
-                <a:latin typeface="Calibri"/>
+                <a:latin typeface="Arial"/>
               </a:rPr>
               <a:t>Passengers learn of disruptions late, if at all, with no live, trustworthy updates.</a:t>
             </a:r>
@@ -5255,20 +4976,6 @@
           </a:ln>
           <a:effectLst/>
         </p:spPr>
-        <p:style>
-          <a:lnRef idx="1">
-            <a:schemeClr val="accent1"/>
-          </a:lnRef>
-          <a:fillRef idx="3">
-            <a:schemeClr val="accent1"/>
-          </a:fillRef>
-          <a:effectRef idx="2">
-            <a:schemeClr val="accent1"/>
-          </a:effectRef>
-          <a:fontRef idx="minor">
-            <a:schemeClr val="lt1"/>
-          </a:fontRef>
-        </p:style>
         <p:txBody>
           <a:bodyPr rtlCol="0" anchor="ctr"/>
           <a:lstStyle/>
@@ -5299,20 +5006,6 @@
           </a:ln>
           <a:effectLst/>
         </p:spPr>
-        <p:style>
-          <a:lnRef idx="1">
-            <a:schemeClr val="accent1"/>
-          </a:lnRef>
-          <a:fillRef idx="3">
-            <a:schemeClr val="accent1"/>
-          </a:fillRef>
-          <a:effectRef idx="2">
-            <a:schemeClr val="accent1"/>
-          </a:effectRef>
-          <a:fontRef idx="minor">
-            <a:schemeClr val="lt1"/>
-          </a:fontRef>
-        </p:style>
         <p:txBody>
           <a:bodyPr rtlCol="0" anchor="ctr"/>
           <a:lstStyle/>
@@ -5356,7 +5049,7 @@
                 <a:solidFill>
                   <a:srgbClr val="F4F7FC"/>
                 </a:solidFill>
-                <a:latin typeface="Calibri"/>
+                <a:latin typeface="Arial"/>
               </a:rPr>
               <a:t>Freight vs passenger conflict</a:t>
             </a:r>
@@ -5401,7 +5094,7 @@
                 <a:solidFill>
                   <a:srgbClr val="9AA7BD"/>
                 </a:solidFill>
-                <a:latin typeface="Calibri"/>
+                <a:latin typeface="Arial"/>
               </a:rPr>
               <a:t>Shared tracks force constant trade-offs with no system-wide optimizer.</a:t>
             </a:r>
@@ -5434,20 +5127,6 @@
           </a:ln>
           <a:effectLst/>
         </p:spPr>
-        <p:style>
-          <a:lnRef idx="1">
-            <a:schemeClr val="accent1"/>
-          </a:lnRef>
-          <a:fillRef idx="3">
-            <a:schemeClr val="accent1"/>
-          </a:fillRef>
-          <a:effectRef idx="2">
-            <a:schemeClr val="accent1"/>
-          </a:effectRef>
-          <a:fontRef idx="minor">
-            <a:schemeClr val="lt1"/>
-          </a:fontRef>
-        </p:style>
         <p:txBody>
           <a:bodyPr rtlCol="0" anchor="ctr"/>
           <a:lstStyle/>
@@ -5478,20 +5157,6 @@
           </a:ln>
           <a:effectLst/>
         </p:spPr>
-        <p:style>
-          <a:lnRef idx="1">
-            <a:schemeClr val="accent1"/>
-          </a:lnRef>
-          <a:fillRef idx="3">
-            <a:schemeClr val="accent1"/>
-          </a:fillRef>
-          <a:effectRef idx="2">
-            <a:schemeClr val="accent1"/>
-          </a:effectRef>
-          <a:fontRef idx="minor">
-            <a:schemeClr val="lt1"/>
-          </a:fontRef>
-        </p:style>
         <p:txBody>
           <a:bodyPr rtlCol="0" anchor="ctr"/>
           <a:lstStyle/>
@@ -5535,7 +5200,7 @@
                 <a:solidFill>
                   <a:srgbClr val="F4F7FC"/>
                 </a:solidFill>
-                <a:latin typeface="Calibri"/>
+                <a:latin typeface="Arial"/>
               </a:rPr>
               <a:t>Siloed control centers</a:t>
             </a:r>
@@ -5580,7 +5245,7 @@
                 <a:solidFill>
                   <a:srgbClr val="9AA7BD"/>
                 </a:solidFill>
-                <a:latin typeface="Calibri"/>
+                <a:latin typeface="Arial"/>
               </a:rPr>
               <a:t>Each zone sees its own slice; no shared, real-time network awareness.</a:t>
             </a:r>
@@ -5622,7 +5287,7 @@
                 <a:solidFill>
                   <a:srgbClr val="9AA7BD"/>
                 </a:solidFill>
-                <a:latin typeface="Calibri"/>
+                <a:latin typeface="Arial"/>
               </a:rPr>
               <a:t>02</a:t>
             </a:r>
@@ -5664,7 +5329,7 @@
                 <a:solidFill>
                   <a:srgbClr val="9AA7BD"/>
                 </a:solidFill>
-                <a:latin typeface="Calibri"/>
+                <a:latin typeface="Arial"/>
               </a:rPr>
               <a:t>Rail Saarthi</a:t>
             </a:r>
@@ -5711,20 +5376,6 @@
           </a:ln>
           <a:effectLst/>
         </p:spPr>
-        <p:style>
-          <a:lnRef idx="1">
-            <a:schemeClr val="accent1"/>
-          </a:lnRef>
-          <a:fillRef idx="3">
-            <a:schemeClr val="accent1"/>
-          </a:fillRef>
-          <a:effectRef idx="2">
-            <a:schemeClr val="accent1"/>
-          </a:effectRef>
-          <a:fontRef idx="minor">
-            <a:schemeClr val="lt1"/>
-          </a:fontRef>
-        </p:style>
         <p:txBody>
           <a:bodyPr rtlCol="0" anchor="ctr"/>
           <a:lstStyle/>
@@ -5755,20 +5406,6 @@
           </a:ln>
           <a:effectLst/>
         </p:spPr>
-        <p:style>
-          <a:lnRef idx="1">
-            <a:schemeClr val="accent1"/>
-          </a:lnRef>
-          <a:fillRef idx="3">
-            <a:schemeClr val="accent1"/>
-          </a:fillRef>
-          <a:effectRef idx="2">
-            <a:schemeClr val="accent1"/>
-          </a:effectRef>
-          <a:fontRef idx="minor">
-            <a:schemeClr val="lt1"/>
-          </a:fontRef>
-        </p:style>
         <p:txBody>
           <a:bodyPr rtlCol="0" anchor="ctr"/>
           <a:lstStyle/>
@@ -5812,7 +5449,7 @@
                 <a:solidFill>
                   <a:srgbClr val="4A9EFF"/>
                 </a:solidFill>
-                <a:latin typeface="Calibri"/>
+                <a:latin typeface="Arial"/>
               </a:rPr>
               <a:t>SOLUTION</a:t>
             </a:r>
@@ -5854,7 +5491,7 @@
                 <a:solidFill>
                   <a:srgbClr val="F4F7FC"/>
                 </a:solidFill>
-                <a:latin typeface="Calibri"/>
+                <a:latin typeface="Arial"/>
               </a:rPr>
               <a:t>Rail Saarthi</a:t>
             </a:r>
@@ -5863,7 +5500,7 @@
                 <a:solidFill>
                   <a:srgbClr val="4A9EFF"/>
                 </a:solidFill>
-                <a:latin typeface="Calibri"/>
+                <a:latin typeface="Arial"/>
               </a:rPr>
               <a:t>: an agentic OS for Indian Railways</a:t>
             </a:r>
@@ -5896,20 +5533,6 @@
           </a:ln>
           <a:effectLst/>
         </p:spPr>
-        <p:style>
-          <a:lnRef idx="1">
-            <a:schemeClr val="accent1"/>
-          </a:lnRef>
-          <a:fillRef idx="3">
-            <a:schemeClr val="accent1"/>
-          </a:fillRef>
-          <a:effectRef idx="2">
-            <a:schemeClr val="accent1"/>
-          </a:effectRef>
-          <a:fontRef idx="minor">
-            <a:schemeClr val="lt1"/>
-          </a:fontRef>
-        </p:style>
         <p:txBody>
           <a:bodyPr rtlCol="0" anchor="ctr"/>
           <a:lstStyle/>
@@ -5940,20 +5563,6 @@
           </a:ln>
           <a:effectLst/>
         </p:spPr>
-        <p:style>
-          <a:lnRef idx="1">
-            <a:schemeClr val="accent1"/>
-          </a:lnRef>
-          <a:fillRef idx="3">
-            <a:schemeClr val="accent1"/>
-          </a:fillRef>
-          <a:effectRef idx="2">
-            <a:schemeClr val="accent1"/>
-          </a:effectRef>
-          <a:fontRef idx="minor">
-            <a:schemeClr val="lt1"/>
-          </a:fontRef>
-        </p:style>
         <p:txBody>
           <a:bodyPr rtlCol="0" anchor="ctr"/>
           <a:lstStyle/>
@@ -5997,7 +5606,7 @@
                 <a:solidFill>
                   <a:srgbClr val="4A9EFF"/>
                 </a:solidFill>
-                <a:latin typeface="Calibri"/>
+                <a:latin typeface="Arial"/>
               </a:rPr>
               <a:t>What it is</a:t>
             </a:r>
@@ -6042,7 +5651,7 @@
                 <a:solidFill>
                   <a:srgbClr val="F4F7FC"/>
                 </a:solidFill>
-                <a:latin typeface="Calibri"/>
+                <a:latin typeface="Arial"/>
               </a:rPr>
               <a:t>A multi-agent AI system: Train, Station, Crew, Maintenance and Passenger agents coordinating on a live digital twin.</a:t>
             </a:r>
@@ -6075,20 +5684,6 @@
           </a:ln>
           <a:effectLst/>
         </p:spPr>
-        <p:style>
-          <a:lnRef idx="1">
-            <a:schemeClr val="accent1"/>
-          </a:lnRef>
-          <a:fillRef idx="3">
-            <a:schemeClr val="accent1"/>
-          </a:fillRef>
-          <a:effectRef idx="2">
-            <a:schemeClr val="accent1"/>
-          </a:effectRef>
-          <a:fontRef idx="minor">
-            <a:schemeClr val="lt1"/>
-          </a:fontRef>
-        </p:style>
         <p:txBody>
           <a:bodyPr rtlCol="0" anchor="ctr"/>
           <a:lstStyle/>
@@ -6119,20 +5714,6 @@
           </a:ln>
           <a:effectLst/>
         </p:spPr>
-        <p:style>
-          <a:lnRef idx="1">
-            <a:schemeClr val="accent1"/>
-          </a:lnRef>
-          <a:fillRef idx="3">
-            <a:schemeClr val="accent1"/>
-          </a:fillRef>
-          <a:effectRef idx="2">
-            <a:schemeClr val="accent1"/>
-          </a:effectRef>
-          <a:fontRef idx="minor">
-            <a:schemeClr val="lt1"/>
-          </a:fontRef>
-        </p:style>
         <p:txBody>
           <a:bodyPr rtlCol="0" anchor="ctr"/>
           <a:lstStyle/>
@@ -6176,7 +5757,7 @@
                 <a:solidFill>
                   <a:srgbClr val="FF9E1B"/>
                 </a:solidFill>
-                <a:latin typeface="Calibri"/>
+                <a:latin typeface="Arial"/>
               </a:rPr>
               <a:t>What it does</a:t>
             </a:r>
@@ -6221,7 +5802,7 @@
                 <a:solidFill>
                   <a:srgbClr val="F4F7FC"/>
                 </a:solidFill>
-                <a:latin typeface="Calibri"/>
+                <a:latin typeface="Arial"/>
               </a:rPr>
               <a:t>Makes real-time decisions across trains, stations, crew and freight: detect a delay, reroute platforms, swap crew, alert passengers.</a:t>
             </a:r>
@@ -6254,20 +5835,6 @@
           </a:ln>
           <a:effectLst/>
         </p:spPr>
-        <p:style>
-          <a:lnRef idx="1">
-            <a:schemeClr val="accent1"/>
-          </a:lnRef>
-          <a:fillRef idx="3">
-            <a:schemeClr val="accent1"/>
-          </a:fillRef>
-          <a:effectRef idx="2">
-            <a:schemeClr val="accent1"/>
-          </a:effectRef>
-          <a:fontRef idx="minor">
-            <a:schemeClr val="lt1"/>
-          </a:fontRef>
-        </p:style>
         <p:txBody>
           <a:bodyPr rtlCol="0" anchor="ctr"/>
           <a:lstStyle/>
@@ -6298,20 +5865,6 @@
           </a:ln>
           <a:effectLst/>
         </p:spPr>
-        <p:style>
-          <a:lnRef idx="1">
-            <a:schemeClr val="accent1"/>
-          </a:lnRef>
-          <a:fillRef idx="3">
-            <a:schemeClr val="accent1"/>
-          </a:fillRef>
-          <a:effectRef idx="2">
-            <a:schemeClr val="accent1"/>
-          </a:effectRef>
-          <a:fontRef idx="minor">
-            <a:schemeClr val="lt1"/>
-          </a:fontRef>
-        </p:style>
         <p:txBody>
           <a:bodyPr rtlCol="0" anchor="ctr"/>
           <a:lstStyle/>
@@ -6355,7 +5908,7 @@
                 <a:solidFill>
                   <a:srgbClr val="35D07F"/>
                 </a:solidFill>
-                <a:latin typeface="Calibri"/>
+                <a:latin typeface="Arial"/>
               </a:rPr>
               <a:t>What it replaces</a:t>
             </a:r>
@@ -6400,7 +5953,7 @@
                 <a:solidFill>
                   <a:srgbClr val="F4F7FC"/>
                 </a:solidFill>
-                <a:latin typeface="Calibri"/>
+                <a:latin typeface="Arial"/>
               </a:rPr>
               <a:t>Reactive, manual control-room firefighting → proactive, autonomous coordination that self-heals the timetable.</a:t>
             </a:r>
@@ -6442,7 +5995,7 @@
                 <a:solidFill>
                   <a:srgbClr val="9AA7BD"/>
                 </a:solidFill>
-                <a:latin typeface="Calibri"/>
+                <a:latin typeface="Arial"/>
               </a:rPr>
               <a:t>Deterministic rules decide what's feasible. LLMs choose among safe options and explain why.</a:t>
             </a:r>
@@ -6484,7 +6037,7 @@
                 <a:solidFill>
                   <a:srgbClr val="9AA7BD"/>
                 </a:solidFill>
-                <a:latin typeface="Calibri"/>
+                <a:latin typeface="Arial"/>
               </a:rPr>
               <a:t>03</a:t>
             </a:r>
@@ -6526,7 +6079,7 @@
                 <a:solidFill>
                   <a:srgbClr val="9AA7BD"/>
                 </a:solidFill>
-                <a:latin typeface="Calibri"/>
+                <a:latin typeface="Arial"/>
               </a:rPr>
               <a:t>Rail Saarthi</a:t>
             </a:r>
@@ -6573,20 +6126,6 @@
           </a:ln>
           <a:effectLst/>
         </p:spPr>
-        <p:style>
-          <a:lnRef idx="1">
-            <a:schemeClr val="accent1"/>
-          </a:lnRef>
-          <a:fillRef idx="3">
-            <a:schemeClr val="accent1"/>
-          </a:fillRef>
-          <a:effectRef idx="2">
-            <a:schemeClr val="accent1"/>
-          </a:effectRef>
-          <a:fontRef idx="minor">
-            <a:schemeClr val="lt1"/>
-          </a:fontRef>
-        </p:style>
         <p:txBody>
           <a:bodyPr rtlCol="0" anchor="ctr"/>
           <a:lstStyle/>
@@ -6617,20 +6156,6 @@
           </a:ln>
           <a:effectLst/>
         </p:spPr>
-        <p:style>
-          <a:lnRef idx="1">
-            <a:schemeClr val="accent1"/>
-          </a:lnRef>
-          <a:fillRef idx="3">
-            <a:schemeClr val="accent1"/>
-          </a:fillRef>
-          <a:effectRef idx="2">
-            <a:schemeClr val="accent1"/>
-          </a:effectRef>
-          <a:fontRef idx="minor">
-            <a:schemeClr val="lt1"/>
-          </a:fontRef>
-        </p:style>
         <p:txBody>
           <a:bodyPr rtlCol="0" anchor="ctr"/>
           <a:lstStyle/>
@@ -6674,7 +6199,7 @@
                 <a:solidFill>
                   <a:srgbClr val="4A9EFF"/>
                 </a:solidFill>
-                <a:latin typeface="Calibri"/>
+                <a:latin typeface="Arial"/>
               </a:rPr>
               <a:t>LIVE DEMO</a:t>
             </a:r>
@@ -6716,7 +6241,7 @@
                 <a:solidFill>
                   <a:srgbClr val="F4F7FC"/>
                 </a:solidFill>
-                <a:latin typeface="Calibri"/>
+                <a:latin typeface="Arial"/>
               </a:rPr>
               <a:t>Inject a 25-min delay. Watch the system self-heal.</a:t>
             </a:r>
@@ -6749,20 +6274,6 @@
           </a:ln>
           <a:effectLst/>
         </p:spPr>
-        <p:style>
-          <a:lnRef idx="1">
-            <a:schemeClr val="accent1"/>
-          </a:lnRef>
-          <a:fillRef idx="3">
-            <a:schemeClr val="accent1"/>
-          </a:fillRef>
-          <a:effectRef idx="2">
-            <a:schemeClr val="accent1"/>
-          </a:effectRef>
-          <a:fontRef idx="minor">
-            <a:schemeClr val="lt1"/>
-          </a:fontRef>
-        </p:style>
         <p:txBody>
           <a:bodyPr rtlCol="0" anchor="ctr"/>
           <a:lstStyle/>
@@ -6821,20 +6332,6 @@
           </a:ln>
           <a:effectLst/>
         </p:spPr>
-        <p:style>
-          <a:lnRef idx="1">
-            <a:schemeClr val="accent1"/>
-          </a:lnRef>
-          <a:fillRef idx="3">
-            <a:schemeClr val="accent1"/>
-          </a:fillRef>
-          <a:effectRef idx="2">
-            <a:schemeClr val="accent1"/>
-          </a:effectRef>
-          <a:fontRef idx="minor">
-            <a:schemeClr val="lt1"/>
-          </a:fontRef>
-        </p:style>
         <p:txBody>
           <a:bodyPr rtlCol="0" anchor="ctr"/>
           <a:lstStyle/>
@@ -6865,20 +6362,6 @@
           </a:ln>
           <a:effectLst/>
         </p:spPr>
-        <p:style>
-          <a:lnRef idx="1">
-            <a:schemeClr val="accent1"/>
-          </a:lnRef>
-          <a:fillRef idx="3">
-            <a:schemeClr val="accent1"/>
-          </a:fillRef>
-          <a:effectRef idx="2">
-            <a:schemeClr val="accent1"/>
-          </a:effectRef>
-          <a:fontRef idx="minor">
-            <a:schemeClr val="lt1"/>
-          </a:fontRef>
-        </p:style>
         <p:txBody>
           <a:bodyPr rtlCol="0" anchor="ctr"/>
           <a:lstStyle/>
@@ -6922,7 +6405,7 @@
                 <a:solidFill>
                   <a:srgbClr val="4A9EFF"/>
                 </a:solidFill>
-                <a:latin typeface="Calibri"/>
+                <a:latin typeface="Arial"/>
               </a:rPr>
               <a:t>Corridor map</a:t>
             </a:r>
@@ -6967,7 +6450,7 @@
                 <a:solidFill>
                   <a:srgbClr val="9AA7BD"/>
                 </a:solidFill>
-                <a:latin typeface="Calibri"/>
+                <a:latin typeface="Arial"/>
               </a:rPr>
               <a:t>live train positions on the NDLS to DDU line</a:t>
             </a:r>
@@ -7000,20 +6483,6 @@
           </a:ln>
           <a:effectLst/>
         </p:spPr>
-        <p:style>
-          <a:lnRef idx="1">
-            <a:schemeClr val="accent1"/>
-          </a:lnRef>
-          <a:fillRef idx="3">
-            <a:schemeClr val="accent1"/>
-          </a:fillRef>
-          <a:effectRef idx="2">
-            <a:schemeClr val="accent1"/>
-          </a:effectRef>
-          <a:fontRef idx="minor">
-            <a:schemeClr val="lt1"/>
-          </a:fontRef>
-        </p:style>
         <p:txBody>
           <a:bodyPr rtlCol="0" anchor="ctr"/>
           <a:lstStyle/>
@@ -7044,20 +6513,6 @@
           </a:ln>
           <a:effectLst/>
         </p:spPr>
-        <p:style>
-          <a:lnRef idx="1">
-            <a:schemeClr val="accent1"/>
-          </a:lnRef>
-          <a:fillRef idx="3">
-            <a:schemeClr val="accent1"/>
-          </a:fillRef>
-          <a:effectRef idx="2">
-            <a:schemeClr val="accent1"/>
-          </a:effectRef>
-          <a:fontRef idx="minor">
-            <a:schemeClr val="lt1"/>
-          </a:fontRef>
-        </p:style>
         <p:txBody>
           <a:bodyPr rtlCol="0" anchor="ctr"/>
           <a:lstStyle/>
@@ -7101,7 +6556,7 @@
                 <a:solidFill>
                   <a:srgbClr val="4A9EFF"/>
                 </a:solidFill>
-                <a:latin typeface="Calibri"/>
+                <a:latin typeface="Arial"/>
               </a:rPr>
               <a:t>Agent feed</a:t>
             </a:r>
@@ -7146,7 +6601,7 @@
                 <a:solidFill>
                   <a:srgbClr val="9AA7BD"/>
                 </a:solidFill>
-                <a:latin typeface="Calibri"/>
+                <a:latin typeface="Arial"/>
               </a:rPr>
               <a:t>the cascade resolving, decision by decision</a:t>
             </a:r>
@@ -7179,20 +6634,6 @@
           </a:ln>
           <a:effectLst/>
         </p:spPr>
-        <p:style>
-          <a:lnRef idx="1">
-            <a:schemeClr val="accent1"/>
-          </a:lnRef>
-          <a:fillRef idx="3">
-            <a:schemeClr val="accent1"/>
-          </a:fillRef>
-          <a:effectRef idx="2">
-            <a:schemeClr val="accent1"/>
-          </a:effectRef>
-          <a:fontRef idx="minor">
-            <a:schemeClr val="lt1"/>
-          </a:fontRef>
-        </p:style>
         <p:txBody>
           <a:bodyPr rtlCol="0" anchor="ctr"/>
           <a:lstStyle/>
@@ -7223,20 +6664,6 @@
           </a:ln>
           <a:effectLst/>
         </p:spPr>
-        <p:style>
-          <a:lnRef idx="1">
-            <a:schemeClr val="accent1"/>
-          </a:lnRef>
-          <a:fillRef idx="3">
-            <a:schemeClr val="accent1"/>
-          </a:fillRef>
-          <a:effectRef idx="2">
-            <a:schemeClr val="accent1"/>
-          </a:effectRef>
-          <a:fontRef idx="minor">
-            <a:schemeClr val="lt1"/>
-          </a:fontRef>
-        </p:style>
         <p:txBody>
           <a:bodyPr rtlCol="0" anchor="ctr"/>
           <a:lstStyle/>
@@ -7280,7 +6707,7 @@
                 <a:solidFill>
                   <a:srgbClr val="4A9EFF"/>
                 </a:solidFill>
-                <a:latin typeface="Calibri"/>
+                <a:latin typeface="Arial"/>
               </a:rPr>
               <a:t>Platform timeline</a:t>
             </a:r>
@@ -7325,7 +6752,7 @@
                 <a:solidFill>
                   <a:srgbClr val="9AA7BD"/>
                 </a:solidFill>
-                <a:latin typeface="Calibri"/>
+                <a:latin typeface="Arial"/>
               </a:rPr>
               <a:t>a conflict caught and avoided</a:t>
             </a:r>
@@ -7358,20 +6785,6 @@
           </a:ln>
           <a:effectLst/>
         </p:spPr>
-        <p:style>
-          <a:lnRef idx="1">
-            <a:schemeClr val="accent1"/>
-          </a:lnRef>
-          <a:fillRef idx="3">
-            <a:schemeClr val="accent1"/>
-          </a:fillRef>
-          <a:effectRef idx="2">
-            <a:schemeClr val="accent1"/>
-          </a:effectRef>
-          <a:fontRef idx="minor">
-            <a:schemeClr val="lt1"/>
-          </a:fontRef>
-        </p:style>
         <p:txBody>
           <a:bodyPr rtlCol="0" anchor="ctr"/>
           <a:lstStyle/>
@@ -7402,20 +6815,6 @@
           </a:ln>
           <a:effectLst/>
         </p:spPr>
-        <p:style>
-          <a:lnRef idx="1">
-            <a:schemeClr val="accent1"/>
-          </a:lnRef>
-          <a:fillRef idx="3">
-            <a:schemeClr val="accent1"/>
-          </a:fillRef>
-          <a:effectRef idx="2">
-            <a:schemeClr val="accent1"/>
-          </a:effectRef>
-          <a:fontRef idx="minor">
-            <a:schemeClr val="lt1"/>
-          </a:fontRef>
-        </p:style>
         <p:txBody>
           <a:bodyPr rtlCol="0" anchor="ctr"/>
           <a:lstStyle/>
@@ -7459,7 +6858,7 @@
                 <a:solidFill>
                   <a:srgbClr val="4A9EFF"/>
                 </a:solidFill>
-                <a:latin typeface="Calibri"/>
+                <a:latin typeface="Arial"/>
               </a:rPr>
               <a:t>KPI bar</a:t>
             </a:r>
@@ -7504,7 +6903,7 @@
                 <a:solidFill>
                   <a:srgbClr val="9AA7BD"/>
                 </a:solidFill>
-                <a:latin typeface="Calibri"/>
+                <a:latin typeface="Arial"/>
               </a:rPr>
               <a:t>instant platforming, avg delay, knock-on saved</a:t>
             </a:r>
@@ -7546,7 +6945,7 @@
                 <a:solidFill>
                   <a:srgbClr val="9AA7BD"/>
                 </a:solidFill>
-                <a:latin typeface="Calibri"/>
+                <a:latin typeface="Arial"/>
               </a:rPr>
               <a:t>04</a:t>
             </a:r>
@@ -7588,7 +6987,7 @@
                 <a:solidFill>
                   <a:srgbClr val="9AA7BD"/>
                 </a:solidFill>
-                <a:latin typeface="Calibri"/>
+                <a:latin typeface="Arial"/>
               </a:rPr>
               <a:t>Rail Saarthi</a:t>
             </a:r>
@@ -7635,20 +7034,6 @@
           </a:ln>
           <a:effectLst/>
         </p:spPr>
-        <p:style>
-          <a:lnRef idx="1">
-            <a:schemeClr val="accent1"/>
-          </a:lnRef>
-          <a:fillRef idx="3">
-            <a:schemeClr val="accent1"/>
-          </a:fillRef>
-          <a:effectRef idx="2">
-            <a:schemeClr val="accent1"/>
-          </a:effectRef>
-          <a:fontRef idx="minor">
-            <a:schemeClr val="lt1"/>
-          </a:fontRef>
-        </p:style>
         <p:txBody>
           <a:bodyPr rtlCol="0" anchor="ctr"/>
           <a:lstStyle/>
@@ -7679,20 +7064,6 @@
           </a:ln>
           <a:effectLst/>
         </p:spPr>
-        <p:style>
-          <a:lnRef idx="1">
-            <a:schemeClr val="accent1"/>
-          </a:lnRef>
-          <a:fillRef idx="3">
-            <a:schemeClr val="accent1"/>
-          </a:fillRef>
-          <a:effectRef idx="2">
-            <a:schemeClr val="accent1"/>
-          </a:effectRef>
-          <a:fontRef idx="minor">
-            <a:schemeClr val="lt1"/>
-          </a:fontRef>
-        </p:style>
         <p:txBody>
           <a:bodyPr rtlCol="0" anchor="ctr"/>
           <a:lstStyle/>
@@ -7736,9 +7107,9 @@
                 <a:solidFill>
                   <a:srgbClr val="4A9EFF"/>
                 </a:solidFill>
-                <a:latin typeface="Calibri"/>
-              </a:rPr>
-              <a:t>ARCHITECTURE</a:t>
+                <a:latin typeface="Arial"/>
+              </a:rPr>
+              <a:t>PASSENGER APP</a:t>
             </a:r>
           </a:p>
         </p:txBody>
@@ -7778,918 +7149,47 @@
                 <a:solidFill>
                   <a:srgbClr val="F4F7FC"/>
                 </a:solidFill>
-                <a:latin typeface="Calibri"/>
-              </a:rPr>
-              <a:t>Agents on a shared bus, fed by live rail data</a:t>
-            </a:r>
-          </a:p>
-        </p:txBody>
-      </p:sp>
-      <p:sp>
-        <p:nvSpPr>
-          <p:cNvPr id="6" name="Rounded Rectangle 5"/>
+                <a:latin typeface="Arial"/>
+              </a:rPr>
+              <a:t>The control room, in every passenger's pocket</a:t>
+            </a:r>
+          </a:p>
+        </p:txBody>
+      </p:sp>
+      <p:pic>
+        <p:nvPicPr>
+          <p:cNvPr id="6" name="Picture 5" descr="passenger-app.png"/>
+          <p:cNvPicPr>
+            <a:picLocks noChangeAspect="1"/>
+          </p:cNvPicPr>
+          <p:nvPr/>
+        </p:nvPicPr>
+        <p:blipFill>
+          <a:blip r:embed="rId2"/>
+          <a:stretch>
+            <a:fillRect/>
+          </a:stretch>
+        </p:blipFill>
+        <p:spPr>
+          <a:xfrm>
+            <a:off x="1371600" y="1874519"/>
+            <a:ext cx="2355573" cy="4389120"/>
+          </a:xfrm>
+          <a:prstGeom prst="rect">
+            <a:avLst/>
+          </a:prstGeom>
+        </p:spPr>
+      </p:pic>
+      <p:sp>
+        <p:nvSpPr>
+          <p:cNvPr id="7" name="Rounded Rectangle 6"/>
           <p:cNvSpPr/>
           <p:nvPr/>
         </p:nvSpPr>
         <p:spPr>
           <a:xfrm>
-            <a:off x="640080" y="2057400"/>
-            <a:ext cx="1975104" cy="777240"/>
-          </a:xfrm>
-          <a:prstGeom prst="roundRect">
-            <a:avLst>
-              <a:gd name="adj" fmla="val 8000"/>
-            </a:avLst>
-          </a:prstGeom>
-          <a:solidFill>
-            <a:srgbClr val="16223C"/>
-          </a:solidFill>
-          <a:ln w="15875">
-            <a:solidFill>
-              <a:srgbClr val="4A9EFF"/>
-            </a:solidFill>
-          </a:ln>
-          <a:effectLst/>
-        </p:spPr>
-        <p:style>
-          <a:lnRef idx="1">
-            <a:schemeClr val="accent1"/>
-          </a:lnRef>
-          <a:fillRef idx="3">
-            <a:schemeClr val="accent1"/>
-          </a:fillRef>
-          <a:effectRef idx="2">
-            <a:schemeClr val="accent1"/>
-          </a:effectRef>
-          <a:fontRef idx="minor">
-            <a:schemeClr val="lt1"/>
-          </a:fontRef>
-        </p:style>
-        <p:txBody>
-          <a:bodyPr rtlCol="0" anchor="ctr"/>
-          <a:lstStyle/>
-          <a:p>
-            <a:pPr algn="ctr"/>
-          </a:p>
-        </p:txBody>
-      </p:sp>
-      <p:sp>
-        <p:nvSpPr>
-          <p:cNvPr id="7" name="TextBox 6"/>
-          <p:cNvSpPr txBox="1"/>
-          <p:nvPr/>
-        </p:nvSpPr>
-        <p:spPr>
-          <a:xfrm>
-            <a:off x="640080" y="2057400"/>
-            <a:ext cx="1975104" cy="777240"/>
-          </a:xfrm>
-          <a:prstGeom prst="rect">
-            <a:avLst/>
-          </a:prstGeom>
-          <a:noFill/>
-        </p:spPr>
-        <p:txBody>
-          <a:bodyPr wrap="square" anchor="ctr" lIns="0" rIns="0" tIns="0" bIns="0">
-            <a:spAutoFit/>
-          </a:bodyPr>
-          <a:lstStyle/>
-          <a:p>
-            <a:pPr algn="ctr">
-              <a:spcBef>
-                <a:spcPts val="0"/>
-              </a:spcBef>
-              <a:spcAft>
-                <a:spcPts val="0"/>
-              </a:spcAft>
-            </a:pPr>
-            <a:r>
-              <a:rPr sz="1400" b="1" i="0">
-                <a:solidFill>
-                  <a:srgbClr val="F4F7FC"/>
-                </a:solidFill>
-                <a:latin typeface="Calibri"/>
-              </a:rPr>
-              <a:t>Train</a:t>
-            </a:r>
-          </a:p>
-          <a:p>
-            <a:pPr algn="ctr">
-              <a:spcBef>
-                <a:spcPts val="0"/>
-              </a:spcBef>
-              <a:spcAft>
-                <a:spcPts val="0"/>
-              </a:spcAft>
-            </a:pPr>
-            <a:r>
-              <a:rPr sz="900" b="0" i="0" spc="100">
-                <a:solidFill>
-                  <a:srgbClr val="9AA7BD"/>
-                </a:solidFill>
-                <a:latin typeface="Calibri"/>
-              </a:rPr>
-              <a:t>Agent</a:t>
-            </a:r>
-          </a:p>
-        </p:txBody>
-      </p:sp>
-      <p:sp>
-        <p:nvSpPr>
-          <p:cNvPr id="8" name="Rectangle 7"/>
-          <p:cNvSpPr/>
-          <p:nvPr/>
-        </p:nvSpPr>
-        <p:spPr>
-          <a:xfrm>
-            <a:off x="1618488" y="2834640"/>
-            <a:ext cx="22860" cy="411480"/>
-          </a:xfrm>
-          <a:prstGeom prst="rect">
-            <a:avLst/>
-          </a:prstGeom>
-          <a:solidFill>
-            <a:srgbClr val="243352"/>
-          </a:solidFill>
-          <a:ln>
-            <a:noFill/>
-          </a:ln>
-          <a:effectLst/>
-        </p:spPr>
-        <p:style>
-          <a:lnRef idx="1">
-            <a:schemeClr val="accent1"/>
-          </a:lnRef>
-          <a:fillRef idx="3">
-            <a:schemeClr val="accent1"/>
-          </a:fillRef>
-          <a:effectRef idx="2">
-            <a:schemeClr val="accent1"/>
-          </a:effectRef>
-          <a:fontRef idx="minor">
-            <a:schemeClr val="lt1"/>
-          </a:fontRef>
-        </p:style>
-        <p:txBody>
-          <a:bodyPr rtlCol="0" anchor="ctr"/>
-          <a:lstStyle/>
-          <a:p>
-            <a:pPr algn="ctr"/>
-          </a:p>
-        </p:txBody>
-      </p:sp>
-      <p:sp>
-        <p:nvSpPr>
-          <p:cNvPr id="9" name="Rounded Rectangle 8"/>
-          <p:cNvSpPr/>
-          <p:nvPr/>
-        </p:nvSpPr>
-        <p:spPr>
-          <a:xfrm>
-            <a:off x="2779776" y="2057400"/>
-            <a:ext cx="1975104" cy="777240"/>
-          </a:xfrm>
-          <a:prstGeom prst="roundRect">
-            <a:avLst>
-              <a:gd name="adj" fmla="val 8000"/>
-            </a:avLst>
-          </a:prstGeom>
-          <a:solidFill>
-            <a:srgbClr val="16223C"/>
-          </a:solidFill>
-          <a:ln w="15875">
-            <a:solidFill>
-              <a:srgbClr val="4A9EFF"/>
-            </a:solidFill>
-          </a:ln>
-          <a:effectLst/>
-        </p:spPr>
-        <p:style>
-          <a:lnRef idx="1">
-            <a:schemeClr val="accent1"/>
-          </a:lnRef>
-          <a:fillRef idx="3">
-            <a:schemeClr val="accent1"/>
-          </a:fillRef>
-          <a:effectRef idx="2">
-            <a:schemeClr val="accent1"/>
-          </a:effectRef>
-          <a:fontRef idx="minor">
-            <a:schemeClr val="lt1"/>
-          </a:fontRef>
-        </p:style>
-        <p:txBody>
-          <a:bodyPr rtlCol="0" anchor="ctr"/>
-          <a:lstStyle/>
-          <a:p>
-            <a:pPr algn="ctr"/>
-          </a:p>
-        </p:txBody>
-      </p:sp>
-      <p:sp>
-        <p:nvSpPr>
-          <p:cNvPr id="10" name="TextBox 9"/>
-          <p:cNvSpPr txBox="1"/>
-          <p:nvPr/>
-        </p:nvSpPr>
-        <p:spPr>
-          <a:xfrm>
-            <a:off x="2779776" y="2057400"/>
-            <a:ext cx="1975104" cy="777240"/>
-          </a:xfrm>
-          <a:prstGeom prst="rect">
-            <a:avLst/>
-          </a:prstGeom>
-          <a:noFill/>
-        </p:spPr>
-        <p:txBody>
-          <a:bodyPr wrap="square" anchor="ctr" lIns="0" rIns="0" tIns="0" bIns="0">
-            <a:spAutoFit/>
-          </a:bodyPr>
-          <a:lstStyle/>
-          <a:p>
-            <a:pPr algn="ctr">
-              <a:spcBef>
-                <a:spcPts val="0"/>
-              </a:spcBef>
-              <a:spcAft>
-                <a:spcPts val="0"/>
-              </a:spcAft>
-            </a:pPr>
-            <a:r>
-              <a:rPr sz="1400" b="1" i="0">
-                <a:solidFill>
-                  <a:srgbClr val="F4F7FC"/>
-                </a:solidFill>
-                <a:latin typeface="Calibri"/>
-              </a:rPr>
-              <a:t>Station</a:t>
-            </a:r>
-          </a:p>
-          <a:p>
-            <a:pPr algn="ctr">
-              <a:spcBef>
-                <a:spcPts val="0"/>
-              </a:spcBef>
-              <a:spcAft>
-                <a:spcPts val="0"/>
-              </a:spcAft>
-            </a:pPr>
-            <a:r>
-              <a:rPr sz="900" b="0" i="0" spc="100">
-                <a:solidFill>
-                  <a:srgbClr val="9AA7BD"/>
-                </a:solidFill>
-                <a:latin typeface="Calibri"/>
-              </a:rPr>
-              <a:t>Agent</a:t>
-            </a:r>
-          </a:p>
-        </p:txBody>
-      </p:sp>
-      <p:sp>
-        <p:nvSpPr>
-          <p:cNvPr id="11" name="Rectangle 10"/>
-          <p:cNvSpPr/>
-          <p:nvPr/>
-        </p:nvSpPr>
-        <p:spPr>
-          <a:xfrm>
-            <a:off x="3758184" y="2834640"/>
-            <a:ext cx="22860" cy="411480"/>
-          </a:xfrm>
-          <a:prstGeom prst="rect">
-            <a:avLst/>
-          </a:prstGeom>
-          <a:solidFill>
-            <a:srgbClr val="243352"/>
-          </a:solidFill>
-          <a:ln>
-            <a:noFill/>
-          </a:ln>
-          <a:effectLst/>
-        </p:spPr>
-        <p:style>
-          <a:lnRef idx="1">
-            <a:schemeClr val="accent1"/>
-          </a:lnRef>
-          <a:fillRef idx="3">
-            <a:schemeClr val="accent1"/>
-          </a:fillRef>
-          <a:effectRef idx="2">
-            <a:schemeClr val="accent1"/>
-          </a:effectRef>
-          <a:fontRef idx="minor">
-            <a:schemeClr val="lt1"/>
-          </a:fontRef>
-        </p:style>
-        <p:txBody>
-          <a:bodyPr rtlCol="0" anchor="ctr"/>
-          <a:lstStyle/>
-          <a:p>
-            <a:pPr algn="ctr"/>
-          </a:p>
-        </p:txBody>
-      </p:sp>
-      <p:sp>
-        <p:nvSpPr>
-          <p:cNvPr id="12" name="Rounded Rectangle 11"/>
-          <p:cNvSpPr/>
-          <p:nvPr/>
-        </p:nvSpPr>
-        <p:spPr>
-          <a:xfrm>
-            <a:off x="4919472" y="2057400"/>
-            <a:ext cx="1975104" cy="777240"/>
-          </a:xfrm>
-          <a:prstGeom prst="roundRect">
-            <a:avLst>
-              <a:gd name="adj" fmla="val 8000"/>
-            </a:avLst>
-          </a:prstGeom>
-          <a:solidFill>
-            <a:srgbClr val="16223C"/>
-          </a:solidFill>
-          <a:ln w="15875">
-            <a:solidFill>
-              <a:srgbClr val="4A9EFF"/>
-            </a:solidFill>
-          </a:ln>
-          <a:effectLst/>
-        </p:spPr>
-        <p:style>
-          <a:lnRef idx="1">
-            <a:schemeClr val="accent1"/>
-          </a:lnRef>
-          <a:fillRef idx="3">
-            <a:schemeClr val="accent1"/>
-          </a:fillRef>
-          <a:effectRef idx="2">
-            <a:schemeClr val="accent1"/>
-          </a:effectRef>
-          <a:fontRef idx="minor">
-            <a:schemeClr val="lt1"/>
-          </a:fontRef>
-        </p:style>
-        <p:txBody>
-          <a:bodyPr rtlCol="0" anchor="ctr"/>
-          <a:lstStyle/>
-          <a:p>
-            <a:pPr algn="ctr"/>
-          </a:p>
-        </p:txBody>
-      </p:sp>
-      <p:sp>
-        <p:nvSpPr>
-          <p:cNvPr id="13" name="TextBox 12"/>
-          <p:cNvSpPr txBox="1"/>
-          <p:nvPr/>
-        </p:nvSpPr>
-        <p:spPr>
-          <a:xfrm>
-            <a:off x="4919472" y="2057400"/>
-            <a:ext cx="1975104" cy="777240"/>
-          </a:xfrm>
-          <a:prstGeom prst="rect">
-            <a:avLst/>
-          </a:prstGeom>
-          <a:noFill/>
-        </p:spPr>
-        <p:txBody>
-          <a:bodyPr wrap="square" anchor="ctr" lIns="0" rIns="0" tIns="0" bIns="0">
-            <a:spAutoFit/>
-          </a:bodyPr>
-          <a:lstStyle/>
-          <a:p>
-            <a:pPr algn="ctr">
-              <a:spcBef>
-                <a:spcPts val="0"/>
-              </a:spcBef>
-              <a:spcAft>
-                <a:spcPts val="0"/>
-              </a:spcAft>
-            </a:pPr>
-            <a:r>
-              <a:rPr sz="1400" b="1" i="0">
-                <a:solidFill>
-                  <a:srgbClr val="F4F7FC"/>
-                </a:solidFill>
-                <a:latin typeface="Calibri"/>
-              </a:rPr>
-              <a:t>Crew</a:t>
-            </a:r>
-          </a:p>
-          <a:p>
-            <a:pPr algn="ctr">
-              <a:spcBef>
-                <a:spcPts val="0"/>
-              </a:spcBef>
-              <a:spcAft>
-                <a:spcPts val="0"/>
-              </a:spcAft>
-            </a:pPr>
-            <a:r>
-              <a:rPr sz="900" b="0" i="0" spc="100">
-                <a:solidFill>
-                  <a:srgbClr val="9AA7BD"/>
-                </a:solidFill>
-                <a:latin typeface="Calibri"/>
-              </a:rPr>
-              <a:t>Agent</a:t>
-            </a:r>
-          </a:p>
-        </p:txBody>
-      </p:sp>
-      <p:sp>
-        <p:nvSpPr>
-          <p:cNvPr id="14" name="Rectangle 13"/>
-          <p:cNvSpPr/>
-          <p:nvPr/>
-        </p:nvSpPr>
-        <p:spPr>
-          <a:xfrm>
-            <a:off x="5897880" y="2834640"/>
-            <a:ext cx="22860" cy="411480"/>
-          </a:xfrm>
-          <a:prstGeom prst="rect">
-            <a:avLst/>
-          </a:prstGeom>
-          <a:solidFill>
-            <a:srgbClr val="243352"/>
-          </a:solidFill>
-          <a:ln>
-            <a:noFill/>
-          </a:ln>
-          <a:effectLst/>
-        </p:spPr>
-        <p:style>
-          <a:lnRef idx="1">
-            <a:schemeClr val="accent1"/>
-          </a:lnRef>
-          <a:fillRef idx="3">
-            <a:schemeClr val="accent1"/>
-          </a:fillRef>
-          <a:effectRef idx="2">
-            <a:schemeClr val="accent1"/>
-          </a:effectRef>
-          <a:fontRef idx="minor">
-            <a:schemeClr val="lt1"/>
-          </a:fontRef>
-        </p:style>
-        <p:txBody>
-          <a:bodyPr rtlCol="0" anchor="ctr"/>
-          <a:lstStyle/>
-          <a:p>
-            <a:pPr algn="ctr"/>
-          </a:p>
-        </p:txBody>
-      </p:sp>
-      <p:sp>
-        <p:nvSpPr>
-          <p:cNvPr id="15" name="Rounded Rectangle 14"/>
-          <p:cNvSpPr/>
-          <p:nvPr/>
-        </p:nvSpPr>
-        <p:spPr>
-          <a:xfrm>
-            <a:off x="7059168" y="2057400"/>
-            <a:ext cx="1975104" cy="777240"/>
-          </a:xfrm>
-          <a:prstGeom prst="roundRect">
-            <a:avLst>
-              <a:gd name="adj" fmla="val 8000"/>
-            </a:avLst>
-          </a:prstGeom>
-          <a:solidFill>
-            <a:srgbClr val="16223C"/>
-          </a:solidFill>
-          <a:ln w="15875">
-            <a:solidFill>
-              <a:srgbClr val="4A9EFF"/>
-            </a:solidFill>
-          </a:ln>
-          <a:effectLst/>
-        </p:spPr>
-        <p:style>
-          <a:lnRef idx="1">
-            <a:schemeClr val="accent1"/>
-          </a:lnRef>
-          <a:fillRef idx="3">
-            <a:schemeClr val="accent1"/>
-          </a:fillRef>
-          <a:effectRef idx="2">
-            <a:schemeClr val="accent1"/>
-          </a:effectRef>
-          <a:fontRef idx="minor">
-            <a:schemeClr val="lt1"/>
-          </a:fontRef>
-        </p:style>
-        <p:txBody>
-          <a:bodyPr rtlCol="0" anchor="ctr"/>
-          <a:lstStyle/>
-          <a:p>
-            <a:pPr algn="ctr"/>
-          </a:p>
-        </p:txBody>
-      </p:sp>
-      <p:sp>
-        <p:nvSpPr>
-          <p:cNvPr id="16" name="TextBox 15"/>
-          <p:cNvSpPr txBox="1"/>
-          <p:nvPr/>
-        </p:nvSpPr>
-        <p:spPr>
-          <a:xfrm>
-            <a:off x="7059168" y="2057400"/>
-            <a:ext cx="1975104" cy="777240"/>
-          </a:xfrm>
-          <a:prstGeom prst="rect">
-            <a:avLst/>
-          </a:prstGeom>
-          <a:noFill/>
-        </p:spPr>
-        <p:txBody>
-          <a:bodyPr wrap="square" anchor="ctr" lIns="0" rIns="0" tIns="0" bIns="0">
-            <a:spAutoFit/>
-          </a:bodyPr>
-          <a:lstStyle/>
-          <a:p>
-            <a:pPr algn="ctr">
-              <a:spcBef>
-                <a:spcPts val="0"/>
-              </a:spcBef>
-              <a:spcAft>
-                <a:spcPts val="0"/>
-              </a:spcAft>
-            </a:pPr>
-            <a:r>
-              <a:rPr sz="1400" b="1" i="0">
-                <a:solidFill>
-                  <a:srgbClr val="F4F7FC"/>
-                </a:solidFill>
-                <a:latin typeface="Calibri"/>
-              </a:rPr>
-              <a:t>Maintenance</a:t>
-            </a:r>
-          </a:p>
-          <a:p>
-            <a:pPr algn="ctr">
-              <a:spcBef>
-                <a:spcPts val="0"/>
-              </a:spcBef>
-              <a:spcAft>
-                <a:spcPts val="0"/>
-              </a:spcAft>
-            </a:pPr>
-            <a:r>
-              <a:rPr sz="900" b="0" i="0" spc="100">
-                <a:solidFill>
-                  <a:srgbClr val="9AA7BD"/>
-                </a:solidFill>
-                <a:latin typeface="Calibri"/>
-              </a:rPr>
-              <a:t>Agent</a:t>
-            </a:r>
-          </a:p>
-        </p:txBody>
-      </p:sp>
-      <p:sp>
-        <p:nvSpPr>
-          <p:cNvPr id="17" name="Rectangle 16"/>
-          <p:cNvSpPr/>
-          <p:nvPr/>
-        </p:nvSpPr>
-        <p:spPr>
-          <a:xfrm>
-            <a:off x="8037576" y="2834640"/>
-            <a:ext cx="22860" cy="411480"/>
-          </a:xfrm>
-          <a:prstGeom prst="rect">
-            <a:avLst/>
-          </a:prstGeom>
-          <a:solidFill>
-            <a:srgbClr val="243352"/>
-          </a:solidFill>
-          <a:ln>
-            <a:noFill/>
-          </a:ln>
-          <a:effectLst/>
-        </p:spPr>
-        <p:style>
-          <a:lnRef idx="1">
-            <a:schemeClr val="accent1"/>
-          </a:lnRef>
-          <a:fillRef idx="3">
-            <a:schemeClr val="accent1"/>
-          </a:fillRef>
-          <a:effectRef idx="2">
-            <a:schemeClr val="accent1"/>
-          </a:effectRef>
-          <a:fontRef idx="minor">
-            <a:schemeClr val="lt1"/>
-          </a:fontRef>
-        </p:style>
-        <p:txBody>
-          <a:bodyPr rtlCol="0" anchor="ctr"/>
-          <a:lstStyle/>
-          <a:p>
-            <a:pPr algn="ctr"/>
-          </a:p>
-        </p:txBody>
-      </p:sp>
-      <p:sp>
-        <p:nvSpPr>
-          <p:cNvPr id="18" name="Rounded Rectangle 17"/>
-          <p:cNvSpPr/>
-          <p:nvPr/>
-        </p:nvSpPr>
-        <p:spPr>
-          <a:xfrm>
-            <a:off x="9198864" y="2057400"/>
-            <a:ext cx="1975104" cy="777240"/>
-          </a:xfrm>
-          <a:prstGeom prst="roundRect">
-            <a:avLst>
-              <a:gd name="adj" fmla="val 8000"/>
-            </a:avLst>
-          </a:prstGeom>
-          <a:solidFill>
-            <a:srgbClr val="16223C"/>
-          </a:solidFill>
-          <a:ln w="15875">
-            <a:solidFill>
-              <a:srgbClr val="4A9EFF"/>
-            </a:solidFill>
-          </a:ln>
-          <a:effectLst/>
-        </p:spPr>
-        <p:style>
-          <a:lnRef idx="1">
-            <a:schemeClr val="accent1"/>
-          </a:lnRef>
-          <a:fillRef idx="3">
-            <a:schemeClr val="accent1"/>
-          </a:fillRef>
-          <a:effectRef idx="2">
-            <a:schemeClr val="accent1"/>
-          </a:effectRef>
-          <a:fontRef idx="minor">
-            <a:schemeClr val="lt1"/>
-          </a:fontRef>
-        </p:style>
-        <p:txBody>
-          <a:bodyPr rtlCol="0" anchor="ctr"/>
-          <a:lstStyle/>
-          <a:p>
-            <a:pPr algn="ctr"/>
-          </a:p>
-        </p:txBody>
-      </p:sp>
-      <p:sp>
-        <p:nvSpPr>
-          <p:cNvPr id="19" name="TextBox 18"/>
-          <p:cNvSpPr txBox="1"/>
-          <p:nvPr/>
-        </p:nvSpPr>
-        <p:spPr>
-          <a:xfrm>
-            <a:off x="9198864" y="2057400"/>
-            <a:ext cx="1975104" cy="777240"/>
-          </a:xfrm>
-          <a:prstGeom prst="rect">
-            <a:avLst/>
-          </a:prstGeom>
-          <a:noFill/>
-        </p:spPr>
-        <p:txBody>
-          <a:bodyPr wrap="square" anchor="ctr" lIns="0" rIns="0" tIns="0" bIns="0">
-            <a:spAutoFit/>
-          </a:bodyPr>
-          <a:lstStyle/>
-          <a:p>
-            <a:pPr algn="ctr">
-              <a:spcBef>
-                <a:spcPts val="0"/>
-              </a:spcBef>
-              <a:spcAft>
-                <a:spcPts val="0"/>
-              </a:spcAft>
-            </a:pPr>
-            <a:r>
-              <a:rPr sz="1400" b="1" i="0">
-                <a:solidFill>
-                  <a:srgbClr val="F4F7FC"/>
-                </a:solidFill>
-                <a:latin typeface="Calibri"/>
-              </a:rPr>
-              <a:t>Passenger Info</a:t>
-            </a:r>
-          </a:p>
-          <a:p>
-            <a:pPr algn="ctr">
-              <a:spcBef>
-                <a:spcPts val="0"/>
-              </a:spcBef>
-              <a:spcAft>
-                <a:spcPts val="0"/>
-              </a:spcAft>
-            </a:pPr>
-            <a:r>
-              <a:rPr sz="900" b="0" i="0" spc="100">
-                <a:solidFill>
-                  <a:srgbClr val="9AA7BD"/>
-                </a:solidFill>
-                <a:latin typeface="Calibri"/>
-              </a:rPr>
-              <a:t>Agent</a:t>
-            </a:r>
-          </a:p>
-        </p:txBody>
-      </p:sp>
-      <p:sp>
-        <p:nvSpPr>
-          <p:cNvPr id="20" name="Rectangle 19"/>
-          <p:cNvSpPr/>
-          <p:nvPr/>
-        </p:nvSpPr>
-        <p:spPr>
-          <a:xfrm>
-            <a:off x="10177272" y="2834640"/>
-            <a:ext cx="22860" cy="411480"/>
-          </a:xfrm>
-          <a:prstGeom prst="rect">
-            <a:avLst/>
-          </a:prstGeom>
-          <a:solidFill>
-            <a:srgbClr val="243352"/>
-          </a:solidFill>
-          <a:ln>
-            <a:noFill/>
-          </a:ln>
-          <a:effectLst/>
-        </p:spPr>
-        <p:style>
-          <a:lnRef idx="1">
-            <a:schemeClr val="accent1"/>
-          </a:lnRef>
-          <a:fillRef idx="3">
-            <a:schemeClr val="accent1"/>
-          </a:fillRef>
-          <a:effectRef idx="2">
-            <a:schemeClr val="accent1"/>
-          </a:effectRef>
-          <a:fontRef idx="minor">
-            <a:schemeClr val="lt1"/>
-          </a:fontRef>
-        </p:style>
-        <p:txBody>
-          <a:bodyPr rtlCol="0" anchor="ctr"/>
-          <a:lstStyle/>
-          <a:p>
-            <a:pPr algn="ctr"/>
-          </a:p>
-        </p:txBody>
-      </p:sp>
-      <p:sp>
-        <p:nvSpPr>
-          <p:cNvPr id="21" name="Rounded Rectangle 20"/>
-          <p:cNvSpPr/>
-          <p:nvPr/>
-        </p:nvSpPr>
-        <p:spPr>
-          <a:xfrm>
-            <a:off x="640080" y="3246120"/>
-            <a:ext cx="10881360" cy="566928"/>
-          </a:xfrm>
-          <a:prstGeom prst="roundRect">
-            <a:avLst>
-              <a:gd name="adj" fmla="val 8000"/>
-            </a:avLst>
-          </a:prstGeom>
-          <a:solidFill>
-            <a:srgbClr val="4A9EFF"/>
-          </a:solidFill>
-          <a:ln>
-            <a:noFill/>
-          </a:ln>
-          <a:effectLst/>
-        </p:spPr>
-        <p:style>
-          <a:lnRef idx="1">
-            <a:schemeClr val="accent1"/>
-          </a:lnRef>
-          <a:fillRef idx="3">
-            <a:schemeClr val="accent1"/>
-          </a:fillRef>
-          <a:effectRef idx="2">
-            <a:schemeClr val="accent1"/>
-          </a:effectRef>
-          <a:fontRef idx="minor">
-            <a:schemeClr val="lt1"/>
-          </a:fontRef>
-        </p:style>
-        <p:txBody>
-          <a:bodyPr rtlCol="0" anchor="ctr"/>
-          <a:lstStyle/>
-          <a:p>
-            <a:pPr algn="ctr"/>
-          </a:p>
-        </p:txBody>
-      </p:sp>
-      <p:sp>
-        <p:nvSpPr>
-          <p:cNvPr id="22" name="TextBox 21"/>
-          <p:cNvSpPr txBox="1"/>
-          <p:nvPr/>
-        </p:nvSpPr>
-        <p:spPr>
-          <a:xfrm>
-            <a:off x="640080" y="3246120"/>
-            <a:ext cx="10881360" cy="566928"/>
-          </a:xfrm>
-          <a:prstGeom prst="rect">
-            <a:avLst/>
-          </a:prstGeom>
-          <a:noFill/>
-        </p:spPr>
-        <p:txBody>
-          <a:bodyPr wrap="square" anchor="ctr" lIns="0" rIns="0" tIns="0" bIns="0">
-            <a:spAutoFit/>
-          </a:bodyPr>
-          <a:lstStyle/>
-          <a:p>
-            <a:pPr algn="ctr">
-              <a:spcBef>
-                <a:spcPts val="0"/>
-              </a:spcBef>
-              <a:spcAft>
-                <a:spcPts val="0"/>
-              </a:spcAft>
-            </a:pPr>
-            <a:r>
-              <a:rPr sz="1500" b="1" i="0" spc="300">
-                <a:solidFill>
-                  <a:srgbClr val="010715"/>
-                </a:solidFill>
-                <a:latin typeface="Calibri"/>
-              </a:rPr>
-              <a:t>CENTRAL MESSAGE BUS</a:t>
-            </a:r>
-          </a:p>
-        </p:txBody>
-      </p:sp>
-      <p:sp>
-        <p:nvSpPr>
-          <p:cNvPr id="23" name="TextBox 22"/>
-          <p:cNvSpPr txBox="1"/>
-          <p:nvPr/>
-        </p:nvSpPr>
-        <p:spPr>
-          <a:xfrm>
-            <a:off x="640080" y="4069080"/>
-            <a:ext cx="10881360" cy="365760"/>
-          </a:xfrm>
-          <a:prstGeom prst="rect">
-            <a:avLst/>
-          </a:prstGeom>
-          <a:noFill/>
-        </p:spPr>
-        <p:txBody>
-          <a:bodyPr wrap="square" anchor="t" lIns="0" rIns="0" tIns="0" bIns="0">
-            <a:spAutoFit/>
-          </a:bodyPr>
-          <a:lstStyle/>
-          <a:p>
-            <a:pPr algn="l">
-              <a:spcBef>
-                <a:spcPts val="0"/>
-              </a:spcBef>
-              <a:spcAft>
-                <a:spcPts val="0"/>
-              </a:spcAft>
-            </a:pPr>
-            <a:r>
-              <a:rPr sz="1100" b="1" i="0" spc="200">
-                <a:solidFill>
-                  <a:srgbClr val="9AA7BD"/>
-                </a:solidFill>
-                <a:latin typeface="Calibri"/>
-              </a:rPr>
-              <a:t>DATA SOURCES</a:t>
-            </a:r>
-          </a:p>
-        </p:txBody>
-      </p:sp>
-      <p:sp>
-        <p:nvSpPr>
-          <p:cNvPr id="24" name="Rounded Rectangle 23"/>
-          <p:cNvSpPr/>
-          <p:nvPr/>
-        </p:nvSpPr>
-        <p:spPr>
-          <a:xfrm>
-            <a:off x="640080" y="4434840"/>
-            <a:ext cx="1975104" cy="548640"/>
+            <a:off x="6035040" y="1965960"/>
+            <a:ext cx="5486400" cy="987552"/>
           </a:xfrm>
           <a:prstGeom prst="roundRect">
             <a:avLst>
@@ -8706,20 +7206,6 @@
           </a:ln>
           <a:effectLst/>
         </p:spPr>
-        <p:style>
-          <a:lnRef idx="1">
-            <a:schemeClr val="accent1"/>
-          </a:lnRef>
-          <a:fillRef idx="3">
-            <a:schemeClr val="accent1"/>
-          </a:fillRef>
-          <a:effectRef idx="2">
-            <a:schemeClr val="accent1"/>
-          </a:effectRef>
-          <a:fontRef idx="minor">
-            <a:schemeClr val="lt1"/>
-          </a:fontRef>
-        </p:style>
         <p:txBody>
           <a:bodyPr rtlCol="0" anchor="ctr"/>
           <a:lstStyle/>
@@ -8730,14 +7216,44 @@
       </p:sp>
       <p:sp>
         <p:nvSpPr>
-          <p:cNvPr id="25" name="TextBox 24"/>
+          <p:cNvPr id="8" name="Rectangle 7"/>
+          <p:cNvSpPr/>
+          <p:nvPr/>
+        </p:nvSpPr>
+        <p:spPr>
+          <a:xfrm>
+            <a:off x="6035040" y="1965960"/>
+            <a:ext cx="82296" cy="987552"/>
+          </a:xfrm>
+          <a:prstGeom prst="rect">
+            <a:avLst/>
+          </a:prstGeom>
+          <a:solidFill>
+            <a:srgbClr val="FF9E1B"/>
+          </a:solidFill>
+          <a:ln>
+            <a:noFill/>
+          </a:ln>
+          <a:effectLst/>
+        </p:spPr>
+        <p:txBody>
+          <a:bodyPr rtlCol="0" anchor="ctr"/>
+          <a:lstStyle/>
+          <a:p>
+            <a:pPr algn="ctr"/>
+          </a:p>
+        </p:txBody>
+      </p:sp>
+      <p:sp>
+        <p:nvSpPr>
+          <p:cNvPr id="9" name="TextBox 8"/>
           <p:cNvSpPr txBox="1"/>
           <p:nvPr/>
         </p:nvSpPr>
         <p:spPr>
           <a:xfrm>
-            <a:off x="640080" y="4434840"/>
-            <a:ext cx="1975104" cy="548640"/>
+            <a:off x="6327648" y="2112264"/>
+            <a:ext cx="5029200" cy="365760"/>
           </a:xfrm>
           <a:prstGeom prst="rect">
             <a:avLst/>
@@ -8745,41 +7261,86 @@
           <a:noFill/>
         </p:spPr>
         <p:txBody>
-          <a:bodyPr wrap="square" anchor="ctr" lIns="0" rIns="0" tIns="0" bIns="0">
+          <a:bodyPr wrap="square" anchor="t" lIns="0" rIns="0" tIns="0" bIns="0">
             <a:spAutoFit/>
           </a:bodyPr>
           <a:lstStyle/>
           <a:p>
-            <a:pPr algn="ctr">
-              <a:spcBef>
-                <a:spcPts val="0"/>
-              </a:spcBef>
-              <a:spcAft>
-                <a:spcPts val="0"/>
-              </a:spcAft>
-            </a:pPr>
-            <a:r>
-              <a:rPr sz="1300" b="1" i="0">
-                <a:solidFill>
-                  <a:srgbClr val="FF9E1B"/>
-                </a:solidFill>
-                <a:latin typeface="Calibri"/>
-              </a:rPr>
-              <a:t>NTES</a:t>
-            </a:r>
-          </a:p>
-        </p:txBody>
-      </p:sp>
-      <p:sp>
-        <p:nvSpPr>
-          <p:cNvPr id="26" name="Rounded Rectangle 25"/>
+            <a:pPr algn="l">
+              <a:spcBef>
+                <a:spcPts val="0"/>
+              </a:spcBef>
+              <a:spcAft>
+                <a:spcPts val="0"/>
+              </a:spcAft>
+            </a:pPr>
+            <a:r>
+              <a:rPr sz="1600" b="1" i="0">
+                <a:solidFill>
+                  <a:srgbClr val="F4F7FC"/>
+                </a:solidFill>
+                <a:latin typeface="Arial"/>
+              </a:rPr>
+              <a:t>Live train status</a:t>
+            </a:r>
+          </a:p>
+        </p:txBody>
+      </p:sp>
+      <p:sp>
+        <p:nvSpPr>
+          <p:cNvPr id="10" name="TextBox 9"/>
+          <p:cNvSpPr txBox="1"/>
+          <p:nvPr/>
+        </p:nvSpPr>
+        <p:spPr>
+          <a:xfrm>
+            <a:off x="6327648" y="2478024"/>
+            <a:ext cx="5029200" cy="411480"/>
+          </a:xfrm>
+          <a:prstGeom prst="rect">
+            <a:avLst/>
+          </a:prstGeom>
+          <a:noFill/>
+        </p:spPr>
+        <p:txBody>
+          <a:bodyPr wrap="square" anchor="t" lIns="0" rIns="0" tIns="0" bIns="0">
+            <a:spAutoFit/>
+          </a:bodyPr>
+          <a:lstStyle/>
+          <a:p>
+            <a:pPr algn="l">
+              <a:lnSpc>
+                <a:spcPct val="102000"/>
+              </a:lnSpc>
+              <a:spcBef>
+                <a:spcPts val="0"/>
+              </a:spcBef>
+              <a:spcAft>
+                <a:spcPts val="0"/>
+              </a:spcAft>
+            </a:pPr>
+            <a:r>
+              <a:rPr sz="1250" b="0" i="0">
+                <a:solidFill>
+                  <a:srgbClr val="9AA7BD"/>
+                </a:solidFill>
+                <a:latin typeface="Arial"/>
+              </a:rPr>
+              <a:t>Delay, next stop and platform, refreshed in real time as the agents act.</a:t>
+            </a:r>
+          </a:p>
+        </p:txBody>
+      </p:sp>
+      <p:sp>
+        <p:nvSpPr>
+          <p:cNvPr id="11" name="Rounded Rectangle 10"/>
           <p:cNvSpPr/>
           <p:nvPr/>
         </p:nvSpPr>
         <p:spPr>
           <a:xfrm>
-            <a:off x="2779776" y="4434840"/>
-            <a:ext cx="1975104" cy="548640"/>
+            <a:off x="6035040" y="3063239"/>
+            <a:ext cx="5486400" cy="987552"/>
           </a:xfrm>
           <a:prstGeom prst="roundRect">
             <a:avLst>
@@ -8796,20 +7357,6 @@
           </a:ln>
           <a:effectLst/>
         </p:spPr>
-        <p:style>
-          <a:lnRef idx="1">
-            <a:schemeClr val="accent1"/>
-          </a:lnRef>
-          <a:fillRef idx="3">
-            <a:schemeClr val="accent1"/>
-          </a:fillRef>
-          <a:effectRef idx="2">
-            <a:schemeClr val="accent1"/>
-          </a:effectRef>
-          <a:fontRef idx="minor">
-            <a:schemeClr val="lt1"/>
-          </a:fontRef>
-        </p:style>
         <p:txBody>
           <a:bodyPr rtlCol="0" anchor="ctr"/>
           <a:lstStyle/>
@@ -8820,14 +7367,44 @@
       </p:sp>
       <p:sp>
         <p:nvSpPr>
-          <p:cNvPr id="27" name="TextBox 26"/>
+          <p:cNvPr id="12" name="Rectangle 11"/>
+          <p:cNvSpPr/>
+          <p:nvPr/>
+        </p:nvSpPr>
+        <p:spPr>
+          <a:xfrm>
+            <a:off x="6035040" y="3063239"/>
+            <a:ext cx="82296" cy="987552"/>
+          </a:xfrm>
+          <a:prstGeom prst="rect">
+            <a:avLst/>
+          </a:prstGeom>
+          <a:solidFill>
+            <a:srgbClr val="4A9EFF"/>
+          </a:solidFill>
+          <a:ln>
+            <a:noFill/>
+          </a:ln>
+          <a:effectLst/>
+        </p:spPr>
+        <p:txBody>
+          <a:bodyPr rtlCol="0" anchor="ctr"/>
+          <a:lstStyle/>
+          <a:p>
+            <a:pPr algn="ctr"/>
+          </a:p>
+        </p:txBody>
+      </p:sp>
+      <p:sp>
+        <p:nvSpPr>
+          <p:cNvPr id="13" name="TextBox 12"/>
           <p:cNvSpPr txBox="1"/>
           <p:nvPr/>
         </p:nvSpPr>
         <p:spPr>
           <a:xfrm>
-            <a:off x="2779776" y="4434840"/>
-            <a:ext cx="1975104" cy="548640"/>
+            <a:off x="6327648" y="3209544"/>
+            <a:ext cx="5029200" cy="365760"/>
           </a:xfrm>
           <a:prstGeom prst="rect">
             <a:avLst/>
@@ -8835,41 +7412,86 @@
           <a:noFill/>
         </p:spPr>
         <p:txBody>
-          <a:bodyPr wrap="square" anchor="ctr" lIns="0" rIns="0" tIns="0" bIns="0">
+          <a:bodyPr wrap="square" anchor="t" lIns="0" rIns="0" tIns="0" bIns="0">
             <a:spAutoFit/>
           </a:bodyPr>
           <a:lstStyle/>
           <a:p>
-            <a:pPr algn="ctr">
-              <a:spcBef>
-                <a:spcPts val="0"/>
-              </a:spcBef>
-              <a:spcAft>
-                <a:spcPts val="0"/>
-              </a:spcAft>
-            </a:pPr>
-            <a:r>
-              <a:rPr sz="1300" b="1" i="0">
-                <a:solidFill>
-                  <a:srgbClr val="FF9E1B"/>
-                </a:solidFill>
-                <a:latin typeface="Calibri"/>
-              </a:rPr>
-              <a:t>IRCTC</a:t>
-            </a:r>
-          </a:p>
-        </p:txBody>
-      </p:sp>
-      <p:sp>
-        <p:nvSpPr>
-          <p:cNvPr id="28" name="Rounded Rectangle 27"/>
+            <a:pPr algn="l">
+              <a:spcBef>
+                <a:spcPts val="0"/>
+              </a:spcBef>
+              <a:spcAft>
+                <a:spcPts val="0"/>
+              </a:spcAft>
+            </a:pPr>
+            <a:r>
+              <a:rPr sz="1600" b="1" i="0">
+                <a:solidFill>
+                  <a:srgbClr val="F4F7FC"/>
+                </a:solidFill>
+                <a:latin typeface="Arial"/>
+              </a:rPr>
+              <a:t>Proactive alerts</a:t>
+            </a:r>
+          </a:p>
+        </p:txBody>
+      </p:sp>
+      <p:sp>
+        <p:nvSpPr>
+          <p:cNvPr id="14" name="TextBox 13"/>
+          <p:cNvSpPr txBox="1"/>
+          <p:nvPr/>
+        </p:nvSpPr>
+        <p:spPr>
+          <a:xfrm>
+            <a:off x="6327648" y="3575303"/>
+            <a:ext cx="5029200" cy="411480"/>
+          </a:xfrm>
+          <a:prstGeom prst="rect">
+            <a:avLst/>
+          </a:prstGeom>
+          <a:noFill/>
+        </p:spPr>
+        <p:txBody>
+          <a:bodyPr wrap="square" anchor="t" lIns="0" rIns="0" tIns="0" bIns="0">
+            <a:spAutoFit/>
+          </a:bodyPr>
+          <a:lstStyle/>
+          <a:p>
+            <a:pPr algn="l">
+              <a:lnSpc>
+                <a:spcPct val="102000"/>
+              </a:lnSpc>
+              <a:spcBef>
+                <a:spcPts val="0"/>
+              </a:spcBef>
+              <a:spcAft>
+                <a:spcPts val="0"/>
+              </a:spcAft>
+            </a:pPr>
+            <a:r>
+              <a:rPr sz="1250" b="0" i="0">
+                <a:solidFill>
+                  <a:srgbClr val="9AA7BD"/>
+                </a:solidFill>
+                <a:latin typeface="Arial"/>
+              </a:rPr>
+              <a:t>Crew changes and disruptions are pushed to passengers before they even ask.</a:t>
+            </a:r>
+          </a:p>
+        </p:txBody>
+      </p:sp>
+      <p:sp>
+        <p:nvSpPr>
+          <p:cNvPr id="15" name="Rounded Rectangle 14"/>
           <p:cNvSpPr/>
           <p:nvPr/>
         </p:nvSpPr>
         <p:spPr>
           <a:xfrm>
-            <a:off x="4919472" y="4434840"/>
-            <a:ext cx="1975104" cy="548640"/>
+            <a:off x="6035040" y="4160520"/>
+            <a:ext cx="5486400" cy="987552"/>
           </a:xfrm>
           <a:prstGeom prst="roundRect">
             <a:avLst>
@@ -8886,20 +7508,6 @@
           </a:ln>
           <a:effectLst/>
         </p:spPr>
-        <p:style>
-          <a:lnRef idx="1">
-            <a:schemeClr val="accent1"/>
-          </a:lnRef>
-          <a:fillRef idx="3">
-            <a:schemeClr val="accent1"/>
-          </a:fillRef>
-          <a:effectRef idx="2">
-            <a:schemeClr val="accent1"/>
-          </a:effectRef>
-          <a:fontRef idx="minor">
-            <a:schemeClr val="lt1"/>
-          </a:fontRef>
-        </p:style>
         <p:txBody>
           <a:bodyPr rtlCol="0" anchor="ctr"/>
           <a:lstStyle/>
@@ -8910,14 +7518,44 @@
       </p:sp>
       <p:sp>
         <p:nvSpPr>
-          <p:cNvPr id="29" name="TextBox 28"/>
+          <p:cNvPr id="16" name="Rectangle 15"/>
+          <p:cNvSpPr/>
+          <p:nvPr/>
+        </p:nvSpPr>
+        <p:spPr>
+          <a:xfrm>
+            <a:off x="6035040" y="4160520"/>
+            <a:ext cx="82296" cy="987552"/>
+          </a:xfrm>
+          <a:prstGeom prst="rect">
+            <a:avLst/>
+          </a:prstGeom>
+          <a:solidFill>
+            <a:srgbClr val="35D07F"/>
+          </a:solidFill>
+          <a:ln>
+            <a:noFill/>
+          </a:ln>
+          <a:effectLst/>
+        </p:spPr>
+        <p:txBody>
+          <a:bodyPr rtlCol="0" anchor="ctr"/>
+          <a:lstStyle/>
+          <a:p>
+            <a:pPr algn="ctr"/>
+          </a:p>
+        </p:txBody>
+      </p:sp>
+      <p:sp>
+        <p:nvSpPr>
+          <p:cNvPr id="17" name="TextBox 16"/>
           <p:cNvSpPr txBox="1"/>
           <p:nvPr/>
         </p:nvSpPr>
         <p:spPr>
           <a:xfrm>
-            <a:off x="4919472" y="4434840"/>
-            <a:ext cx="1975104" cy="548640"/>
+            <a:off x="6327648" y="4306824"/>
+            <a:ext cx="5029200" cy="365760"/>
           </a:xfrm>
           <a:prstGeom prst="rect">
             <a:avLst/>
@@ -8925,41 +7563,86 @@
           <a:noFill/>
         </p:spPr>
         <p:txBody>
-          <a:bodyPr wrap="square" anchor="ctr" lIns="0" rIns="0" tIns="0" bIns="0">
+          <a:bodyPr wrap="square" anchor="t" lIns="0" rIns="0" tIns="0" bIns="0">
             <a:spAutoFit/>
           </a:bodyPr>
           <a:lstStyle/>
           <a:p>
-            <a:pPr algn="ctr">
-              <a:spcBef>
-                <a:spcPts val="0"/>
-              </a:spcBef>
-              <a:spcAft>
-                <a:spcPts val="0"/>
-              </a:spcAft>
-            </a:pPr>
-            <a:r>
-              <a:rPr sz="1300" b="1" i="0">
-                <a:solidFill>
-                  <a:srgbClr val="FF9E1B"/>
-                </a:solidFill>
-                <a:latin typeface="Calibri"/>
-              </a:rPr>
-              <a:t>FOIS</a:t>
-            </a:r>
-          </a:p>
-        </p:txBody>
-      </p:sp>
-      <p:sp>
-        <p:nvSpPr>
-          <p:cNvPr id="30" name="Rounded Rectangle 29"/>
+            <a:pPr algn="l">
+              <a:spcBef>
+                <a:spcPts val="0"/>
+              </a:spcBef>
+              <a:spcAft>
+                <a:spcPts val="0"/>
+              </a:spcAft>
+            </a:pPr>
+            <a:r>
+              <a:rPr sz="1600" b="1" i="0">
+                <a:solidFill>
+                  <a:srgbClr val="F4F7FC"/>
+                </a:solidFill>
+                <a:latin typeface="Arial"/>
+              </a:rPr>
+              <a:t>Ask anything</a:t>
+            </a:r>
+          </a:p>
+        </p:txBody>
+      </p:sp>
+      <p:sp>
+        <p:nvSpPr>
+          <p:cNvPr id="18" name="TextBox 17"/>
+          <p:cNvSpPr txBox="1"/>
+          <p:nvPr/>
+        </p:nvSpPr>
+        <p:spPr>
+          <a:xfrm>
+            <a:off x="6327648" y="4672583"/>
+            <a:ext cx="5029200" cy="411480"/>
+          </a:xfrm>
+          <a:prstGeom prst="rect">
+            <a:avLst/>
+          </a:prstGeom>
+          <a:noFill/>
+        </p:spPr>
+        <p:txBody>
+          <a:bodyPr wrap="square" anchor="t" lIns="0" rIns="0" tIns="0" bIns="0">
+            <a:spAutoFit/>
+          </a:bodyPr>
+          <a:lstStyle/>
+          <a:p>
+            <a:pPr algn="l">
+              <a:lnSpc>
+                <a:spcPct val="102000"/>
+              </a:lnSpc>
+              <a:spcBef>
+                <a:spcPts val="0"/>
+              </a:spcBef>
+              <a:spcAft>
+                <a:spcPts val="0"/>
+              </a:spcAft>
+            </a:pPr>
+            <a:r>
+              <a:rPr sz="1250" b="0" i="0">
+                <a:solidFill>
+                  <a:srgbClr val="9AA7BD"/>
+                </a:solidFill>
+                <a:latin typeface="Arial"/>
+              </a:rPr>
+              <a:t>A voice or text assistant answers in plain language, in Hindi or English.</a:t>
+            </a:r>
+          </a:p>
+        </p:txBody>
+      </p:sp>
+      <p:sp>
+        <p:nvSpPr>
+          <p:cNvPr id="19" name="Rounded Rectangle 18"/>
           <p:cNvSpPr/>
           <p:nvPr/>
         </p:nvSpPr>
         <p:spPr>
           <a:xfrm>
-            <a:off x="7059168" y="4434840"/>
-            <a:ext cx="1975104" cy="548640"/>
+            <a:off x="6035040" y="5257800"/>
+            <a:ext cx="5486400" cy="987552"/>
           </a:xfrm>
           <a:prstGeom prst="roundRect">
             <a:avLst>
@@ -8976,20 +7659,6 @@
           </a:ln>
           <a:effectLst/>
         </p:spPr>
-        <p:style>
-          <a:lnRef idx="1">
-            <a:schemeClr val="accent1"/>
-          </a:lnRef>
-          <a:fillRef idx="3">
-            <a:schemeClr val="accent1"/>
-          </a:fillRef>
-          <a:effectRef idx="2">
-            <a:schemeClr val="accent1"/>
-          </a:effectRef>
-          <a:fontRef idx="minor">
-            <a:schemeClr val="lt1"/>
-          </a:fontRef>
-        </p:style>
         <p:txBody>
           <a:bodyPr rtlCol="0" anchor="ctr"/>
           <a:lstStyle/>
@@ -9000,86 +7669,26 @@
       </p:sp>
       <p:sp>
         <p:nvSpPr>
-          <p:cNvPr id="31" name="TextBox 30"/>
-          <p:cNvSpPr txBox="1"/>
-          <p:nvPr/>
-        </p:nvSpPr>
-        <p:spPr>
-          <a:xfrm>
-            <a:off x="7059168" y="4434840"/>
-            <a:ext cx="1975104" cy="548640"/>
-          </a:xfrm>
-          <a:prstGeom prst="rect">
-            <a:avLst/>
-          </a:prstGeom>
-          <a:noFill/>
-        </p:spPr>
-        <p:txBody>
-          <a:bodyPr wrap="square" anchor="ctr" lIns="0" rIns="0" tIns="0" bIns="0">
-            <a:spAutoFit/>
-          </a:bodyPr>
-          <a:lstStyle/>
-          <a:p>
-            <a:pPr algn="ctr">
-              <a:spcBef>
-                <a:spcPts val="0"/>
-              </a:spcBef>
-              <a:spcAft>
-                <a:spcPts val="0"/>
-              </a:spcAft>
-            </a:pPr>
-            <a:r>
-              <a:rPr sz="1300" b="1" i="0">
-                <a:solidFill>
-                  <a:srgbClr val="FF9E1B"/>
-                </a:solidFill>
-                <a:latin typeface="Calibri"/>
-              </a:rPr>
-              <a:t>SCADA</a:t>
-            </a:r>
-          </a:p>
-        </p:txBody>
-      </p:sp>
-      <p:sp>
-        <p:nvSpPr>
-          <p:cNvPr id="32" name="Rounded Rectangle 31"/>
+          <p:cNvPr id="20" name="Rectangle 19"/>
           <p:cNvSpPr/>
           <p:nvPr/>
         </p:nvSpPr>
         <p:spPr>
           <a:xfrm>
-            <a:off x="9198864" y="4434840"/>
-            <a:ext cx="1975104" cy="548640"/>
-          </a:xfrm>
-          <a:prstGeom prst="roundRect">
-            <a:avLst>
-              <a:gd name="adj" fmla="val 8000"/>
-            </a:avLst>
+            <a:off x="6035040" y="5257800"/>
+            <a:ext cx="82296" cy="987552"/>
+          </a:xfrm>
+          <a:prstGeom prst="rect">
+            <a:avLst/>
           </a:prstGeom>
           <a:solidFill>
-            <a:srgbClr val="121B30"/>
+            <a:srgbClr val="FF9E1B"/>
           </a:solidFill>
-          <a:ln w="12700">
-            <a:solidFill>
-              <a:srgbClr val="243352"/>
-            </a:solidFill>
+          <a:ln>
+            <a:noFill/>
           </a:ln>
           <a:effectLst/>
         </p:spPr>
-        <p:style>
-          <a:lnRef idx="1">
-            <a:schemeClr val="accent1"/>
-          </a:lnRef>
-          <a:fillRef idx="3">
-            <a:schemeClr val="accent1"/>
-          </a:fillRef>
-          <a:effectRef idx="2">
-            <a:schemeClr val="accent1"/>
-          </a:effectRef>
-          <a:fontRef idx="minor">
-            <a:schemeClr val="lt1"/>
-          </a:fontRef>
-        </p:style>
         <p:txBody>
           <a:bodyPr rtlCol="0" anchor="ctr"/>
           <a:lstStyle/>
@@ -9090,155 +7699,14 @@
       </p:sp>
       <p:sp>
         <p:nvSpPr>
-          <p:cNvPr id="33" name="TextBox 32"/>
+          <p:cNvPr id="21" name="TextBox 20"/>
           <p:cNvSpPr txBox="1"/>
           <p:nvPr/>
         </p:nvSpPr>
         <p:spPr>
           <a:xfrm>
-            <a:off x="9198864" y="4434840"/>
-            <a:ext cx="1975104" cy="548640"/>
-          </a:xfrm>
-          <a:prstGeom prst="rect">
-            <a:avLst/>
-          </a:prstGeom>
-          <a:noFill/>
-        </p:spPr>
-        <p:txBody>
-          <a:bodyPr wrap="square" anchor="ctr" lIns="0" rIns="0" tIns="0" bIns="0">
-            <a:spAutoFit/>
-          </a:bodyPr>
-          <a:lstStyle/>
-          <a:p>
-            <a:pPr algn="ctr">
-              <a:spcBef>
-                <a:spcPts val="0"/>
-              </a:spcBef>
-              <a:spcAft>
-                <a:spcPts val="0"/>
-              </a:spcAft>
-            </a:pPr>
-            <a:r>
-              <a:rPr sz="1300" b="1" i="0">
-                <a:solidFill>
-                  <a:srgbClr val="FF9E1B"/>
-                </a:solidFill>
-                <a:latin typeface="Calibri"/>
-              </a:rPr>
-              <a:t>Weather</a:t>
-            </a:r>
-          </a:p>
-        </p:txBody>
-      </p:sp>
-      <p:sp>
-        <p:nvSpPr>
-          <p:cNvPr id="34" name="Rounded Rectangle 33"/>
-          <p:cNvSpPr/>
-          <p:nvPr/>
-        </p:nvSpPr>
-        <p:spPr>
-          <a:xfrm>
-            <a:off x="640080" y="5349240"/>
-            <a:ext cx="10881360" cy="640080"/>
-          </a:xfrm>
-          <a:prstGeom prst="roundRect">
-            <a:avLst>
-              <a:gd name="adj" fmla="val 8000"/>
-            </a:avLst>
-          </a:prstGeom>
-          <a:solidFill>
-            <a:srgbClr val="121B30"/>
-          </a:solidFill>
-          <a:ln w="12700">
-            <a:solidFill>
-              <a:srgbClr val="243352"/>
-            </a:solidFill>
-          </a:ln>
-          <a:effectLst/>
-        </p:spPr>
-        <p:style>
-          <a:lnRef idx="1">
-            <a:schemeClr val="accent1"/>
-          </a:lnRef>
-          <a:fillRef idx="3">
-            <a:schemeClr val="accent1"/>
-          </a:fillRef>
-          <a:effectRef idx="2">
-            <a:schemeClr val="accent1"/>
-          </a:effectRef>
-          <a:fontRef idx="minor">
-            <a:schemeClr val="lt1"/>
-          </a:fontRef>
-        </p:style>
-        <p:txBody>
-          <a:bodyPr rtlCol="0" anchor="ctr"/>
-          <a:lstStyle/>
-          <a:p>
-            <a:pPr algn="ctr"/>
-          </a:p>
-        </p:txBody>
-      </p:sp>
-      <p:sp>
-        <p:nvSpPr>
-          <p:cNvPr id="35" name="TextBox 34"/>
-          <p:cNvSpPr txBox="1"/>
-          <p:nvPr/>
-        </p:nvSpPr>
-        <p:spPr>
-          <a:xfrm>
-            <a:off x="640080" y="5349240"/>
-            <a:ext cx="10881360" cy="640080"/>
-          </a:xfrm>
-          <a:prstGeom prst="rect">
-            <a:avLst/>
-          </a:prstGeom>
-          <a:noFill/>
-        </p:spPr>
-        <p:txBody>
-          <a:bodyPr wrap="square" anchor="ctr" lIns="0" rIns="0" tIns="0" bIns="0">
-            <a:spAutoFit/>
-          </a:bodyPr>
-          <a:lstStyle/>
-          <a:p>
-            <a:pPr algn="ctr">
-              <a:spcBef>
-                <a:spcPts val="0"/>
-              </a:spcBef>
-              <a:spcAft>
-                <a:spcPts val="0"/>
-              </a:spcAft>
-            </a:pPr>
-            <a:r>
-              <a:rPr sz="1300" b="1" i="0">
-                <a:solidFill>
-                  <a:srgbClr val="9AA7BD"/>
-                </a:solidFill>
-                <a:latin typeface="Calibri"/>
-              </a:rPr>
-              <a:t>Stack:  </a:t>
-            </a:r>
-            <a:r>
-              <a:rPr sz="1300" b="0" i="0">
-                <a:solidFill>
-                  <a:srgbClr val="F4F7FC"/>
-                </a:solidFill>
-                <a:latin typeface="Calibri"/>
-              </a:rPr>
-              <a:t>FastAPI  ·  in-process event bus  ·  SQLite  ·  React  ·  Hive agents</a:t>
-            </a:r>
-          </a:p>
-        </p:txBody>
-      </p:sp>
-      <p:sp>
-        <p:nvSpPr>
-          <p:cNvPr id="36" name="TextBox 35"/>
-          <p:cNvSpPr txBox="1"/>
-          <p:nvPr/>
-        </p:nvSpPr>
-        <p:spPr>
-          <a:xfrm>
-            <a:off x="10332720" y="6400800"/>
-            <a:ext cx="731520" cy="274320"/>
+            <a:off x="6327648" y="5404104"/>
+            <a:ext cx="5029200" cy="365760"/>
           </a:xfrm>
           <a:prstGeom prst="rect">
             <a:avLst/>
@@ -9260,27 +7728,27 @@
               </a:spcAft>
             </a:pPr>
             <a:r>
-              <a:rPr sz="1000" b="1" i="0" spc="100">
-                <a:solidFill>
-                  <a:srgbClr val="9AA7BD"/>
-                </a:solidFill>
-                <a:latin typeface="Calibri"/>
-              </a:rPr>
-              <a:t>05</a:t>
-            </a:r>
-          </a:p>
-        </p:txBody>
-      </p:sp>
-      <p:sp>
-        <p:nvSpPr>
-          <p:cNvPr id="37" name="TextBox 36"/>
+              <a:rPr sz="1600" b="1" i="0">
+                <a:solidFill>
+                  <a:srgbClr val="F4F7FC"/>
+                </a:solidFill>
+                <a:latin typeface="Arial"/>
+              </a:rPr>
+              <a:t>Smart alternatives</a:t>
+            </a:r>
+          </a:p>
+        </p:txBody>
+      </p:sp>
+      <p:sp>
+        <p:nvSpPr>
+          <p:cNvPr id="22" name="TextBox 21"/>
           <p:cNvSpPr txBox="1"/>
           <p:nvPr/>
         </p:nvSpPr>
         <p:spPr>
           <a:xfrm>
-            <a:off x="548640" y="6400800"/>
-            <a:ext cx="3657600" cy="274320"/>
+            <a:off x="6327648" y="5769864"/>
+            <a:ext cx="5029200" cy="411480"/>
           </a:xfrm>
           <a:prstGeom prst="rect">
             <a:avLst/>
@@ -9294,6 +7762,51 @@
           <a:lstStyle/>
           <a:p>
             <a:pPr algn="l">
+              <a:lnSpc>
+                <a:spcPct val="102000"/>
+              </a:lnSpc>
+              <a:spcBef>
+                <a:spcPts val="0"/>
+              </a:spcBef>
+              <a:spcAft>
+                <a:spcPts val="0"/>
+              </a:spcAft>
+            </a:pPr>
+            <a:r>
+              <a:rPr sz="1250" b="0" i="0">
+                <a:solidFill>
+                  <a:srgbClr val="9AA7BD"/>
+                </a:solidFill>
+                <a:latin typeface="Arial"/>
+              </a:rPr>
+              <a:t>When a train runs late, it suggests the next service that gets you there.</a:t>
+            </a:r>
+          </a:p>
+        </p:txBody>
+      </p:sp>
+      <p:sp>
+        <p:nvSpPr>
+          <p:cNvPr id="23" name="TextBox 22"/>
+          <p:cNvSpPr txBox="1"/>
+          <p:nvPr/>
+        </p:nvSpPr>
+        <p:spPr>
+          <a:xfrm>
+            <a:off x="10332720" y="6400800"/>
+            <a:ext cx="731520" cy="274320"/>
+          </a:xfrm>
+          <a:prstGeom prst="rect">
+            <a:avLst/>
+          </a:prstGeom>
+          <a:noFill/>
+        </p:spPr>
+        <p:txBody>
+          <a:bodyPr wrap="square" anchor="t" lIns="0" rIns="0" tIns="0" bIns="0">
+            <a:spAutoFit/>
+          </a:bodyPr>
+          <a:lstStyle/>
+          <a:p>
+            <a:pPr algn="l">
               <a:spcBef>
                 <a:spcPts val="0"/>
               </a:spcBef>
@@ -9306,7 +7819,49 @@
                 <a:solidFill>
                   <a:srgbClr val="9AA7BD"/>
                 </a:solidFill>
-                <a:latin typeface="Calibri"/>
+                <a:latin typeface="Arial"/>
+              </a:rPr>
+              <a:t>05</a:t>
+            </a:r>
+          </a:p>
+        </p:txBody>
+      </p:sp>
+      <p:sp>
+        <p:nvSpPr>
+          <p:cNvPr id="24" name="TextBox 23"/>
+          <p:cNvSpPr txBox="1"/>
+          <p:nvPr/>
+        </p:nvSpPr>
+        <p:spPr>
+          <a:xfrm>
+            <a:off x="548640" y="6400800"/>
+            <a:ext cx="3657600" cy="274320"/>
+          </a:xfrm>
+          <a:prstGeom prst="rect">
+            <a:avLst/>
+          </a:prstGeom>
+          <a:noFill/>
+        </p:spPr>
+        <p:txBody>
+          <a:bodyPr wrap="square" anchor="t" lIns="0" rIns="0" tIns="0" bIns="0">
+            <a:spAutoFit/>
+          </a:bodyPr>
+          <a:lstStyle/>
+          <a:p>
+            <a:pPr algn="l">
+              <a:spcBef>
+                <a:spcPts val="0"/>
+              </a:spcBef>
+              <a:spcAft>
+                <a:spcPts val="0"/>
+              </a:spcAft>
+            </a:pPr>
+            <a:r>
+              <a:rPr sz="1000" b="1" i="0" spc="100">
+                <a:solidFill>
+                  <a:srgbClr val="9AA7BD"/>
+                </a:solidFill>
+                <a:latin typeface="Arial"/>
               </a:rPr>
               <a:t>Rail Saarthi</a:t>
             </a:r>
@@ -9353,20 +7908,6 @@
           </a:ln>
           <a:effectLst/>
         </p:spPr>
-        <p:style>
-          <a:lnRef idx="1">
-            <a:schemeClr val="accent1"/>
-          </a:lnRef>
-          <a:fillRef idx="3">
-            <a:schemeClr val="accent1"/>
-          </a:fillRef>
-          <a:effectRef idx="2">
-            <a:schemeClr val="accent1"/>
-          </a:effectRef>
-          <a:fontRef idx="minor">
-            <a:schemeClr val="lt1"/>
-          </a:fontRef>
-        </p:style>
         <p:txBody>
           <a:bodyPr rtlCol="0" anchor="ctr"/>
           <a:lstStyle/>
@@ -9397,20 +7938,6 @@
           </a:ln>
           <a:effectLst/>
         </p:spPr>
-        <p:style>
-          <a:lnRef idx="1">
-            <a:schemeClr val="accent1"/>
-          </a:lnRef>
-          <a:fillRef idx="3">
-            <a:schemeClr val="accent1"/>
-          </a:fillRef>
-          <a:effectRef idx="2">
-            <a:schemeClr val="accent1"/>
-          </a:effectRef>
-          <a:fontRef idx="minor">
-            <a:schemeClr val="lt1"/>
-          </a:fontRef>
-        </p:style>
         <p:txBody>
           <a:bodyPr rtlCol="0" anchor="ctr"/>
           <a:lstStyle/>
@@ -9454,9 +7981,9 @@
                 <a:solidFill>
                   <a:srgbClr val="4A9EFF"/>
                 </a:solidFill>
-                <a:latin typeface="Calibri"/>
-              </a:rPr>
-              <a:t>IMPACT &amp; METRICS</a:t>
+                <a:latin typeface="Arial"/>
+              </a:rPr>
+              <a:t>ARCHITECTURE</a:t>
             </a:r>
           </a:p>
         </p:txBody>
@@ -9492,13 +8019,13 @@
               </a:spcAft>
             </a:pPr>
             <a:r>
-              <a:rPr sz="3200" b="1" i="0">
+              <a:rPr sz="3000" b="1" i="0">
                 <a:solidFill>
                   <a:srgbClr val="F4F7FC"/>
                 </a:solidFill>
-                <a:latin typeface="Calibri"/>
-              </a:rPr>
-              <a:t>What the agents actually move</a:t>
+                <a:latin typeface="Arial"/>
+              </a:rPr>
+              <a:t>Agents on a shared bus, fed by live rail data</a:t>
             </a:r>
           </a:p>
         </p:txBody>
@@ -9512,7 +8039,748 @@
         <p:spPr>
           <a:xfrm>
             <a:off x="640080" y="2057400"/>
-            <a:ext cx="2670048" cy="2651760"/>
+            <a:ext cx="1975104" cy="777240"/>
+          </a:xfrm>
+          <a:prstGeom prst="roundRect">
+            <a:avLst>
+              <a:gd name="adj" fmla="val 8000"/>
+            </a:avLst>
+          </a:prstGeom>
+          <a:solidFill>
+            <a:srgbClr val="16223C"/>
+          </a:solidFill>
+          <a:ln w="15875">
+            <a:solidFill>
+              <a:srgbClr val="4A9EFF"/>
+            </a:solidFill>
+          </a:ln>
+          <a:effectLst/>
+        </p:spPr>
+        <p:txBody>
+          <a:bodyPr rtlCol="0" anchor="ctr"/>
+          <a:lstStyle/>
+          <a:p>
+            <a:pPr algn="ctr"/>
+          </a:p>
+        </p:txBody>
+      </p:sp>
+      <p:sp>
+        <p:nvSpPr>
+          <p:cNvPr id="7" name="TextBox 6"/>
+          <p:cNvSpPr txBox="1"/>
+          <p:nvPr/>
+        </p:nvSpPr>
+        <p:spPr>
+          <a:xfrm>
+            <a:off x="640080" y="2057400"/>
+            <a:ext cx="1975104" cy="777240"/>
+          </a:xfrm>
+          <a:prstGeom prst="rect">
+            <a:avLst/>
+          </a:prstGeom>
+          <a:noFill/>
+        </p:spPr>
+        <p:txBody>
+          <a:bodyPr wrap="square" anchor="ctr" lIns="0" rIns="0" tIns="0" bIns="0">
+            <a:spAutoFit/>
+          </a:bodyPr>
+          <a:lstStyle/>
+          <a:p>
+            <a:pPr algn="ctr">
+              <a:spcBef>
+                <a:spcPts val="0"/>
+              </a:spcBef>
+              <a:spcAft>
+                <a:spcPts val="0"/>
+              </a:spcAft>
+            </a:pPr>
+            <a:r>
+              <a:rPr sz="1400" b="1" i="0">
+                <a:solidFill>
+                  <a:srgbClr val="F4F7FC"/>
+                </a:solidFill>
+                <a:latin typeface="Arial"/>
+              </a:rPr>
+              <a:t>Train</a:t>
+            </a:r>
+          </a:p>
+          <a:p>
+            <a:pPr algn="ctr">
+              <a:spcBef>
+                <a:spcPts val="0"/>
+              </a:spcBef>
+              <a:spcAft>
+                <a:spcPts val="0"/>
+              </a:spcAft>
+            </a:pPr>
+            <a:r>
+              <a:rPr sz="900" b="0" i="0" spc="100">
+                <a:solidFill>
+                  <a:srgbClr val="9AA7BD"/>
+                </a:solidFill>
+                <a:latin typeface="Arial"/>
+              </a:rPr>
+              <a:t>Agent</a:t>
+            </a:r>
+          </a:p>
+        </p:txBody>
+      </p:sp>
+      <p:sp>
+        <p:nvSpPr>
+          <p:cNvPr id="8" name="Rectangle 7"/>
+          <p:cNvSpPr/>
+          <p:nvPr/>
+        </p:nvSpPr>
+        <p:spPr>
+          <a:xfrm>
+            <a:off x="1618488" y="2834640"/>
+            <a:ext cx="22860" cy="411480"/>
+          </a:xfrm>
+          <a:prstGeom prst="rect">
+            <a:avLst/>
+          </a:prstGeom>
+          <a:solidFill>
+            <a:srgbClr val="243352"/>
+          </a:solidFill>
+          <a:ln>
+            <a:noFill/>
+          </a:ln>
+          <a:effectLst/>
+        </p:spPr>
+        <p:txBody>
+          <a:bodyPr rtlCol="0" anchor="ctr"/>
+          <a:lstStyle/>
+          <a:p>
+            <a:pPr algn="ctr"/>
+          </a:p>
+        </p:txBody>
+      </p:sp>
+      <p:sp>
+        <p:nvSpPr>
+          <p:cNvPr id="9" name="Rounded Rectangle 8"/>
+          <p:cNvSpPr/>
+          <p:nvPr/>
+        </p:nvSpPr>
+        <p:spPr>
+          <a:xfrm>
+            <a:off x="2779776" y="2057400"/>
+            <a:ext cx="1975104" cy="777240"/>
+          </a:xfrm>
+          <a:prstGeom prst="roundRect">
+            <a:avLst>
+              <a:gd name="adj" fmla="val 8000"/>
+            </a:avLst>
+          </a:prstGeom>
+          <a:solidFill>
+            <a:srgbClr val="16223C"/>
+          </a:solidFill>
+          <a:ln w="15875">
+            <a:solidFill>
+              <a:srgbClr val="4A9EFF"/>
+            </a:solidFill>
+          </a:ln>
+          <a:effectLst/>
+        </p:spPr>
+        <p:txBody>
+          <a:bodyPr rtlCol="0" anchor="ctr"/>
+          <a:lstStyle/>
+          <a:p>
+            <a:pPr algn="ctr"/>
+          </a:p>
+        </p:txBody>
+      </p:sp>
+      <p:sp>
+        <p:nvSpPr>
+          <p:cNvPr id="10" name="TextBox 9"/>
+          <p:cNvSpPr txBox="1"/>
+          <p:nvPr/>
+        </p:nvSpPr>
+        <p:spPr>
+          <a:xfrm>
+            <a:off x="2779776" y="2057400"/>
+            <a:ext cx="1975104" cy="777240"/>
+          </a:xfrm>
+          <a:prstGeom prst="rect">
+            <a:avLst/>
+          </a:prstGeom>
+          <a:noFill/>
+        </p:spPr>
+        <p:txBody>
+          <a:bodyPr wrap="square" anchor="ctr" lIns="0" rIns="0" tIns="0" bIns="0">
+            <a:spAutoFit/>
+          </a:bodyPr>
+          <a:lstStyle/>
+          <a:p>
+            <a:pPr algn="ctr">
+              <a:spcBef>
+                <a:spcPts val="0"/>
+              </a:spcBef>
+              <a:spcAft>
+                <a:spcPts val="0"/>
+              </a:spcAft>
+            </a:pPr>
+            <a:r>
+              <a:rPr sz="1400" b="1" i="0">
+                <a:solidFill>
+                  <a:srgbClr val="F4F7FC"/>
+                </a:solidFill>
+                <a:latin typeface="Arial"/>
+              </a:rPr>
+              <a:t>Station</a:t>
+            </a:r>
+          </a:p>
+          <a:p>
+            <a:pPr algn="ctr">
+              <a:spcBef>
+                <a:spcPts val="0"/>
+              </a:spcBef>
+              <a:spcAft>
+                <a:spcPts val="0"/>
+              </a:spcAft>
+            </a:pPr>
+            <a:r>
+              <a:rPr sz="900" b="0" i="0" spc="100">
+                <a:solidFill>
+                  <a:srgbClr val="9AA7BD"/>
+                </a:solidFill>
+                <a:latin typeface="Arial"/>
+              </a:rPr>
+              <a:t>Agent</a:t>
+            </a:r>
+          </a:p>
+        </p:txBody>
+      </p:sp>
+      <p:sp>
+        <p:nvSpPr>
+          <p:cNvPr id="11" name="Rectangle 10"/>
+          <p:cNvSpPr/>
+          <p:nvPr/>
+        </p:nvSpPr>
+        <p:spPr>
+          <a:xfrm>
+            <a:off x="3758184" y="2834640"/>
+            <a:ext cx="22860" cy="411480"/>
+          </a:xfrm>
+          <a:prstGeom prst="rect">
+            <a:avLst/>
+          </a:prstGeom>
+          <a:solidFill>
+            <a:srgbClr val="243352"/>
+          </a:solidFill>
+          <a:ln>
+            <a:noFill/>
+          </a:ln>
+          <a:effectLst/>
+        </p:spPr>
+        <p:txBody>
+          <a:bodyPr rtlCol="0" anchor="ctr"/>
+          <a:lstStyle/>
+          <a:p>
+            <a:pPr algn="ctr"/>
+          </a:p>
+        </p:txBody>
+      </p:sp>
+      <p:sp>
+        <p:nvSpPr>
+          <p:cNvPr id="12" name="Rounded Rectangle 11"/>
+          <p:cNvSpPr/>
+          <p:nvPr/>
+        </p:nvSpPr>
+        <p:spPr>
+          <a:xfrm>
+            <a:off x="4919472" y="2057400"/>
+            <a:ext cx="1975104" cy="777240"/>
+          </a:xfrm>
+          <a:prstGeom prst="roundRect">
+            <a:avLst>
+              <a:gd name="adj" fmla="val 8000"/>
+            </a:avLst>
+          </a:prstGeom>
+          <a:solidFill>
+            <a:srgbClr val="16223C"/>
+          </a:solidFill>
+          <a:ln w="15875">
+            <a:solidFill>
+              <a:srgbClr val="4A9EFF"/>
+            </a:solidFill>
+          </a:ln>
+          <a:effectLst/>
+        </p:spPr>
+        <p:txBody>
+          <a:bodyPr rtlCol="0" anchor="ctr"/>
+          <a:lstStyle/>
+          <a:p>
+            <a:pPr algn="ctr"/>
+          </a:p>
+        </p:txBody>
+      </p:sp>
+      <p:sp>
+        <p:nvSpPr>
+          <p:cNvPr id="13" name="TextBox 12"/>
+          <p:cNvSpPr txBox="1"/>
+          <p:nvPr/>
+        </p:nvSpPr>
+        <p:spPr>
+          <a:xfrm>
+            <a:off x="4919472" y="2057400"/>
+            <a:ext cx="1975104" cy="777240"/>
+          </a:xfrm>
+          <a:prstGeom prst="rect">
+            <a:avLst/>
+          </a:prstGeom>
+          <a:noFill/>
+        </p:spPr>
+        <p:txBody>
+          <a:bodyPr wrap="square" anchor="ctr" lIns="0" rIns="0" tIns="0" bIns="0">
+            <a:spAutoFit/>
+          </a:bodyPr>
+          <a:lstStyle/>
+          <a:p>
+            <a:pPr algn="ctr">
+              <a:spcBef>
+                <a:spcPts val="0"/>
+              </a:spcBef>
+              <a:spcAft>
+                <a:spcPts val="0"/>
+              </a:spcAft>
+            </a:pPr>
+            <a:r>
+              <a:rPr sz="1400" b="1" i="0">
+                <a:solidFill>
+                  <a:srgbClr val="F4F7FC"/>
+                </a:solidFill>
+                <a:latin typeface="Arial"/>
+              </a:rPr>
+              <a:t>Crew</a:t>
+            </a:r>
+          </a:p>
+          <a:p>
+            <a:pPr algn="ctr">
+              <a:spcBef>
+                <a:spcPts val="0"/>
+              </a:spcBef>
+              <a:spcAft>
+                <a:spcPts val="0"/>
+              </a:spcAft>
+            </a:pPr>
+            <a:r>
+              <a:rPr sz="900" b="0" i="0" spc="100">
+                <a:solidFill>
+                  <a:srgbClr val="9AA7BD"/>
+                </a:solidFill>
+                <a:latin typeface="Arial"/>
+              </a:rPr>
+              <a:t>Agent</a:t>
+            </a:r>
+          </a:p>
+        </p:txBody>
+      </p:sp>
+      <p:sp>
+        <p:nvSpPr>
+          <p:cNvPr id="14" name="Rectangle 13"/>
+          <p:cNvSpPr/>
+          <p:nvPr/>
+        </p:nvSpPr>
+        <p:spPr>
+          <a:xfrm>
+            <a:off x="5897880" y="2834640"/>
+            <a:ext cx="22860" cy="411480"/>
+          </a:xfrm>
+          <a:prstGeom prst="rect">
+            <a:avLst/>
+          </a:prstGeom>
+          <a:solidFill>
+            <a:srgbClr val="243352"/>
+          </a:solidFill>
+          <a:ln>
+            <a:noFill/>
+          </a:ln>
+          <a:effectLst/>
+        </p:spPr>
+        <p:txBody>
+          <a:bodyPr rtlCol="0" anchor="ctr"/>
+          <a:lstStyle/>
+          <a:p>
+            <a:pPr algn="ctr"/>
+          </a:p>
+        </p:txBody>
+      </p:sp>
+      <p:sp>
+        <p:nvSpPr>
+          <p:cNvPr id="15" name="Rounded Rectangle 14"/>
+          <p:cNvSpPr/>
+          <p:nvPr/>
+        </p:nvSpPr>
+        <p:spPr>
+          <a:xfrm>
+            <a:off x="7059168" y="2057400"/>
+            <a:ext cx="1975104" cy="777240"/>
+          </a:xfrm>
+          <a:prstGeom prst="roundRect">
+            <a:avLst>
+              <a:gd name="adj" fmla="val 8000"/>
+            </a:avLst>
+          </a:prstGeom>
+          <a:solidFill>
+            <a:srgbClr val="16223C"/>
+          </a:solidFill>
+          <a:ln w="15875">
+            <a:solidFill>
+              <a:srgbClr val="4A9EFF"/>
+            </a:solidFill>
+          </a:ln>
+          <a:effectLst/>
+        </p:spPr>
+        <p:txBody>
+          <a:bodyPr rtlCol="0" anchor="ctr"/>
+          <a:lstStyle/>
+          <a:p>
+            <a:pPr algn="ctr"/>
+          </a:p>
+        </p:txBody>
+      </p:sp>
+      <p:sp>
+        <p:nvSpPr>
+          <p:cNvPr id="16" name="TextBox 15"/>
+          <p:cNvSpPr txBox="1"/>
+          <p:nvPr/>
+        </p:nvSpPr>
+        <p:spPr>
+          <a:xfrm>
+            <a:off x="7059168" y="2057400"/>
+            <a:ext cx="1975104" cy="777240"/>
+          </a:xfrm>
+          <a:prstGeom prst="rect">
+            <a:avLst/>
+          </a:prstGeom>
+          <a:noFill/>
+        </p:spPr>
+        <p:txBody>
+          <a:bodyPr wrap="square" anchor="ctr" lIns="0" rIns="0" tIns="0" bIns="0">
+            <a:spAutoFit/>
+          </a:bodyPr>
+          <a:lstStyle/>
+          <a:p>
+            <a:pPr algn="ctr">
+              <a:spcBef>
+                <a:spcPts val="0"/>
+              </a:spcBef>
+              <a:spcAft>
+                <a:spcPts val="0"/>
+              </a:spcAft>
+            </a:pPr>
+            <a:r>
+              <a:rPr sz="1400" b="1" i="0">
+                <a:solidFill>
+                  <a:srgbClr val="F4F7FC"/>
+                </a:solidFill>
+                <a:latin typeface="Arial"/>
+              </a:rPr>
+              <a:t>Maintenance</a:t>
+            </a:r>
+          </a:p>
+          <a:p>
+            <a:pPr algn="ctr">
+              <a:spcBef>
+                <a:spcPts val="0"/>
+              </a:spcBef>
+              <a:spcAft>
+                <a:spcPts val="0"/>
+              </a:spcAft>
+            </a:pPr>
+            <a:r>
+              <a:rPr sz="900" b="0" i="0" spc="100">
+                <a:solidFill>
+                  <a:srgbClr val="9AA7BD"/>
+                </a:solidFill>
+                <a:latin typeface="Arial"/>
+              </a:rPr>
+              <a:t>Agent</a:t>
+            </a:r>
+          </a:p>
+        </p:txBody>
+      </p:sp>
+      <p:sp>
+        <p:nvSpPr>
+          <p:cNvPr id="17" name="Rectangle 16"/>
+          <p:cNvSpPr/>
+          <p:nvPr/>
+        </p:nvSpPr>
+        <p:spPr>
+          <a:xfrm>
+            <a:off x="8037576" y="2834640"/>
+            <a:ext cx="22860" cy="411480"/>
+          </a:xfrm>
+          <a:prstGeom prst="rect">
+            <a:avLst/>
+          </a:prstGeom>
+          <a:solidFill>
+            <a:srgbClr val="243352"/>
+          </a:solidFill>
+          <a:ln>
+            <a:noFill/>
+          </a:ln>
+          <a:effectLst/>
+        </p:spPr>
+        <p:txBody>
+          <a:bodyPr rtlCol="0" anchor="ctr"/>
+          <a:lstStyle/>
+          <a:p>
+            <a:pPr algn="ctr"/>
+          </a:p>
+        </p:txBody>
+      </p:sp>
+      <p:sp>
+        <p:nvSpPr>
+          <p:cNvPr id="18" name="Rounded Rectangle 17"/>
+          <p:cNvSpPr/>
+          <p:nvPr/>
+        </p:nvSpPr>
+        <p:spPr>
+          <a:xfrm>
+            <a:off x="9198864" y="2057400"/>
+            <a:ext cx="1975104" cy="777240"/>
+          </a:xfrm>
+          <a:prstGeom prst="roundRect">
+            <a:avLst>
+              <a:gd name="adj" fmla="val 8000"/>
+            </a:avLst>
+          </a:prstGeom>
+          <a:solidFill>
+            <a:srgbClr val="16223C"/>
+          </a:solidFill>
+          <a:ln w="15875">
+            <a:solidFill>
+              <a:srgbClr val="4A9EFF"/>
+            </a:solidFill>
+          </a:ln>
+          <a:effectLst/>
+        </p:spPr>
+        <p:txBody>
+          <a:bodyPr rtlCol="0" anchor="ctr"/>
+          <a:lstStyle/>
+          <a:p>
+            <a:pPr algn="ctr"/>
+          </a:p>
+        </p:txBody>
+      </p:sp>
+      <p:sp>
+        <p:nvSpPr>
+          <p:cNvPr id="19" name="TextBox 18"/>
+          <p:cNvSpPr txBox="1"/>
+          <p:nvPr/>
+        </p:nvSpPr>
+        <p:spPr>
+          <a:xfrm>
+            <a:off x="9198864" y="2057400"/>
+            <a:ext cx="1975104" cy="777240"/>
+          </a:xfrm>
+          <a:prstGeom prst="rect">
+            <a:avLst/>
+          </a:prstGeom>
+          <a:noFill/>
+        </p:spPr>
+        <p:txBody>
+          <a:bodyPr wrap="square" anchor="ctr" lIns="0" rIns="0" tIns="0" bIns="0">
+            <a:spAutoFit/>
+          </a:bodyPr>
+          <a:lstStyle/>
+          <a:p>
+            <a:pPr algn="ctr">
+              <a:spcBef>
+                <a:spcPts val="0"/>
+              </a:spcBef>
+              <a:spcAft>
+                <a:spcPts val="0"/>
+              </a:spcAft>
+            </a:pPr>
+            <a:r>
+              <a:rPr sz="1400" b="1" i="0">
+                <a:solidFill>
+                  <a:srgbClr val="F4F7FC"/>
+                </a:solidFill>
+                <a:latin typeface="Arial"/>
+              </a:rPr>
+              <a:t>Passenger Info</a:t>
+            </a:r>
+          </a:p>
+          <a:p>
+            <a:pPr algn="ctr">
+              <a:spcBef>
+                <a:spcPts val="0"/>
+              </a:spcBef>
+              <a:spcAft>
+                <a:spcPts val="0"/>
+              </a:spcAft>
+            </a:pPr>
+            <a:r>
+              <a:rPr sz="900" b="0" i="0" spc="100">
+                <a:solidFill>
+                  <a:srgbClr val="9AA7BD"/>
+                </a:solidFill>
+                <a:latin typeface="Arial"/>
+              </a:rPr>
+              <a:t>Agent</a:t>
+            </a:r>
+          </a:p>
+        </p:txBody>
+      </p:sp>
+      <p:sp>
+        <p:nvSpPr>
+          <p:cNvPr id="20" name="Rectangle 19"/>
+          <p:cNvSpPr/>
+          <p:nvPr/>
+        </p:nvSpPr>
+        <p:spPr>
+          <a:xfrm>
+            <a:off x="10177272" y="2834640"/>
+            <a:ext cx="22860" cy="411480"/>
+          </a:xfrm>
+          <a:prstGeom prst="rect">
+            <a:avLst/>
+          </a:prstGeom>
+          <a:solidFill>
+            <a:srgbClr val="243352"/>
+          </a:solidFill>
+          <a:ln>
+            <a:noFill/>
+          </a:ln>
+          <a:effectLst/>
+        </p:spPr>
+        <p:txBody>
+          <a:bodyPr rtlCol="0" anchor="ctr"/>
+          <a:lstStyle/>
+          <a:p>
+            <a:pPr algn="ctr"/>
+          </a:p>
+        </p:txBody>
+      </p:sp>
+      <p:sp>
+        <p:nvSpPr>
+          <p:cNvPr id="21" name="Rounded Rectangle 20"/>
+          <p:cNvSpPr/>
+          <p:nvPr/>
+        </p:nvSpPr>
+        <p:spPr>
+          <a:xfrm>
+            <a:off x="640080" y="3246120"/>
+            <a:ext cx="10881360" cy="566928"/>
+          </a:xfrm>
+          <a:prstGeom prst="roundRect">
+            <a:avLst>
+              <a:gd name="adj" fmla="val 8000"/>
+            </a:avLst>
+          </a:prstGeom>
+          <a:solidFill>
+            <a:srgbClr val="4A9EFF"/>
+          </a:solidFill>
+          <a:ln>
+            <a:noFill/>
+          </a:ln>
+          <a:effectLst/>
+        </p:spPr>
+        <p:txBody>
+          <a:bodyPr rtlCol="0" anchor="ctr"/>
+          <a:lstStyle/>
+          <a:p>
+            <a:pPr algn="ctr"/>
+          </a:p>
+        </p:txBody>
+      </p:sp>
+      <p:sp>
+        <p:nvSpPr>
+          <p:cNvPr id="22" name="TextBox 21"/>
+          <p:cNvSpPr txBox="1"/>
+          <p:nvPr/>
+        </p:nvSpPr>
+        <p:spPr>
+          <a:xfrm>
+            <a:off x="640080" y="3246120"/>
+            <a:ext cx="10881360" cy="566928"/>
+          </a:xfrm>
+          <a:prstGeom prst="rect">
+            <a:avLst/>
+          </a:prstGeom>
+          <a:noFill/>
+        </p:spPr>
+        <p:txBody>
+          <a:bodyPr wrap="square" anchor="ctr" lIns="0" rIns="0" tIns="0" bIns="0">
+            <a:spAutoFit/>
+          </a:bodyPr>
+          <a:lstStyle/>
+          <a:p>
+            <a:pPr algn="ctr">
+              <a:spcBef>
+                <a:spcPts val="0"/>
+              </a:spcBef>
+              <a:spcAft>
+                <a:spcPts val="0"/>
+              </a:spcAft>
+            </a:pPr>
+            <a:r>
+              <a:rPr sz="1500" b="1" i="0" spc="300">
+                <a:solidFill>
+                  <a:srgbClr val="010715"/>
+                </a:solidFill>
+                <a:latin typeface="Arial"/>
+              </a:rPr>
+              <a:t>CENTRAL MESSAGE BUS</a:t>
+            </a:r>
+          </a:p>
+        </p:txBody>
+      </p:sp>
+      <p:sp>
+        <p:nvSpPr>
+          <p:cNvPr id="23" name="TextBox 22"/>
+          <p:cNvSpPr txBox="1"/>
+          <p:nvPr/>
+        </p:nvSpPr>
+        <p:spPr>
+          <a:xfrm>
+            <a:off x="640080" y="4069080"/>
+            <a:ext cx="10881360" cy="365760"/>
+          </a:xfrm>
+          <a:prstGeom prst="rect">
+            <a:avLst/>
+          </a:prstGeom>
+          <a:noFill/>
+        </p:spPr>
+        <p:txBody>
+          <a:bodyPr wrap="square" anchor="t" lIns="0" rIns="0" tIns="0" bIns="0">
+            <a:spAutoFit/>
+          </a:bodyPr>
+          <a:lstStyle/>
+          <a:p>
+            <a:pPr algn="l">
+              <a:spcBef>
+                <a:spcPts val="0"/>
+              </a:spcBef>
+              <a:spcAft>
+                <a:spcPts val="0"/>
+              </a:spcAft>
+            </a:pPr>
+            <a:r>
+              <a:rPr sz="1100" b="1" i="0" spc="200">
+                <a:solidFill>
+                  <a:srgbClr val="9AA7BD"/>
+                </a:solidFill>
+                <a:latin typeface="Arial"/>
+              </a:rPr>
+              <a:t>DATA SOURCES</a:t>
+            </a:r>
+          </a:p>
+        </p:txBody>
+      </p:sp>
+      <p:sp>
+        <p:nvSpPr>
+          <p:cNvPr id="24" name="Rounded Rectangle 23"/>
+          <p:cNvSpPr/>
+          <p:nvPr/>
+        </p:nvSpPr>
+        <p:spPr>
+          <a:xfrm>
+            <a:off x="640080" y="4434840"/>
+            <a:ext cx="1975104" cy="548640"/>
           </a:xfrm>
           <a:prstGeom prst="roundRect">
             <a:avLst>
@@ -9529,20 +8797,6 @@
           </a:ln>
           <a:effectLst/>
         </p:spPr>
-        <p:style>
-          <a:lnRef idx="1">
-            <a:schemeClr val="accent1"/>
-          </a:lnRef>
-          <a:fillRef idx="3">
-            <a:schemeClr val="accent1"/>
-          </a:fillRef>
-          <a:effectRef idx="2">
-            <a:schemeClr val="accent1"/>
-          </a:effectRef>
-          <a:fontRef idx="minor">
-            <a:schemeClr val="lt1"/>
-          </a:fontRef>
-        </p:style>
         <p:txBody>
           <a:bodyPr rtlCol="0" anchor="ctr"/>
           <a:lstStyle/>
@@ -9553,58 +8807,14 @@
       </p:sp>
       <p:sp>
         <p:nvSpPr>
-          <p:cNvPr id="7" name="Rectangle 6"/>
-          <p:cNvSpPr/>
-          <p:nvPr/>
-        </p:nvSpPr>
-        <p:spPr>
-          <a:xfrm>
-            <a:off x="640080" y="2057400"/>
-            <a:ext cx="2670048" cy="82296"/>
-          </a:xfrm>
-          <a:prstGeom prst="rect">
-            <a:avLst/>
-          </a:prstGeom>
-          <a:solidFill>
-            <a:srgbClr val="4A9EFF"/>
-          </a:solidFill>
-          <a:ln>
-            <a:noFill/>
-          </a:ln>
-          <a:effectLst/>
-        </p:spPr>
-        <p:style>
-          <a:lnRef idx="1">
-            <a:schemeClr val="accent1"/>
-          </a:lnRef>
-          <a:fillRef idx="3">
-            <a:schemeClr val="accent1"/>
-          </a:fillRef>
-          <a:effectRef idx="2">
-            <a:schemeClr val="accent1"/>
-          </a:effectRef>
-          <a:fontRef idx="minor">
-            <a:schemeClr val="lt1"/>
-          </a:fontRef>
-        </p:style>
-        <p:txBody>
-          <a:bodyPr rtlCol="0" anchor="ctr"/>
-          <a:lstStyle/>
-          <a:p>
-            <a:pPr algn="ctr"/>
-          </a:p>
-        </p:txBody>
-      </p:sp>
-      <p:sp>
-        <p:nvSpPr>
-          <p:cNvPr id="8" name="TextBox 7"/>
+          <p:cNvPr id="25" name="TextBox 24"/>
           <p:cNvSpPr txBox="1"/>
           <p:nvPr/>
         </p:nvSpPr>
         <p:spPr>
           <a:xfrm>
-            <a:off x="822959" y="2514600"/>
-            <a:ext cx="2304288" cy="914400"/>
+            <a:off x="640080" y="4434840"/>
+            <a:ext cx="1975104" cy="548640"/>
           </a:xfrm>
           <a:prstGeom prst="rect">
             <a:avLst/>
@@ -9612,7 +8822,7 @@
           <a:noFill/>
         </p:spPr>
         <p:txBody>
-          <a:bodyPr wrap="square" anchor="t" lIns="0" rIns="0" tIns="0" bIns="0">
+          <a:bodyPr wrap="square" anchor="ctr" lIns="0" rIns="0" tIns="0" bIns="0">
             <a:spAutoFit/>
           </a:bodyPr>
           <a:lstStyle/>
@@ -9626,114 +8836,27 @@
               </a:spcAft>
             </a:pPr>
             <a:r>
-              <a:rPr sz="4000" b="1" i="0">
-                <a:solidFill>
-                  <a:srgbClr val="4A9EFF"/>
-                </a:solidFill>
-                <a:latin typeface="Calibri"/>
-              </a:rPr>
-              <a:t>+34%</a:t>
-            </a:r>
-          </a:p>
-        </p:txBody>
-      </p:sp>
-      <p:sp>
-        <p:nvSpPr>
-          <p:cNvPr id="9" name="TextBox 8"/>
-          <p:cNvSpPr txBox="1"/>
-          <p:nvPr/>
-        </p:nvSpPr>
-        <p:spPr>
-          <a:xfrm>
-            <a:off x="822959" y="3474720"/>
-            <a:ext cx="2304288" cy="457200"/>
-          </a:xfrm>
-          <a:prstGeom prst="rect">
-            <a:avLst/>
-          </a:prstGeom>
-          <a:noFill/>
-        </p:spPr>
-        <p:txBody>
-          <a:bodyPr wrap="square" anchor="t" lIns="0" rIns="0" tIns="0" bIns="0">
-            <a:spAutoFit/>
-          </a:bodyPr>
-          <a:lstStyle/>
-          <a:p>
-            <a:pPr algn="ctr">
-              <a:spcBef>
-                <a:spcPts val="0"/>
-              </a:spcBef>
-              <a:spcAft>
-                <a:spcPts val="0"/>
-              </a:spcAft>
-            </a:pPr>
-            <a:r>
-              <a:rPr sz="1500" b="1" i="0">
-                <a:solidFill>
-                  <a:srgbClr val="F4F7FC"/>
-                </a:solidFill>
-                <a:latin typeface="Calibri"/>
-              </a:rPr>
-              <a:t>network throughput</a:t>
-            </a:r>
-          </a:p>
-        </p:txBody>
-      </p:sp>
-      <p:sp>
-        <p:nvSpPr>
-          <p:cNvPr id="10" name="TextBox 9"/>
-          <p:cNvSpPr txBox="1"/>
-          <p:nvPr/>
-        </p:nvSpPr>
-        <p:spPr>
-          <a:xfrm>
-            <a:off x="822959" y="3931920"/>
-            <a:ext cx="2304288" cy="640080"/>
-          </a:xfrm>
-          <a:prstGeom prst="rect">
-            <a:avLst/>
-          </a:prstGeom>
-          <a:noFill/>
-        </p:spPr>
-        <p:txBody>
-          <a:bodyPr wrap="square" anchor="t" lIns="0" rIns="0" tIns="0" bIns="0">
-            <a:spAutoFit/>
-          </a:bodyPr>
-          <a:lstStyle/>
-          <a:p>
-            <a:pPr algn="ctr">
-              <a:lnSpc>
-                <a:spcPct val="100000"/>
-              </a:lnSpc>
-              <a:spcBef>
-                <a:spcPts val="0"/>
-              </a:spcBef>
-              <a:spcAft>
-                <a:spcPts val="0"/>
-              </a:spcAft>
-            </a:pPr>
-            <a:r>
-              <a:rPr sz="1150" b="0" i="0">
-                <a:solidFill>
-                  <a:srgbClr val="9AA7BD"/>
-                </a:solidFill>
-                <a:latin typeface="Calibri"/>
-              </a:rPr>
-              <a:t>vs naive dispatch (MDPI multi-agent study)</a:t>
-            </a:r>
-          </a:p>
-        </p:txBody>
-      </p:sp>
-      <p:sp>
-        <p:nvSpPr>
-          <p:cNvPr id="11" name="Rounded Rectangle 10"/>
+              <a:rPr sz="1300" b="1" i="0">
+                <a:solidFill>
+                  <a:srgbClr val="FF9E1B"/>
+                </a:solidFill>
+                <a:latin typeface="Arial"/>
+              </a:rPr>
+              <a:t>NTES</a:t>
+            </a:r>
+          </a:p>
+        </p:txBody>
+      </p:sp>
+      <p:sp>
+        <p:nvSpPr>
+          <p:cNvPr id="26" name="Rounded Rectangle 25"/>
           <p:cNvSpPr/>
           <p:nvPr/>
         </p:nvSpPr>
         <p:spPr>
           <a:xfrm>
-            <a:off x="3474720" y="2057400"/>
-            <a:ext cx="2670048" cy="2651760"/>
+            <a:off x="2779776" y="4434840"/>
+            <a:ext cx="1975104" cy="548640"/>
           </a:xfrm>
           <a:prstGeom prst="roundRect">
             <a:avLst>
@@ -9750,20 +8873,6 @@
           </a:ln>
           <a:effectLst/>
         </p:spPr>
-        <p:style>
-          <a:lnRef idx="1">
-            <a:schemeClr val="accent1"/>
-          </a:lnRef>
-          <a:fillRef idx="3">
-            <a:schemeClr val="accent1"/>
-          </a:fillRef>
-          <a:effectRef idx="2">
-            <a:schemeClr val="accent1"/>
-          </a:effectRef>
-          <a:fontRef idx="minor">
-            <a:schemeClr val="lt1"/>
-          </a:fontRef>
-        </p:style>
         <p:txBody>
           <a:bodyPr rtlCol="0" anchor="ctr"/>
           <a:lstStyle/>
@@ -9774,58 +8883,14 @@
       </p:sp>
       <p:sp>
         <p:nvSpPr>
-          <p:cNvPr id="12" name="Rectangle 11"/>
-          <p:cNvSpPr/>
-          <p:nvPr/>
-        </p:nvSpPr>
-        <p:spPr>
-          <a:xfrm>
-            <a:off x="3474720" y="2057400"/>
-            <a:ext cx="2670048" cy="82296"/>
-          </a:xfrm>
-          <a:prstGeom prst="rect">
-            <a:avLst/>
-          </a:prstGeom>
-          <a:solidFill>
-            <a:srgbClr val="FF9E1B"/>
-          </a:solidFill>
-          <a:ln>
-            <a:noFill/>
-          </a:ln>
-          <a:effectLst/>
-        </p:spPr>
-        <p:style>
-          <a:lnRef idx="1">
-            <a:schemeClr val="accent1"/>
-          </a:lnRef>
-          <a:fillRef idx="3">
-            <a:schemeClr val="accent1"/>
-          </a:fillRef>
-          <a:effectRef idx="2">
-            <a:schemeClr val="accent1"/>
-          </a:effectRef>
-          <a:fontRef idx="minor">
-            <a:schemeClr val="lt1"/>
-          </a:fontRef>
-        </p:style>
-        <p:txBody>
-          <a:bodyPr rtlCol="0" anchor="ctr"/>
-          <a:lstStyle/>
-          <a:p>
-            <a:pPr algn="ctr"/>
-          </a:p>
-        </p:txBody>
-      </p:sp>
-      <p:sp>
-        <p:nvSpPr>
-          <p:cNvPr id="13" name="TextBox 12"/>
+          <p:cNvPr id="27" name="TextBox 26"/>
           <p:cNvSpPr txBox="1"/>
           <p:nvPr/>
         </p:nvSpPr>
         <p:spPr>
           <a:xfrm>
-            <a:off x="3657600" y="2514600"/>
-            <a:ext cx="2304288" cy="914400"/>
+            <a:off x="2779776" y="4434840"/>
+            <a:ext cx="1975104" cy="548640"/>
           </a:xfrm>
           <a:prstGeom prst="rect">
             <a:avLst/>
@@ -9833,7 +8898,7 @@
           <a:noFill/>
         </p:spPr>
         <p:txBody>
-          <a:bodyPr wrap="square" anchor="t" lIns="0" rIns="0" tIns="0" bIns="0">
+          <a:bodyPr wrap="square" anchor="ctr" lIns="0" rIns="0" tIns="0" bIns="0">
             <a:spAutoFit/>
           </a:bodyPr>
           <a:lstStyle/>
@@ -9847,114 +8912,27 @@
               </a:spcAft>
             </a:pPr>
             <a:r>
-              <a:rPr sz="4000" b="1" i="0">
+              <a:rPr sz="1300" b="1" i="0">
                 <a:solidFill>
                   <a:srgbClr val="FF9E1B"/>
                 </a:solidFill>
-                <a:latin typeface="Calibri"/>
-              </a:rPr>
-              <a:t>90%</a:t>
-            </a:r>
-          </a:p>
-        </p:txBody>
-      </p:sp>
-      <p:sp>
-        <p:nvSpPr>
-          <p:cNvPr id="14" name="TextBox 13"/>
-          <p:cNvSpPr txBox="1"/>
-          <p:nvPr/>
-        </p:nvSpPr>
-        <p:spPr>
-          <a:xfrm>
-            <a:off x="3657600" y="3474720"/>
-            <a:ext cx="2304288" cy="457200"/>
-          </a:xfrm>
-          <a:prstGeom prst="rect">
-            <a:avLst/>
-          </a:prstGeom>
-          <a:noFill/>
-        </p:spPr>
-        <p:txBody>
-          <a:bodyPr wrap="square" anchor="t" lIns="0" rIns="0" tIns="0" bIns="0">
-            <a:spAutoFit/>
-          </a:bodyPr>
-          <a:lstStyle/>
-          <a:p>
-            <a:pPr algn="ctr">
-              <a:spcBef>
-                <a:spcPts val="0"/>
-              </a:spcBef>
-              <a:spcAft>
-                <a:spcPts val="0"/>
-              </a:spcAft>
-            </a:pPr>
-            <a:r>
-              <a:rPr sz="1500" b="1" i="0">
-                <a:solidFill>
-                  <a:srgbClr val="F4F7FC"/>
-                </a:solidFill>
-                <a:latin typeface="Calibri"/>
-              </a:rPr>
-              <a:t>instant platforming</a:t>
-            </a:r>
-          </a:p>
-        </p:txBody>
-      </p:sp>
-      <p:sp>
-        <p:nvSpPr>
-          <p:cNvPr id="15" name="TextBox 14"/>
-          <p:cNvSpPr txBox="1"/>
-          <p:nvPr/>
-        </p:nvSpPr>
-        <p:spPr>
-          <a:xfrm>
-            <a:off x="3657600" y="3931920"/>
-            <a:ext cx="2304288" cy="640080"/>
-          </a:xfrm>
-          <a:prstGeom prst="rect">
-            <a:avLst/>
-          </a:prstGeom>
-          <a:noFill/>
-        </p:spPr>
-        <p:txBody>
-          <a:bodyPr wrap="square" anchor="t" lIns="0" rIns="0" tIns="0" bIns="0">
-            <a:spAutoFit/>
-          </a:bodyPr>
-          <a:lstStyle/>
-          <a:p>
-            <a:pPr algn="ctr">
-              <a:lnSpc>
-                <a:spcPct val="100000"/>
-              </a:lnSpc>
-              <a:spcBef>
-                <a:spcPts val="0"/>
-              </a:spcBef>
-              <a:spcAft>
-                <a:spcPts val="0"/>
-              </a:spcAft>
-            </a:pPr>
-            <a:r>
-              <a:rPr sz="1150" b="0" i="0">
-                <a:solidFill>
-                  <a:srgbClr val="9AA7BD"/>
-                </a:solidFill>
-                <a:latin typeface="Calibri"/>
-              </a:rPr>
-              <a:t>trains platformed without waiting, in sim</a:t>
-            </a:r>
-          </a:p>
-        </p:txBody>
-      </p:sp>
-      <p:sp>
-        <p:nvSpPr>
-          <p:cNvPr id="16" name="Rounded Rectangle 15"/>
+                <a:latin typeface="Arial"/>
+              </a:rPr>
+              <a:t>IRCTC</a:t>
+            </a:r>
+          </a:p>
+        </p:txBody>
+      </p:sp>
+      <p:sp>
+        <p:nvSpPr>
+          <p:cNvPr id="28" name="Rounded Rectangle 27"/>
           <p:cNvSpPr/>
           <p:nvPr/>
         </p:nvSpPr>
         <p:spPr>
           <a:xfrm>
-            <a:off x="6309360" y="2057400"/>
-            <a:ext cx="2670048" cy="2651760"/>
+            <a:off x="4919472" y="4434840"/>
+            <a:ext cx="1975104" cy="548640"/>
           </a:xfrm>
           <a:prstGeom prst="roundRect">
             <a:avLst>
@@ -9971,20 +8949,6 @@
           </a:ln>
           <a:effectLst/>
         </p:spPr>
-        <p:style>
-          <a:lnRef idx="1">
-            <a:schemeClr val="accent1"/>
-          </a:lnRef>
-          <a:fillRef idx="3">
-            <a:schemeClr val="accent1"/>
-          </a:fillRef>
-          <a:effectRef idx="2">
-            <a:schemeClr val="accent1"/>
-          </a:effectRef>
-          <a:fontRef idx="minor">
-            <a:schemeClr val="lt1"/>
-          </a:fontRef>
-        </p:style>
         <p:txBody>
           <a:bodyPr rtlCol="0" anchor="ctr"/>
           <a:lstStyle/>
@@ -9995,58 +8959,14 @@
       </p:sp>
       <p:sp>
         <p:nvSpPr>
-          <p:cNvPr id="17" name="Rectangle 16"/>
-          <p:cNvSpPr/>
-          <p:nvPr/>
-        </p:nvSpPr>
-        <p:spPr>
-          <a:xfrm>
-            <a:off x="6309360" y="2057400"/>
-            <a:ext cx="2670048" cy="82296"/>
-          </a:xfrm>
-          <a:prstGeom prst="rect">
-            <a:avLst/>
-          </a:prstGeom>
-          <a:solidFill>
-            <a:srgbClr val="35D07F"/>
-          </a:solidFill>
-          <a:ln>
-            <a:noFill/>
-          </a:ln>
-          <a:effectLst/>
-        </p:spPr>
-        <p:style>
-          <a:lnRef idx="1">
-            <a:schemeClr val="accent1"/>
-          </a:lnRef>
-          <a:fillRef idx="3">
-            <a:schemeClr val="accent1"/>
-          </a:fillRef>
-          <a:effectRef idx="2">
-            <a:schemeClr val="accent1"/>
-          </a:effectRef>
-          <a:fontRef idx="minor">
-            <a:schemeClr val="lt1"/>
-          </a:fontRef>
-        </p:style>
-        <p:txBody>
-          <a:bodyPr rtlCol="0" anchor="ctr"/>
-          <a:lstStyle/>
-          <a:p>
-            <a:pPr algn="ctr"/>
-          </a:p>
-        </p:txBody>
-      </p:sp>
-      <p:sp>
-        <p:nvSpPr>
-          <p:cNvPr id="18" name="TextBox 17"/>
+          <p:cNvPr id="29" name="TextBox 28"/>
           <p:cNvSpPr txBox="1"/>
           <p:nvPr/>
         </p:nvSpPr>
         <p:spPr>
           <a:xfrm>
-            <a:off x="6492240" y="2514600"/>
-            <a:ext cx="2304288" cy="914400"/>
+            <a:off x="4919472" y="4434840"/>
+            <a:ext cx="1975104" cy="548640"/>
           </a:xfrm>
           <a:prstGeom prst="rect">
             <a:avLst/>
@@ -10054,7 +8974,7 @@
           <a:noFill/>
         </p:spPr>
         <p:txBody>
-          <a:bodyPr wrap="square" anchor="t" lIns="0" rIns="0" tIns="0" bIns="0">
+          <a:bodyPr wrap="square" anchor="ctr" lIns="0" rIns="0" tIns="0" bIns="0">
             <a:spAutoFit/>
           </a:bodyPr>
           <a:lstStyle/>
@@ -10068,114 +8988,27 @@
               </a:spcAft>
             </a:pPr>
             <a:r>
-              <a:rPr sz="4000" b="1" i="0">
-                <a:solidFill>
-                  <a:srgbClr val="35D07F"/>
-                </a:solidFill>
-                <a:latin typeface="Calibri"/>
-              </a:rPr>
-              <a:t>&lt;100ms</a:t>
-            </a:r>
-          </a:p>
-        </p:txBody>
-      </p:sp>
-      <p:sp>
-        <p:nvSpPr>
-          <p:cNvPr id="19" name="TextBox 18"/>
-          <p:cNvSpPr txBox="1"/>
-          <p:nvPr/>
-        </p:nvSpPr>
-        <p:spPr>
-          <a:xfrm>
-            <a:off x="6492240" y="3474720"/>
-            <a:ext cx="2304288" cy="457200"/>
-          </a:xfrm>
-          <a:prstGeom prst="rect">
-            <a:avLst/>
-          </a:prstGeom>
-          <a:noFill/>
-        </p:spPr>
-        <p:txBody>
-          <a:bodyPr wrap="square" anchor="t" lIns="0" rIns="0" tIns="0" bIns="0">
-            <a:spAutoFit/>
-          </a:bodyPr>
-          <a:lstStyle/>
-          <a:p>
-            <a:pPr algn="ctr">
-              <a:spcBef>
-                <a:spcPts val="0"/>
-              </a:spcBef>
-              <a:spcAft>
-                <a:spcPts val="0"/>
-              </a:spcAft>
-            </a:pPr>
-            <a:r>
-              <a:rPr sz="1500" b="1" i="0">
-                <a:solidFill>
-                  <a:srgbClr val="F4F7FC"/>
-                </a:solidFill>
-                <a:latin typeface="Calibri"/>
-              </a:rPr>
-              <a:t>agent response</a:t>
-            </a:r>
-          </a:p>
-        </p:txBody>
-      </p:sp>
-      <p:sp>
-        <p:nvSpPr>
-          <p:cNvPr id="20" name="TextBox 19"/>
-          <p:cNvSpPr txBox="1"/>
-          <p:nvPr/>
-        </p:nvSpPr>
-        <p:spPr>
-          <a:xfrm>
-            <a:off x="6492240" y="3931920"/>
-            <a:ext cx="2304288" cy="640080"/>
-          </a:xfrm>
-          <a:prstGeom prst="rect">
-            <a:avLst/>
-          </a:prstGeom>
-          <a:noFill/>
-        </p:spPr>
-        <p:txBody>
-          <a:bodyPr wrap="square" anchor="t" lIns="0" rIns="0" tIns="0" bIns="0">
-            <a:spAutoFit/>
-          </a:bodyPr>
-          <a:lstStyle/>
-          <a:p>
-            <a:pPr algn="ctr">
-              <a:lnSpc>
-                <a:spcPct val="100000"/>
-              </a:lnSpc>
-              <a:spcBef>
-                <a:spcPts val="0"/>
-              </a:spcBef>
-              <a:spcAft>
-                <a:spcPts val="0"/>
-              </a:spcAft>
-            </a:pPr>
-            <a:r>
-              <a:rPr sz="1150" b="0" i="0">
-                <a:solidFill>
-                  <a:srgbClr val="9AA7BD"/>
-                </a:solidFill>
-                <a:latin typeface="Calibri"/>
-              </a:rPr>
-              <a:t>from event detected to decision proposed</a:t>
-            </a:r>
-          </a:p>
-        </p:txBody>
-      </p:sp>
-      <p:sp>
-        <p:nvSpPr>
-          <p:cNvPr id="21" name="Rounded Rectangle 20"/>
+              <a:rPr sz="1300" b="1" i="0">
+                <a:solidFill>
+                  <a:srgbClr val="FF9E1B"/>
+                </a:solidFill>
+                <a:latin typeface="Arial"/>
+              </a:rPr>
+              <a:t>FOIS</a:t>
+            </a:r>
+          </a:p>
+        </p:txBody>
+      </p:sp>
+      <p:sp>
+        <p:nvSpPr>
+          <p:cNvPr id="30" name="Rounded Rectangle 29"/>
           <p:cNvSpPr/>
           <p:nvPr/>
         </p:nvSpPr>
         <p:spPr>
           <a:xfrm>
-            <a:off x="9144000" y="2057400"/>
-            <a:ext cx="2670048" cy="2651760"/>
+            <a:off x="7059168" y="4434840"/>
+            <a:ext cx="1975104" cy="548640"/>
           </a:xfrm>
           <a:prstGeom prst="roundRect">
             <a:avLst>
@@ -10192,20 +9025,6 @@
           </a:ln>
           <a:effectLst/>
         </p:spPr>
-        <p:style>
-          <a:lnRef idx="1">
-            <a:schemeClr val="accent1"/>
-          </a:lnRef>
-          <a:fillRef idx="3">
-            <a:schemeClr val="accent1"/>
-          </a:fillRef>
-          <a:effectRef idx="2">
-            <a:schemeClr val="accent1"/>
-          </a:effectRef>
-          <a:fontRef idx="minor">
-            <a:schemeClr val="lt1"/>
-          </a:fontRef>
-        </p:style>
         <p:txBody>
           <a:bodyPr rtlCol="0" anchor="ctr"/>
           <a:lstStyle/>
@@ -10216,40 +9035,72 @@
       </p:sp>
       <p:sp>
         <p:nvSpPr>
-          <p:cNvPr id="22" name="Rectangle 21"/>
+          <p:cNvPr id="31" name="TextBox 30"/>
+          <p:cNvSpPr txBox="1"/>
+          <p:nvPr/>
+        </p:nvSpPr>
+        <p:spPr>
+          <a:xfrm>
+            <a:off x="7059168" y="4434840"/>
+            <a:ext cx="1975104" cy="548640"/>
+          </a:xfrm>
+          <a:prstGeom prst="rect">
+            <a:avLst/>
+          </a:prstGeom>
+          <a:noFill/>
+        </p:spPr>
+        <p:txBody>
+          <a:bodyPr wrap="square" anchor="ctr" lIns="0" rIns="0" tIns="0" bIns="0">
+            <a:spAutoFit/>
+          </a:bodyPr>
+          <a:lstStyle/>
+          <a:p>
+            <a:pPr algn="ctr">
+              <a:spcBef>
+                <a:spcPts val="0"/>
+              </a:spcBef>
+              <a:spcAft>
+                <a:spcPts val="0"/>
+              </a:spcAft>
+            </a:pPr>
+            <a:r>
+              <a:rPr sz="1300" b="1" i="0">
+                <a:solidFill>
+                  <a:srgbClr val="FF9E1B"/>
+                </a:solidFill>
+                <a:latin typeface="Arial"/>
+              </a:rPr>
+              <a:t>SCADA</a:t>
+            </a:r>
+          </a:p>
+        </p:txBody>
+      </p:sp>
+      <p:sp>
+        <p:nvSpPr>
+          <p:cNvPr id="32" name="Rounded Rectangle 31"/>
           <p:cNvSpPr/>
           <p:nvPr/>
         </p:nvSpPr>
         <p:spPr>
           <a:xfrm>
-            <a:off x="9144000" y="2057400"/>
-            <a:ext cx="2670048" cy="82296"/>
-          </a:xfrm>
-          <a:prstGeom prst="rect">
-            <a:avLst/>
+            <a:off x="9198864" y="4434840"/>
+            <a:ext cx="1975104" cy="548640"/>
+          </a:xfrm>
+          <a:prstGeom prst="roundRect">
+            <a:avLst>
+              <a:gd name="adj" fmla="val 8000"/>
+            </a:avLst>
           </a:prstGeom>
           <a:solidFill>
-            <a:srgbClr val="4A9EFF"/>
+            <a:srgbClr val="121B30"/>
           </a:solidFill>
-          <a:ln>
-            <a:noFill/>
+          <a:ln w="12700">
+            <a:solidFill>
+              <a:srgbClr val="243352"/>
+            </a:solidFill>
           </a:ln>
           <a:effectLst/>
         </p:spPr>
-        <p:style>
-          <a:lnRef idx="1">
-            <a:schemeClr val="accent1"/>
-          </a:lnRef>
-          <a:fillRef idx="3">
-            <a:schemeClr val="accent1"/>
-          </a:fillRef>
-          <a:effectRef idx="2">
-            <a:schemeClr val="accent1"/>
-          </a:effectRef>
-          <a:fontRef idx="minor">
-            <a:schemeClr val="lt1"/>
-          </a:fontRef>
-        </p:style>
         <p:txBody>
           <a:bodyPr rtlCol="0" anchor="ctr"/>
           <a:lstStyle/>
@@ -10260,14 +9111,141 @@
       </p:sp>
       <p:sp>
         <p:nvSpPr>
-          <p:cNvPr id="23" name="TextBox 22"/>
+          <p:cNvPr id="33" name="TextBox 32"/>
           <p:cNvSpPr txBox="1"/>
           <p:nvPr/>
         </p:nvSpPr>
         <p:spPr>
           <a:xfrm>
-            <a:off x="9326880" y="2514600"/>
-            <a:ext cx="2304288" cy="914400"/>
+            <a:off x="9198864" y="4434840"/>
+            <a:ext cx="1975104" cy="548640"/>
+          </a:xfrm>
+          <a:prstGeom prst="rect">
+            <a:avLst/>
+          </a:prstGeom>
+          <a:noFill/>
+        </p:spPr>
+        <p:txBody>
+          <a:bodyPr wrap="square" anchor="ctr" lIns="0" rIns="0" tIns="0" bIns="0">
+            <a:spAutoFit/>
+          </a:bodyPr>
+          <a:lstStyle/>
+          <a:p>
+            <a:pPr algn="ctr">
+              <a:spcBef>
+                <a:spcPts val="0"/>
+              </a:spcBef>
+              <a:spcAft>
+                <a:spcPts val="0"/>
+              </a:spcAft>
+            </a:pPr>
+            <a:r>
+              <a:rPr sz="1300" b="1" i="0">
+                <a:solidFill>
+                  <a:srgbClr val="FF9E1B"/>
+                </a:solidFill>
+                <a:latin typeface="Arial"/>
+              </a:rPr>
+              <a:t>Weather</a:t>
+            </a:r>
+          </a:p>
+        </p:txBody>
+      </p:sp>
+      <p:sp>
+        <p:nvSpPr>
+          <p:cNvPr id="34" name="Rounded Rectangle 33"/>
+          <p:cNvSpPr/>
+          <p:nvPr/>
+        </p:nvSpPr>
+        <p:spPr>
+          <a:xfrm>
+            <a:off x="640080" y="5349240"/>
+            <a:ext cx="10881360" cy="640080"/>
+          </a:xfrm>
+          <a:prstGeom prst="roundRect">
+            <a:avLst>
+              <a:gd name="adj" fmla="val 8000"/>
+            </a:avLst>
+          </a:prstGeom>
+          <a:solidFill>
+            <a:srgbClr val="121B30"/>
+          </a:solidFill>
+          <a:ln w="12700">
+            <a:solidFill>
+              <a:srgbClr val="243352"/>
+            </a:solidFill>
+          </a:ln>
+          <a:effectLst/>
+        </p:spPr>
+        <p:txBody>
+          <a:bodyPr rtlCol="0" anchor="ctr"/>
+          <a:lstStyle/>
+          <a:p>
+            <a:pPr algn="ctr"/>
+          </a:p>
+        </p:txBody>
+      </p:sp>
+      <p:sp>
+        <p:nvSpPr>
+          <p:cNvPr id="35" name="TextBox 34"/>
+          <p:cNvSpPr txBox="1"/>
+          <p:nvPr/>
+        </p:nvSpPr>
+        <p:spPr>
+          <a:xfrm>
+            <a:off x="640080" y="5349240"/>
+            <a:ext cx="10881360" cy="640080"/>
+          </a:xfrm>
+          <a:prstGeom prst="rect">
+            <a:avLst/>
+          </a:prstGeom>
+          <a:noFill/>
+        </p:spPr>
+        <p:txBody>
+          <a:bodyPr wrap="square" anchor="ctr" lIns="0" rIns="0" tIns="0" bIns="0">
+            <a:spAutoFit/>
+          </a:bodyPr>
+          <a:lstStyle/>
+          <a:p>
+            <a:pPr algn="ctr">
+              <a:spcBef>
+                <a:spcPts val="0"/>
+              </a:spcBef>
+              <a:spcAft>
+                <a:spcPts val="0"/>
+              </a:spcAft>
+            </a:pPr>
+            <a:r>
+              <a:rPr sz="1300" b="1" i="0">
+                <a:solidFill>
+                  <a:srgbClr val="9AA7BD"/>
+                </a:solidFill>
+                <a:latin typeface="Arial"/>
+              </a:rPr>
+              <a:t>Stack:  </a:t>
+            </a:r>
+            <a:r>
+              <a:rPr sz="1300" b="0" i="0">
+                <a:solidFill>
+                  <a:srgbClr val="F4F7FC"/>
+                </a:solidFill>
+                <a:latin typeface="Arial"/>
+              </a:rPr>
+              <a:t>FastAPI  ·  in-process event bus  ·  SQLite  ·  React  ·  Hive agents</a:t>
+            </a:r>
+          </a:p>
+        </p:txBody>
+      </p:sp>
+      <p:sp>
+        <p:nvSpPr>
+          <p:cNvPr id="36" name="TextBox 35"/>
+          <p:cNvSpPr txBox="1"/>
+          <p:nvPr/>
+        </p:nvSpPr>
+        <p:spPr>
+          <a:xfrm>
+            <a:off x="10332720" y="6400800"/>
+            <a:ext cx="731520" cy="274320"/>
           </a:xfrm>
           <a:prstGeom prst="rect">
             <a:avLst/>
@@ -10280,36 +9258,36 @@
           </a:bodyPr>
           <a:lstStyle/>
           <a:p>
-            <a:pPr algn="ctr">
-              <a:spcBef>
-                <a:spcPts val="0"/>
-              </a:spcBef>
-              <a:spcAft>
-                <a:spcPts val="0"/>
-              </a:spcAft>
-            </a:pPr>
-            <a:r>
-              <a:rPr sz="4000" b="1" i="0">
-                <a:solidFill>
-                  <a:srgbClr val="4A9EFF"/>
-                </a:solidFill>
-                <a:latin typeface="Calibri"/>
-              </a:rPr>
-              <a:t>20%+</a:t>
-            </a:r>
-          </a:p>
-        </p:txBody>
-      </p:sp>
-      <p:sp>
-        <p:nvSpPr>
-          <p:cNvPr id="24" name="TextBox 23"/>
+            <a:pPr algn="l">
+              <a:spcBef>
+                <a:spcPts val="0"/>
+              </a:spcBef>
+              <a:spcAft>
+                <a:spcPts val="0"/>
+              </a:spcAft>
+            </a:pPr>
+            <a:r>
+              <a:rPr sz="1000" b="1" i="0" spc="100">
+                <a:solidFill>
+                  <a:srgbClr val="9AA7BD"/>
+                </a:solidFill>
+                <a:latin typeface="Arial"/>
+              </a:rPr>
+              <a:t>06</a:t>
+            </a:r>
+          </a:p>
+        </p:txBody>
+      </p:sp>
+      <p:sp>
+        <p:nvSpPr>
+          <p:cNvPr id="37" name="TextBox 36"/>
           <p:cNvSpPr txBox="1"/>
           <p:nvPr/>
         </p:nvSpPr>
         <p:spPr>
           <a:xfrm>
-            <a:off x="9326880" y="3474720"/>
-            <a:ext cx="2304288" cy="457200"/>
+            <a:off x="548640" y="6400800"/>
+            <a:ext cx="3657600" cy="274320"/>
           </a:xfrm>
           <a:prstGeom prst="rect">
             <a:avLst/>
@@ -10322,191 +9300,20 @@
           </a:bodyPr>
           <a:lstStyle/>
           <a:p>
-            <a:pPr algn="ctr">
-              <a:spcBef>
-                <a:spcPts val="0"/>
-              </a:spcBef>
-              <a:spcAft>
-                <a:spcPts val="0"/>
-              </a:spcAft>
-            </a:pPr>
-            <a:r>
-              <a:rPr sz="1500" b="1" i="0">
-                <a:solidFill>
-                  <a:srgbClr val="F4F7FC"/>
-                </a:solidFill>
-                <a:latin typeface="Calibri"/>
-              </a:rPr>
-              <a:t>fewer knock-on delays</a:t>
-            </a:r>
-          </a:p>
-        </p:txBody>
-      </p:sp>
-      <p:sp>
-        <p:nvSpPr>
-          <p:cNvPr id="25" name="TextBox 24"/>
-          <p:cNvSpPr txBox="1"/>
-          <p:nvPr/>
-        </p:nvSpPr>
-        <p:spPr>
-          <a:xfrm>
-            <a:off x="9326880" y="3931920"/>
-            <a:ext cx="2304288" cy="640080"/>
-          </a:xfrm>
-          <a:prstGeom prst="rect">
-            <a:avLst/>
-          </a:prstGeom>
-          <a:noFill/>
-        </p:spPr>
-        <p:txBody>
-          <a:bodyPr wrap="square" anchor="t" lIns="0" rIns="0" tIns="0" bIns="0">
-            <a:spAutoFit/>
-          </a:bodyPr>
-          <a:lstStyle/>
-          <a:p>
-            <a:pPr algn="ctr">
-              <a:lnSpc>
-                <a:spcPct val="100000"/>
-              </a:lnSpc>
-              <a:spcBef>
-                <a:spcPts val="0"/>
-              </a:spcBef>
-              <a:spcAft>
-                <a:spcPts val="0"/>
-              </a:spcAft>
-            </a:pPr>
-            <a:r>
-              <a:rPr sz="1150" b="0" i="0">
+            <a:pPr algn="l">
+              <a:spcBef>
+                <a:spcPts val="0"/>
+              </a:spcBef>
+              <a:spcAft>
+                <a:spcPts val="0"/>
+              </a:spcAft>
+            </a:pPr>
+            <a:r>
+              <a:rPr sz="1000" b="1" i="0" spc="100">
                 <a:solidFill>
                   <a:srgbClr val="9AA7BD"/>
                 </a:solidFill>
-                <a:latin typeface="Calibri"/>
-              </a:rPr>
-              <a:t>cascade reduction across the corridor</a:t>
-            </a:r>
-          </a:p>
-        </p:txBody>
-      </p:sp>
-      <p:sp>
-        <p:nvSpPr>
-          <p:cNvPr id="26" name="TextBox 25"/>
-          <p:cNvSpPr txBox="1"/>
-          <p:nvPr/>
-        </p:nvSpPr>
-        <p:spPr>
-          <a:xfrm>
-            <a:off x="640080" y="5212080"/>
-            <a:ext cx="10881360" cy="457200"/>
-          </a:xfrm>
-          <a:prstGeom prst="rect">
-            <a:avLst/>
-          </a:prstGeom>
-          <a:noFill/>
-        </p:spPr>
-        <p:txBody>
-          <a:bodyPr wrap="square" anchor="t" lIns="0" rIns="0" tIns="0" bIns="0">
-            <a:spAutoFit/>
-          </a:bodyPr>
-          <a:lstStyle/>
-          <a:p>
-            <a:pPr algn="ctr">
-              <a:spcBef>
-                <a:spcPts val="0"/>
-              </a:spcBef>
-              <a:spcAft>
-                <a:spcPts val="0"/>
-              </a:spcAft>
-            </a:pPr>
-            <a:r>
-              <a:rPr sz="1300" b="0" i="1">
-                <a:solidFill>
-                  <a:srgbClr val="9AA7BD"/>
-                </a:solidFill>
-                <a:latin typeface="Calibri"/>
-              </a:rPr>
-              <a:t>Simulated results. Pilot validation planned.</a:t>
-            </a:r>
-          </a:p>
-        </p:txBody>
-      </p:sp>
-      <p:sp>
-        <p:nvSpPr>
-          <p:cNvPr id="27" name="TextBox 26"/>
-          <p:cNvSpPr txBox="1"/>
-          <p:nvPr/>
-        </p:nvSpPr>
-        <p:spPr>
-          <a:xfrm>
-            <a:off x="10332720" y="6400800"/>
-            <a:ext cx="731520" cy="274320"/>
-          </a:xfrm>
-          <a:prstGeom prst="rect">
-            <a:avLst/>
-          </a:prstGeom>
-          <a:noFill/>
-        </p:spPr>
-        <p:txBody>
-          <a:bodyPr wrap="square" anchor="t" lIns="0" rIns="0" tIns="0" bIns="0">
-            <a:spAutoFit/>
-          </a:bodyPr>
-          <a:lstStyle/>
-          <a:p>
-            <a:pPr algn="l">
-              <a:spcBef>
-                <a:spcPts val="0"/>
-              </a:spcBef>
-              <a:spcAft>
-                <a:spcPts val="0"/>
-              </a:spcAft>
-            </a:pPr>
-            <a:r>
-              <a:rPr sz="1000" b="1" i="0" spc="100">
-                <a:solidFill>
-                  <a:srgbClr val="9AA7BD"/>
-                </a:solidFill>
-                <a:latin typeface="Calibri"/>
-              </a:rPr>
-              <a:t>06</a:t>
-            </a:r>
-          </a:p>
-        </p:txBody>
-      </p:sp>
-      <p:sp>
-        <p:nvSpPr>
-          <p:cNvPr id="28" name="TextBox 27"/>
-          <p:cNvSpPr txBox="1"/>
-          <p:nvPr/>
-        </p:nvSpPr>
-        <p:spPr>
-          <a:xfrm>
-            <a:off x="548640" y="6400800"/>
-            <a:ext cx="3657600" cy="274320"/>
-          </a:xfrm>
-          <a:prstGeom prst="rect">
-            <a:avLst/>
-          </a:prstGeom>
-          <a:noFill/>
-        </p:spPr>
-        <p:txBody>
-          <a:bodyPr wrap="square" anchor="t" lIns="0" rIns="0" tIns="0" bIns="0">
-            <a:spAutoFit/>
-          </a:bodyPr>
-          <a:lstStyle/>
-          <a:p>
-            <a:pPr algn="l">
-              <a:spcBef>
-                <a:spcPts val="0"/>
-              </a:spcBef>
-              <a:spcAft>
-                <a:spcPts val="0"/>
-              </a:spcAft>
-            </a:pPr>
-            <a:r>
-              <a:rPr sz="1000" b="1" i="0" spc="100">
-                <a:solidFill>
-                  <a:srgbClr val="9AA7BD"/>
-                </a:solidFill>
-                <a:latin typeface="Calibri"/>
+                <a:latin typeface="Arial"/>
               </a:rPr>
               <a:t>Rail Saarthi</a:t>
             </a:r>
@@ -10553,20 +9360,6 @@
           </a:ln>
           <a:effectLst/>
         </p:spPr>
-        <p:style>
-          <a:lnRef idx="1">
-            <a:schemeClr val="accent1"/>
-          </a:lnRef>
-          <a:fillRef idx="3">
-            <a:schemeClr val="accent1"/>
-          </a:fillRef>
-          <a:effectRef idx="2">
-            <a:schemeClr val="accent1"/>
-          </a:effectRef>
-          <a:fontRef idx="minor">
-            <a:schemeClr val="lt1"/>
-          </a:fontRef>
-        </p:style>
         <p:txBody>
           <a:bodyPr rtlCol="0" anchor="ctr"/>
           <a:lstStyle/>
@@ -10597,20 +9390,6 @@
           </a:ln>
           <a:effectLst/>
         </p:spPr>
-        <p:style>
-          <a:lnRef idx="1">
-            <a:schemeClr val="accent1"/>
-          </a:lnRef>
-          <a:fillRef idx="3">
-            <a:schemeClr val="accent1"/>
-          </a:fillRef>
-          <a:effectRef idx="2">
-            <a:schemeClr val="accent1"/>
-          </a:effectRef>
-          <a:fontRef idx="minor">
-            <a:schemeClr val="lt1"/>
-          </a:fontRef>
-        </p:style>
         <p:txBody>
           <a:bodyPr rtlCol="0" anchor="ctr"/>
           <a:lstStyle/>
@@ -10654,9 +9433,9 @@
                 <a:solidFill>
                   <a:srgbClr val="4A9EFF"/>
                 </a:solidFill>
-                <a:latin typeface="Calibri"/>
-              </a:rPr>
-              <a:t>ROADMAP</a:t>
+                <a:latin typeface="Arial"/>
+              </a:rPr>
+              <a:t>IMPACT &amp; METRICS</a:t>
             </a:r>
           </a:p>
         </p:txBody>
@@ -10696,111 +9475,23 @@
                 <a:solidFill>
                   <a:srgbClr val="F4F7FC"/>
                 </a:solidFill>
-                <a:latin typeface="Calibri"/>
-              </a:rPr>
-              <a:t>One corridor today, the network tomorrow</a:t>
-            </a:r>
-          </a:p>
-        </p:txBody>
-      </p:sp>
-      <p:sp>
-        <p:nvSpPr>
-          <p:cNvPr id="6" name="Rectangle 5"/>
+                <a:latin typeface="Arial"/>
+              </a:rPr>
+              <a:t>What the agents actually move</a:t>
+            </a:r>
+          </a:p>
+        </p:txBody>
+      </p:sp>
+      <p:sp>
+        <p:nvSpPr>
+          <p:cNvPr id="6" name="Rounded Rectangle 5"/>
           <p:cNvSpPr/>
           <p:nvPr/>
         </p:nvSpPr>
         <p:spPr>
           <a:xfrm>
-            <a:off x="822959" y="2029967"/>
-            <a:ext cx="10515600" cy="36576"/>
-          </a:xfrm>
-          <a:prstGeom prst="rect">
-            <a:avLst/>
-          </a:prstGeom>
-          <a:solidFill>
-            <a:srgbClr val="243352"/>
-          </a:solidFill>
-          <a:ln>
-            <a:noFill/>
-          </a:ln>
-          <a:effectLst/>
-        </p:spPr>
-        <p:style>
-          <a:lnRef idx="1">
-            <a:schemeClr val="accent1"/>
-          </a:lnRef>
-          <a:fillRef idx="3">
-            <a:schemeClr val="accent1"/>
-          </a:fillRef>
-          <a:effectRef idx="2">
-            <a:schemeClr val="accent1"/>
-          </a:effectRef>
-          <a:fontRef idx="minor">
-            <a:schemeClr val="lt1"/>
-          </a:fontRef>
-        </p:style>
-        <p:txBody>
-          <a:bodyPr rtlCol="0" anchor="ctr"/>
-          <a:lstStyle/>
-          <a:p>
-            <a:pPr algn="ctr"/>
-          </a:p>
-        </p:txBody>
-      </p:sp>
-      <p:sp>
-        <p:nvSpPr>
-          <p:cNvPr id="7" name="Oval 6"/>
-          <p:cNvSpPr/>
-          <p:nvPr/>
-        </p:nvSpPr>
-        <p:spPr>
-          <a:xfrm>
-            <a:off x="822959" y="1901952"/>
-            <a:ext cx="256032" cy="256032"/>
-          </a:xfrm>
-          <a:prstGeom prst="ellipse">
-            <a:avLst/>
-          </a:prstGeom>
-          <a:solidFill>
-            <a:srgbClr val="4A9EFF"/>
-          </a:solidFill>
-          <a:ln>
-            <a:noFill/>
-          </a:ln>
-          <a:effectLst/>
-        </p:spPr>
-        <p:style>
-          <a:lnRef idx="1">
-            <a:schemeClr val="accent1"/>
-          </a:lnRef>
-          <a:fillRef idx="3">
-            <a:schemeClr val="accent1"/>
-          </a:fillRef>
-          <a:effectRef idx="2">
-            <a:schemeClr val="accent1"/>
-          </a:effectRef>
-          <a:fontRef idx="minor">
-            <a:schemeClr val="lt1"/>
-          </a:fontRef>
-        </p:style>
-        <p:txBody>
-          <a:bodyPr rtlCol="0" anchor="ctr"/>
-          <a:lstStyle/>
-          <a:p>
-            <a:pPr algn="ctr"/>
-          </a:p>
-        </p:txBody>
-      </p:sp>
-      <p:sp>
-        <p:nvSpPr>
-          <p:cNvPr id="8" name="Rounded Rectangle 7"/>
-          <p:cNvSpPr/>
-          <p:nvPr/>
-        </p:nvSpPr>
-        <p:spPr>
-          <a:xfrm>
-            <a:off x="640080" y="2286000"/>
-            <a:ext cx="3502152" cy="3200400"/>
+            <a:off x="640080" y="2057400"/>
+            <a:ext cx="2670048" cy="2651760"/>
           </a:xfrm>
           <a:prstGeom prst="roundRect">
             <a:avLst>
@@ -10817,20 +9508,6 @@
           </a:ln>
           <a:effectLst/>
         </p:spPr>
-        <p:style>
-          <a:lnRef idx="1">
-            <a:schemeClr val="accent1"/>
-          </a:lnRef>
-          <a:fillRef idx="3">
-            <a:schemeClr val="accent1"/>
-          </a:fillRef>
-          <a:effectRef idx="2">
-            <a:schemeClr val="accent1"/>
-          </a:effectRef>
-          <a:fontRef idx="minor">
-            <a:schemeClr val="lt1"/>
-          </a:fontRef>
-        </p:style>
         <p:txBody>
           <a:bodyPr rtlCol="0" anchor="ctr"/>
           <a:lstStyle/>
@@ -10841,14 +9518,14 @@
       </p:sp>
       <p:sp>
         <p:nvSpPr>
-          <p:cNvPr id="9" name="Rectangle 8"/>
+          <p:cNvPr id="7" name="Rectangle 6"/>
           <p:cNvSpPr/>
           <p:nvPr/>
         </p:nvSpPr>
         <p:spPr>
           <a:xfrm>
-            <a:off x="640080" y="2286000"/>
-            <a:ext cx="3502152" cy="82296"/>
+            <a:off x="640080" y="2057400"/>
+            <a:ext cx="2670048" cy="82296"/>
           </a:xfrm>
           <a:prstGeom prst="rect">
             <a:avLst/>
@@ -10861,20 +9538,6 @@
           </a:ln>
           <a:effectLst/>
         </p:spPr>
-        <p:style>
-          <a:lnRef idx="1">
-            <a:schemeClr val="accent1"/>
-          </a:lnRef>
-          <a:fillRef idx="3">
-            <a:schemeClr val="accent1"/>
-          </a:fillRef>
-          <a:effectRef idx="2">
-            <a:schemeClr val="accent1"/>
-          </a:effectRef>
-          <a:fontRef idx="minor">
-            <a:schemeClr val="lt1"/>
-          </a:fontRef>
-        </p:style>
         <p:txBody>
           <a:bodyPr rtlCol="0" anchor="ctr"/>
           <a:lstStyle/>
@@ -10885,14 +9548,14 @@
       </p:sp>
       <p:sp>
         <p:nvSpPr>
-          <p:cNvPr id="10" name="TextBox 9"/>
+          <p:cNvPr id="8" name="TextBox 7"/>
           <p:cNvSpPr txBox="1"/>
           <p:nvPr/>
         </p:nvSpPr>
         <p:spPr>
           <a:xfrm>
-            <a:off x="932688" y="2560320"/>
-            <a:ext cx="2953512" cy="365760"/>
+            <a:off x="822959" y="2514600"/>
+            <a:ext cx="2304288" cy="914400"/>
           </a:xfrm>
           <a:prstGeom prst="rect">
             <a:avLst/>
@@ -10905,36 +9568,36 @@
           </a:bodyPr>
           <a:lstStyle/>
           <a:p>
-            <a:pPr algn="l">
-              <a:spcBef>
-                <a:spcPts val="0"/>
-              </a:spcBef>
-              <a:spcAft>
-                <a:spcPts val="0"/>
-              </a:spcAft>
-            </a:pPr>
-            <a:r>
-              <a:rPr sz="1200" b="1" i="0" spc="200">
+            <a:pPr algn="ctr">
+              <a:spcBef>
+                <a:spcPts val="0"/>
+              </a:spcBef>
+              <a:spcAft>
+                <a:spcPts val="0"/>
+              </a:spcAft>
+            </a:pPr>
+            <a:r>
+              <a:rPr sz="4000" b="1" i="0">
                 <a:solidFill>
                   <a:srgbClr val="4A9EFF"/>
                 </a:solidFill>
-                <a:latin typeface="Calibri"/>
-              </a:rPr>
-              <a:t>PHASE 1</a:t>
-            </a:r>
-          </a:p>
-        </p:txBody>
-      </p:sp>
-      <p:sp>
-        <p:nvSpPr>
-          <p:cNvPr id="11" name="TextBox 10"/>
+                <a:latin typeface="Arial"/>
+              </a:rPr>
+              <a:t>+34%</a:t>
+            </a:r>
+          </a:p>
+        </p:txBody>
+      </p:sp>
+      <p:sp>
+        <p:nvSpPr>
+          <p:cNvPr id="9" name="TextBox 8"/>
           <p:cNvSpPr txBox="1"/>
           <p:nvPr/>
         </p:nvSpPr>
         <p:spPr>
           <a:xfrm>
-            <a:off x="932688" y="2907791"/>
-            <a:ext cx="2953512" cy="457200"/>
+            <a:off x="822959" y="3474720"/>
+            <a:ext cx="2304288" cy="457200"/>
           </a:xfrm>
           <a:prstGeom prst="rect">
             <a:avLst/>
@@ -10947,36 +9610,36 @@
           </a:bodyPr>
           <a:lstStyle/>
           <a:p>
-            <a:pPr algn="l">
-              <a:spcBef>
-                <a:spcPts val="0"/>
-              </a:spcBef>
-              <a:spcAft>
-                <a:spcPts val="0"/>
-              </a:spcAft>
-            </a:pPr>
-            <a:r>
-              <a:rPr sz="2000" b="1" i="0">
+            <a:pPr algn="ctr">
+              <a:spcBef>
+                <a:spcPts val="0"/>
+              </a:spcBef>
+              <a:spcAft>
+                <a:spcPts val="0"/>
+              </a:spcAft>
+            </a:pPr>
+            <a:r>
+              <a:rPr sz="1500" b="1" i="0">
                 <a:solidFill>
                   <a:srgbClr val="F4F7FC"/>
                 </a:solidFill>
-                <a:latin typeface="Calibri"/>
-              </a:rPr>
-              <a:t>Hackathon MVP</a:t>
-            </a:r>
-          </a:p>
-        </p:txBody>
-      </p:sp>
-      <p:sp>
-        <p:nvSpPr>
-          <p:cNvPr id="12" name="TextBox 11"/>
+                <a:latin typeface="Arial"/>
+              </a:rPr>
+              <a:t>network throughput</a:t>
+            </a:r>
+          </a:p>
+        </p:txBody>
+      </p:sp>
+      <p:sp>
+        <p:nvSpPr>
+          <p:cNvPr id="10" name="TextBox 9"/>
           <p:cNvSpPr txBox="1"/>
           <p:nvPr/>
         </p:nvSpPr>
         <p:spPr>
           <a:xfrm>
-            <a:off x="932688" y="3566160"/>
-            <a:ext cx="2953512" cy="1828800"/>
+            <a:off x="822959" y="3931920"/>
+            <a:ext cx="2304288" cy="640080"/>
           </a:xfrm>
           <a:prstGeom prst="rect">
             <a:avLst/>
@@ -10989,173 +9652,39 @@
           </a:bodyPr>
           <a:lstStyle/>
           <a:p>
-            <a:pPr algn="l">
-              <a:spcBef>
-                <a:spcPts val="0"/>
-              </a:spcBef>
-              <a:spcAft>
-                <a:spcPts val="700"/>
-              </a:spcAft>
-            </a:pPr>
-            <a:r>
-              <a:rPr sz="1300" b="1" i="0">
-                <a:solidFill>
-                  <a:srgbClr val="4A9EFF"/>
-                </a:solidFill>
-                <a:latin typeface="Calibri"/>
-              </a:rPr>
-              <a:t>•  </a:t>
-            </a:r>
-            <a:r>
-              <a:rPr sz="1350" b="0" i="0">
-                <a:solidFill>
-                  <a:srgbClr val="F4F7FC"/>
-                </a:solidFill>
-                <a:latin typeface="Calibri"/>
-              </a:rPr>
-              <a:t>Corridor simulation</a:t>
-            </a:r>
-          </a:p>
-          <a:p>
-            <a:pPr algn="l">
-              <a:spcBef>
-                <a:spcPts val="0"/>
-              </a:spcBef>
-              <a:spcAft>
-                <a:spcPts val="700"/>
-              </a:spcAft>
-            </a:pPr>
-            <a:r>
-              <a:rPr sz="1300" b="1" i="0">
-                <a:solidFill>
-                  <a:srgbClr val="4A9EFF"/>
-                </a:solidFill>
-                <a:latin typeface="Calibri"/>
-              </a:rPr>
-              <a:t>•  </a:t>
-            </a:r>
-            <a:r>
-              <a:rPr sz="1350" b="0" i="0">
-                <a:solidFill>
-                  <a:srgbClr val="F4F7FC"/>
-                </a:solidFill>
-                <a:latin typeface="Calibri"/>
-              </a:rPr>
-              <a:t>Delay injection</a:t>
-            </a:r>
-          </a:p>
-          <a:p>
-            <a:pPr algn="l">
-              <a:spcBef>
-                <a:spcPts val="0"/>
-              </a:spcBef>
-              <a:spcAft>
-                <a:spcPts val="700"/>
-              </a:spcAft>
-            </a:pPr>
-            <a:r>
-              <a:rPr sz="1300" b="1" i="0">
-                <a:solidFill>
-                  <a:srgbClr val="4A9EFF"/>
-                </a:solidFill>
-                <a:latin typeface="Calibri"/>
-              </a:rPr>
-              <a:t>•  </a:t>
-            </a:r>
-            <a:r>
-              <a:rPr sz="1350" b="0" i="0">
-                <a:solidFill>
-                  <a:srgbClr val="F4F7FC"/>
-                </a:solidFill>
-                <a:latin typeface="Calibri"/>
-              </a:rPr>
-              <a:t>Platform reassignment</a:t>
-            </a:r>
-          </a:p>
-          <a:p>
-            <a:pPr algn="l">
-              <a:spcBef>
-                <a:spcPts val="0"/>
-              </a:spcBef>
-              <a:spcAft>
-                <a:spcPts val="700"/>
-              </a:spcAft>
-            </a:pPr>
-            <a:r>
-              <a:rPr sz="1300" b="1" i="0">
-                <a:solidFill>
-                  <a:srgbClr val="4A9EFF"/>
-                </a:solidFill>
-                <a:latin typeface="Calibri"/>
-              </a:rPr>
-              <a:t>•  </a:t>
-            </a:r>
-            <a:r>
-              <a:rPr sz="1350" b="0" i="0">
-                <a:solidFill>
-                  <a:srgbClr val="F4F7FC"/>
-                </a:solidFill>
-                <a:latin typeface="Calibri"/>
-              </a:rPr>
-              <a:t>Live agent control room</a:t>
-            </a:r>
-          </a:p>
-        </p:txBody>
-      </p:sp>
-      <p:sp>
-        <p:nvSpPr>
-          <p:cNvPr id="13" name="Oval 12"/>
+            <a:pPr algn="ctr">
+              <a:lnSpc>
+                <a:spcPct val="100000"/>
+              </a:lnSpc>
+              <a:spcBef>
+                <a:spcPts val="0"/>
+              </a:spcBef>
+              <a:spcAft>
+                <a:spcPts val="0"/>
+              </a:spcAft>
+            </a:pPr>
+            <a:r>
+              <a:rPr sz="1150" b="0" i="0">
+                <a:solidFill>
+                  <a:srgbClr val="9AA7BD"/>
+                </a:solidFill>
+                <a:latin typeface="Arial"/>
+              </a:rPr>
+              <a:t>vs naive dispatch (MDPI multi-agent study)</a:t>
+            </a:r>
+          </a:p>
+        </p:txBody>
+      </p:sp>
+      <p:sp>
+        <p:nvSpPr>
+          <p:cNvPr id="11" name="Rounded Rectangle 10"/>
           <p:cNvSpPr/>
           <p:nvPr/>
         </p:nvSpPr>
         <p:spPr>
           <a:xfrm>
-            <a:off x="4507992" y="1901952"/>
-            <a:ext cx="256032" cy="256032"/>
-          </a:xfrm>
-          <a:prstGeom prst="ellipse">
-            <a:avLst/>
-          </a:prstGeom>
-          <a:solidFill>
-            <a:srgbClr val="FF9E1B"/>
-          </a:solidFill>
-          <a:ln>
-            <a:noFill/>
-          </a:ln>
-          <a:effectLst/>
-        </p:spPr>
-        <p:style>
-          <a:lnRef idx="1">
-            <a:schemeClr val="accent1"/>
-          </a:lnRef>
-          <a:fillRef idx="3">
-            <a:schemeClr val="accent1"/>
-          </a:fillRef>
-          <a:effectRef idx="2">
-            <a:schemeClr val="accent1"/>
-          </a:effectRef>
-          <a:fontRef idx="minor">
-            <a:schemeClr val="lt1"/>
-          </a:fontRef>
-        </p:style>
-        <p:txBody>
-          <a:bodyPr rtlCol="0" anchor="ctr"/>
-          <a:lstStyle/>
-          <a:p>
-            <a:pPr algn="ctr"/>
-          </a:p>
-        </p:txBody>
-      </p:sp>
-      <p:sp>
-        <p:nvSpPr>
-          <p:cNvPr id="14" name="Rounded Rectangle 13"/>
-          <p:cNvSpPr/>
-          <p:nvPr/>
-        </p:nvSpPr>
-        <p:spPr>
-          <a:xfrm>
-            <a:off x="4325112" y="2286000"/>
-            <a:ext cx="3502152" cy="3200400"/>
+            <a:off x="3474720" y="2057400"/>
+            <a:ext cx="2670048" cy="2651760"/>
           </a:xfrm>
           <a:prstGeom prst="roundRect">
             <a:avLst>
@@ -11172,20 +9701,6 @@
           </a:ln>
           <a:effectLst/>
         </p:spPr>
-        <p:style>
-          <a:lnRef idx="1">
-            <a:schemeClr val="accent1"/>
-          </a:lnRef>
-          <a:fillRef idx="3">
-            <a:schemeClr val="accent1"/>
-          </a:fillRef>
-          <a:effectRef idx="2">
-            <a:schemeClr val="accent1"/>
-          </a:effectRef>
-          <a:fontRef idx="minor">
-            <a:schemeClr val="lt1"/>
-          </a:fontRef>
-        </p:style>
         <p:txBody>
           <a:bodyPr rtlCol="0" anchor="ctr"/>
           <a:lstStyle/>
@@ -11196,14 +9711,14 @@
       </p:sp>
       <p:sp>
         <p:nvSpPr>
-          <p:cNvPr id="15" name="Rectangle 14"/>
+          <p:cNvPr id="12" name="Rectangle 11"/>
           <p:cNvSpPr/>
           <p:nvPr/>
         </p:nvSpPr>
         <p:spPr>
           <a:xfrm>
-            <a:off x="4325112" y="2286000"/>
-            <a:ext cx="3502152" cy="82296"/>
+            <a:off x="3474720" y="2057400"/>
+            <a:ext cx="2670048" cy="82296"/>
           </a:xfrm>
           <a:prstGeom prst="rect">
             <a:avLst/>
@@ -11216,20 +9731,6 @@
           </a:ln>
           <a:effectLst/>
         </p:spPr>
-        <p:style>
-          <a:lnRef idx="1">
-            <a:schemeClr val="accent1"/>
-          </a:lnRef>
-          <a:fillRef idx="3">
-            <a:schemeClr val="accent1"/>
-          </a:fillRef>
-          <a:effectRef idx="2">
-            <a:schemeClr val="accent1"/>
-          </a:effectRef>
-          <a:fontRef idx="minor">
-            <a:schemeClr val="lt1"/>
-          </a:fontRef>
-        </p:style>
         <p:txBody>
           <a:bodyPr rtlCol="0" anchor="ctr"/>
           <a:lstStyle/>
@@ -11240,14 +9741,14 @@
       </p:sp>
       <p:sp>
         <p:nvSpPr>
-          <p:cNvPr id="16" name="TextBox 15"/>
+          <p:cNvPr id="13" name="TextBox 12"/>
           <p:cNvSpPr txBox="1"/>
           <p:nvPr/>
         </p:nvSpPr>
         <p:spPr>
           <a:xfrm>
-            <a:off x="4617720" y="2560320"/>
-            <a:ext cx="2953512" cy="365760"/>
+            <a:off x="3657600" y="2514600"/>
+            <a:ext cx="2304288" cy="914400"/>
           </a:xfrm>
           <a:prstGeom prst="rect">
             <a:avLst/>
@@ -11260,36 +9761,36 @@
           </a:bodyPr>
           <a:lstStyle/>
           <a:p>
-            <a:pPr algn="l">
-              <a:spcBef>
-                <a:spcPts val="0"/>
-              </a:spcBef>
-              <a:spcAft>
-                <a:spcPts val="0"/>
-              </a:spcAft>
-            </a:pPr>
-            <a:r>
-              <a:rPr sz="1200" b="1" i="0" spc="200">
+            <a:pPr algn="ctr">
+              <a:spcBef>
+                <a:spcPts val="0"/>
+              </a:spcBef>
+              <a:spcAft>
+                <a:spcPts val="0"/>
+              </a:spcAft>
+            </a:pPr>
+            <a:r>
+              <a:rPr sz="4000" b="1" i="0">
                 <a:solidFill>
                   <a:srgbClr val="FF9E1B"/>
                 </a:solidFill>
-                <a:latin typeface="Calibri"/>
-              </a:rPr>
-              <a:t>PHASE 2</a:t>
-            </a:r>
-          </a:p>
-        </p:txBody>
-      </p:sp>
-      <p:sp>
-        <p:nvSpPr>
-          <p:cNvPr id="17" name="TextBox 16"/>
+                <a:latin typeface="Arial"/>
+              </a:rPr>
+              <a:t>90%</a:t>
+            </a:r>
+          </a:p>
+        </p:txBody>
+      </p:sp>
+      <p:sp>
+        <p:nvSpPr>
+          <p:cNvPr id="14" name="TextBox 13"/>
           <p:cNvSpPr txBox="1"/>
           <p:nvPr/>
         </p:nvSpPr>
         <p:spPr>
           <a:xfrm>
-            <a:off x="4617720" y="2907791"/>
-            <a:ext cx="2953512" cy="457200"/>
+            <a:off x="3657600" y="3474720"/>
+            <a:ext cx="2304288" cy="457200"/>
           </a:xfrm>
           <a:prstGeom prst="rect">
             <a:avLst/>
@@ -11302,36 +9803,36 @@
           </a:bodyPr>
           <a:lstStyle/>
           <a:p>
-            <a:pPr algn="l">
-              <a:spcBef>
-                <a:spcPts val="0"/>
-              </a:spcBef>
-              <a:spcAft>
-                <a:spcPts val="0"/>
-              </a:spcAft>
-            </a:pPr>
-            <a:r>
-              <a:rPr sz="2000" b="1" i="0">
+            <a:pPr algn="ctr">
+              <a:spcBef>
+                <a:spcPts val="0"/>
+              </a:spcBef>
+              <a:spcAft>
+                <a:spcPts val="0"/>
+              </a:spcAft>
+            </a:pPr>
+            <a:r>
+              <a:rPr sz="1500" b="1" i="0">
                 <a:solidFill>
                   <a:srgbClr val="F4F7FC"/>
                 </a:solidFill>
-                <a:latin typeface="Calibri"/>
-              </a:rPr>
-              <a:t>Pilot</a:t>
-            </a:r>
-          </a:p>
-        </p:txBody>
-      </p:sp>
-      <p:sp>
-        <p:nvSpPr>
-          <p:cNvPr id="18" name="TextBox 17"/>
+                <a:latin typeface="Arial"/>
+              </a:rPr>
+              <a:t>instant platforming</a:t>
+            </a:r>
+          </a:p>
+        </p:txBody>
+      </p:sp>
+      <p:sp>
+        <p:nvSpPr>
+          <p:cNvPr id="15" name="TextBox 14"/>
           <p:cNvSpPr txBox="1"/>
           <p:nvPr/>
         </p:nvSpPr>
         <p:spPr>
           <a:xfrm>
-            <a:off x="4617720" y="3566160"/>
-            <a:ext cx="2953512" cy="1828800"/>
+            <a:off x="3657600" y="3931920"/>
+            <a:ext cx="2304288" cy="640080"/>
           </a:xfrm>
           <a:prstGeom prst="rect">
             <a:avLst/>
@@ -11344,173 +9845,39 @@
           </a:bodyPr>
           <a:lstStyle/>
           <a:p>
-            <a:pPr algn="l">
-              <a:spcBef>
-                <a:spcPts val="0"/>
-              </a:spcBef>
-              <a:spcAft>
-                <a:spcPts val="700"/>
-              </a:spcAft>
-            </a:pPr>
-            <a:r>
-              <a:rPr sz="1300" b="1" i="0">
-                <a:solidFill>
-                  <a:srgbClr val="FF9E1B"/>
-                </a:solidFill>
-                <a:latin typeface="Calibri"/>
-              </a:rPr>
-              <a:t>•  </a:t>
-            </a:r>
-            <a:r>
-              <a:rPr sz="1350" b="0" i="0">
-                <a:solidFill>
-                  <a:srgbClr val="F4F7FC"/>
-                </a:solidFill>
-                <a:latin typeface="Calibri"/>
-              </a:rPr>
-              <a:t>5-station live corridor</a:t>
-            </a:r>
-          </a:p>
-          <a:p>
-            <a:pPr algn="l">
-              <a:spcBef>
-                <a:spcPts val="0"/>
-              </a:spcBef>
-              <a:spcAft>
-                <a:spcPts val="700"/>
-              </a:spcAft>
-            </a:pPr>
-            <a:r>
-              <a:rPr sz="1300" b="1" i="0">
-                <a:solidFill>
-                  <a:srgbClr val="FF9E1B"/>
-                </a:solidFill>
-                <a:latin typeface="Calibri"/>
-              </a:rPr>
-              <a:t>•  </a:t>
-            </a:r>
-            <a:r>
-              <a:rPr sz="1350" b="0" i="0">
-                <a:solidFill>
-                  <a:srgbClr val="F4F7FC"/>
-                </a:solidFill>
-                <a:latin typeface="Calibri"/>
-              </a:rPr>
-              <a:t>NTES integration</a:t>
-            </a:r>
-          </a:p>
-          <a:p>
-            <a:pPr algn="l">
-              <a:spcBef>
-                <a:spcPts val="0"/>
-              </a:spcBef>
-              <a:spcAft>
-                <a:spcPts val="700"/>
-              </a:spcAft>
-            </a:pPr>
-            <a:r>
-              <a:rPr sz="1300" b="1" i="0">
-                <a:solidFill>
-                  <a:srgbClr val="FF9E1B"/>
-                </a:solidFill>
-                <a:latin typeface="Calibri"/>
-              </a:rPr>
-              <a:t>•  </a:t>
-            </a:r>
-            <a:r>
-              <a:rPr sz="1350" b="0" i="0">
-                <a:solidFill>
-                  <a:srgbClr val="F4F7FC"/>
-                </a:solidFill>
-                <a:latin typeface="Calibri"/>
-              </a:rPr>
-              <a:t>Real crew &amp; duty data</a:t>
-            </a:r>
-          </a:p>
-          <a:p>
-            <a:pPr algn="l">
-              <a:spcBef>
-                <a:spcPts val="0"/>
-              </a:spcBef>
-              <a:spcAft>
-                <a:spcPts val="700"/>
-              </a:spcAft>
-            </a:pPr>
-            <a:r>
-              <a:rPr sz="1300" b="1" i="0">
-                <a:solidFill>
-                  <a:srgbClr val="FF9E1B"/>
-                </a:solidFill>
-                <a:latin typeface="Calibri"/>
-              </a:rPr>
-              <a:t>•  </a:t>
-            </a:r>
-            <a:r>
-              <a:rPr sz="1350" b="0" i="0">
-                <a:solidFill>
-                  <a:srgbClr val="F4F7FC"/>
-                </a:solidFill>
-                <a:latin typeface="Calibri"/>
-              </a:rPr>
-              <a:t>Operator-in-the-loop</a:t>
-            </a:r>
-          </a:p>
-        </p:txBody>
-      </p:sp>
-      <p:sp>
-        <p:nvSpPr>
-          <p:cNvPr id="19" name="Oval 18"/>
+            <a:pPr algn="ctr">
+              <a:lnSpc>
+                <a:spcPct val="100000"/>
+              </a:lnSpc>
+              <a:spcBef>
+                <a:spcPts val="0"/>
+              </a:spcBef>
+              <a:spcAft>
+                <a:spcPts val="0"/>
+              </a:spcAft>
+            </a:pPr>
+            <a:r>
+              <a:rPr sz="1150" b="0" i="0">
+                <a:solidFill>
+                  <a:srgbClr val="9AA7BD"/>
+                </a:solidFill>
+                <a:latin typeface="Arial"/>
+              </a:rPr>
+              <a:t>trains platformed without waiting, in sim</a:t>
+            </a:r>
+          </a:p>
+        </p:txBody>
+      </p:sp>
+      <p:sp>
+        <p:nvSpPr>
+          <p:cNvPr id="16" name="Rounded Rectangle 15"/>
           <p:cNvSpPr/>
           <p:nvPr/>
         </p:nvSpPr>
         <p:spPr>
           <a:xfrm>
-            <a:off x="8193023" y="1901952"/>
-            <a:ext cx="256032" cy="256032"/>
-          </a:xfrm>
-          <a:prstGeom prst="ellipse">
-            <a:avLst/>
-          </a:prstGeom>
-          <a:solidFill>
-            <a:srgbClr val="35D07F"/>
-          </a:solidFill>
-          <a:ln>
-            <a:noFill/>
-          </a:ln>
-          <a:effectLst/>
-        </p:spPr>
-        <p:style>
-          <a:lnRef idx="1">
-            <a:schemeClr val="accent1"/>
-          </a:lnRef>
-          <a:fillRef idx="3">
-            <a:schemeClr val="accent1"/>
-          </a:fillRef>
-          <a:effectRef idx="2">
-            <a:schemeClr val="accent1"/>
-          </a:effectRef>
-          <a:fontRef idx="minor">
-            <a:schemeClr val="lt1"/>
-          </a:fontRef>
-        </p:style>
-        <p:txBody>
-          <a:bodyPr rtlCol="0" anchor="ctr"/>
-          <a:lstStyle/>
-          <a:p>
-            <a:pPr algn="ctr"/>
-          </a:p>
-        </p:txBody>
-      </p:sp>
-      <p:sp>
-        <p:nvSpPr>
-          <p:cNvPr id="20" name="Rounded Rectangle 19"/>
-          <p:cNvSpPr/>
-          <p:nvPr/>
-        </p:nvSpPr>
-        <p:spPr>
-          <a:xfrm>
-            <a:off x="8010144" y="2286000"/>
-            <a:ext cx="3502152" cy="3200400"/>
+            <a:off x="6309360" y="2057400"/>
+            <a:ext cx="2670048" cy="2651760"/>
           </a:xfrm>
           <a:prstGeom prst="roundRect">
             <a:avLst>
@@ -11527,20 +9894,6 @@
           </a:ln>
           <a:effectLst/>
         </p:spPr>
-        <p:style>
-          <a:lnRef idx="1">
-            <a:schemeClr val="accent1"/>
-          </a:lnRef>
-          <a:fillRef idx="3">
-            <a:schemeClr val="accent1"/>
-          </a:fillRef>
-          <a:effectRef idx="2">
-            <a:schemeClr val="accent1"/>
-          </a:effectRef>
-          <a:fontRef idx="minor">
-            <a:schemeClr val="lt1"/>
-          </a:fontRef>
-        </p:style>
         <p:txBody>
           <a:bodyPr rtlCol="0" anchor="ctr"/>
           <a:lstStyle/>
@@ -11551,14 +9904,14 @@
       </p:sp>
       <p:sp>
         <p:nvSpPr>
-          <p:cNvPr id="21" name="Rectangle 20"/>
+          <p:cNvPr id="17" name="Rectangle 16"/>
           <p:cNvSpPr/>
           <p:nvPr/>
         </p:nvSpPr>
         <p:spPr>
           <a:xfrm>
-            <a:off x="8010144" y="2286000"/>
-            <a:ext cx="3502152" cy="82296"/>
+            <a:off x="6309360" y="2057400"/>
+            <a:ext cx="2670048" cy="82296"/>
           </a:xfrm>
           <a:prstGeom prst="rect">
             <a:avLst/>
@@ -11571,20 +9924,6 @@
           </a:ln>
           <a:effectLst/>
         </p:spPr>
-        <p:style>
-          <a:lnRef idx="1">
-            <a:schemeClr val="accent1"/>
-          </a:lnRef>
-          <a:fillRef idx="3">
-            <a:schemeClr val="accent1"/>
-          </a:fillRef>
-          <a:effectRef idx="2">
-            <a:schemeClr val="accent1"/>
-          </a:effectRef>
-          <a:fontRef idx="minor">
-            <a:schemeClr val="lt1"/>
-          </a:fontRef>
-        </p:style>
         <p:txBody>
           <a:bodyPr rtlCol="0" anchor="ctr"/>
           <a:lstStyle/>
@@ -11595,14 +9934,14 @@
       </p:sp>
       <p:sp>
         <p:nvSpPr>
-          <p:cNvPr id="22" name="TextBox 21"/>
+          <p:cNvPr id="18" name="TextBox 17"/>
           <p:cNvSpPr txBox="1"/>
           <p:nvPr/>
         </p:nvSpPr>
         <p:spPr>
           <a:xfrm>
-            <a:off x="8302752" y="2560320"/>
-            <a:ext cx="2953512" cy="365760"/>
+            <a:off x="6492240" y="2514600"/>
+            <a:ext cx="2304288" cy="914400"/>
           </a:xfrm>
           <a:prstGeom prst="rect">
             <a:avLst/>
@@ -11615,36 +9954,36 @@
           </a:bodyPr>
           <a:lstStyle/>
           <a:p>
-            <a:pPr algn="l">
-              <a:spcBef>
-                <a:spcPts val="0"/>
-              </a:spcBef>
-              <a:spcAft>
-                <a:spcPts val="0"/>
-              </a:spcAft>
-            </a:pPr>
-            <a:r>
-              <a:rPr sz="1200" b="1" i="0" spc="200">
+            <a:pPr algn="ctr">
+              <a:spcBef>
+                <a:spcPts val="0"/>
+              </a:spcBef>
+              <a:spcAft>
+                <a:spcPts val="0"/>
+              </a:spcAft>
+            </a:pPr>
+            <a:r>
+              <a:rPr sz="4000" b="1" i="0">
                 <a:solidFill>
                   <a:srgbClr val="35D07F"/>
                 </a:solidFill>
-                <a:latin typeface="Calibri"/>
-              </a:rPr>
-              <a:t>PHASE 3</a:t>
-            </a:r>
-          </a:p>
-        </p:txBody>
-      </p:sp>
-      <p:sp>
-        <p:nvSpPr>
-          <p:cNvPr id="23" name="TextBox 22"/>
+                <a:latin typeface="Arial"/>
+              </a:rPr>
+              <a:t>&lt;100ms</a:t>
+            </a:r>
+          </a:p>
+        </p:txBody>
+      </p:sp>
+      <p:sp>
+        <p:nvSpPr>
+          <p:cNvPr id="19" name="TextBox 18"/>
           <p:cNvSpPr txBox="1"/>
           <p:nvPr/>
         </p:nvSpPr>
         <p:spPr>
           <a:xfrm>
-            <a:off x="8302752" y="2907791"/>
-            <a:ext cx="2953512" cy="457200"/>
+            <a:off x="6492240" y="3474720"/>
+            <a:ext cx="2304288" cy="457200"/>
           </a:xfrm>
           <a:prstGeom prst="rect">
             <a:avLst/>
@@ -11657,36 +9996,36 @@
           </a:bodyPr>
           <a:lstStyle/>
           <a:p>
-            <a:pPr algn="l">
-              <a:spcBef>
-                <a:spcPts val="0"/>
-              </a:spcBef>
-              <a:spcAft>
-                <a:spcPts val="0"/>
-              </a:spcAft>
-            </a:pPr>
-            <a:r>
-              <a:rPr sz="2000" b="1" i="0">
+            <a:pPr algn="ctr">
+              <a:spcBef>
+                <a:spcPts val="0"/>
+              </a:spcBef>
+              <a:spcAft>
+                <a:spcPts val="0"/>
+              </a:spcAft>
+            </a:pPr>
+            <a:r>
+              <a:rPr sz="1500" b="1" i="0">
                 <a:solidFill>
                   <a:srgbClr val="F4F7FC"/>
                 </a:solidFill>
-                <a:latin typeface="Calibri"/>
-              </a:rPr>
-              <a:t>Scale</a:t>
-            </a:r>
-          </a:p>
-        </p:txBody>
-      </p:sp>
-      <p:sp>
-        <p:nvSpPr>
-          <p:cNvPr id="24" name="TextBox 23"/>
+                <a:latin typeface="Arial"/>
+              </a:rPr>
+              <a:t>agent response</a:t>
+            </a:r>
+          </a:p>
+        </p:txBody>
+      </p:sp>
+      <p:sp>
+        <p:nvSpPr>
+          <p:cNvPr id="20" name="TextBox 19"/>
           <p:cNvSpPr txBox="1"/>
           <p:nvPr/>
         </p:nvSpPr>
         <p:spPr>
           <a:xfrm>
-            <a:off x="8302752" y="3566160"/>
-            <a:ext cx="2953512" cy="1828800"/>
+            <a:off x="6492240" y="3931920"/>
+            <a:ext cx="2304288" cy="640080"/>
           </a:xfrm>
           <a:prstGeom prst="rect">
             <a:avLst/>
@@ -11699,129 +10038,103 @@
           </a:bodyPr>
           <a:lstStyle/>
           <a:p>
-            <a:pPr algn="l">
-              <a:spcBef>
-                <a:spcPts val="0"/>
-              </a:spcBef>
-              <a:spcAft>
-                <a:spcPts val="700"/>
-              </a:spcAft>
-            </a:pPr>
-            <a:r>
-              <a:rPr sz="1300" b="1" i="0">
-                <a:solidFill>
-                  <a:srgbClr val="35D07F"/>
-                </a:solidFill>
-                <a:latin typeface="Calibri"/>
-              </a:rPr>
-              <a:t>•  </a:t>
-            </a:r>
-            <a:r>
-              <a:rPr sz="1350" b="0" i="0">
-                <a:solidFill>
-                  <a:srgbClr val="F4F7FC"/>
-                </a:solidFill>
-                <a:latin typeface="Calibri"/>
-              </a:rPr>
-              <a:t>National rollout</a:t>
-            </a:r>
-          </a:p>
-          <a:p>
-            <a:pPr algn="l">
-              <a:spcBef>
-                <a:spcPts val="0"/>
-              </a:spcBef>
-              <a:spcAft>
-                <a:spcPts val="700"/>
-              </a:spcAft>
-            </a:pPr>
-            <a:r>
-              <a:rPr sz="1300" b="1" i="0">
-                <a:solidFill>
-                  <a:srgbClr val="35D07F"/>
-                </a:solidFill>
-                <a:latin typeface="Calibri"/>
-              </a:rPr>
-              <a:t>•  </a:t>
-            </a:r>
-            <a:r>
-              <a:rPr sz="1350" b="0" i="0">
-                <a:solidFill>
-                  <a:srgbClr val="F4F7FC"/>
-                </a:solidFill>
-                <a:latin typeface="Calibri"/>
-              </a:rPr>
-              <a:t>RL-based dispatch</a:t>
-            </a:r>
-          </a:p>
-          <a:p>
-            <a:pPr algn="l">
-              <a:spcBef>
-                <a:spcPts val="0"/>
-              </a:spcBef>
-              <a:spcAft>
-                <a:spcPts val="700"/>
-              </a:spcAft>
-            </a:pPr>
-            <a:r>
-              <a:rPr sz="1300" b="1" i="0">
-                <a:solidFill>
-                  <a:srgbClr val="35D07F"/>
-                </a:solidFill>
-                <a:latin typeface="Calibri"/>
-              </a:rPr>
-              <a:t>•  </a:t>
-            </a:r>
-            <a:r>
-              <a:rPr sz="1350" b="0" i="0">
-                <a:solidFill>
-                  <a:srgbClr val="F4F7FC"/>
-                </a:solidFill>
-                <a:latin typeface="Calibri"/>
-              </a:rPr>
-              <a:t>Passenger AI chatbot</a:t>
-            </a:r>
-          </a:p>
-          <a:p>
-            <a:pPr algn="l">
-              <a:spcBef>
-                <a:spcPts val="0"/>
-              </a:spcBef>
-              <a:spcAft>
-                <a:spcPts val="700"/>
-              </a:spcAft>
-            </a:pPr>
-            <a:r>
-              <a:rPr sz="1300" b="1" i="0">
-                <a:solidFill>
-                  <a:srgbClr val="35D07F"/>
-                </a:solidFill>
-                <a:latin typeface="Calibri"/>
-              </a:rPr>
-              <a:t>•  </a:t>
-            </a:r>
-            <a:r>
-              <a:rPr sz="1350" b="0" i="0">
-                <a:solidFill>
-                  <a:srgbClr val="F4F7FC"/>
-                </a:solidFill>
-                <a:latin typeface="Calibri"/>
-              </a:rPr>
-              <a:t>Rail Madad integration</a:t>
-            </a:r>
-          </a:p>
-        </p:txBody>
-      </p:sp>
-      <p:sp>
-        <p:nvSpPr>
-          <p:cNvPr id="25" name="TextBox 24"/>
+            <a:pPr algn="ctr">
+              <a:lnSpc>
+                <a:spcPct val="100000"/>
+              </a:lnSpc>
+              <a:spcBef>
+                <a:spcPts val="0"/>
+              </a:spcBef>
+              <a:spcAft>
+                <a:spcPts val="0"/>
+              </a:spcAft>
+            </a:pPr>
+            <a:r>
+              <a:rPr sz="1150" b="0" i="0">
+                <a:solidFill>
+                  <a:srgbClr val="9AA7BD"/>
+                </a:solidFill>
+                <a:latin typeface="Arial"/>
+              </a:rPr>
+              <a:t>from event detected to decision proposed</a:t>
+            </a:r>
+          </a:p>
+        </p:txBody>
+      </p:sp>
+      <p:sp>
+        <p:nvSpPr>
+          <p:cNvPr id="21" name="Rounded Rectangle 20"/>
+          <p:cNvSpPr/>
+          <p:nvPr/>
+        </p:nvSpPr>
+        <p:spPr>
+          <a:xfrm>
+            <a:off x="9144000" y="2057400"/>
+            <a:ext cx="2670048" cy="2651760"/>
+          </a:xfrm>
+          <a:prstGeom prst="roundRect">
+            <a:avLst>
+              <a:gd name="adj" fmla="val 8000"/>
+            </a:avLst>
+          </a:prstGeom>
+          <a:solidFill>
+            <a:srgbClr val="121B30"/>
+          </a:solidFill>
+          <a:ln w="12700">
+            <a:solidFill>
+              <a:srgbClr val="243352"/>
+            </a:solidFill>
+          </a:ln>
+          <a:effectLst/>
+        </p:spPr>
+        <p:txBody>
+          <a:bodyPr rtlCol="0" anchor="ctr"/>
+          <a:lstStyle/>
+          <a:p>
+            <a:pPr algn="ctr"/>
+          </a:p>
+        </p:txBody>
+      </p:sp>
+      <p:sp>
+        <p:nvSpPr>
+          <p:cNvPr id="22" name="Rectangle 21"/>
+          <p:cNvSpPr/>
+          <p:nvPr/>
+        </p:nvSpPr>
+        <p:spPr>
+          <a:xfrm>
+            <a:off x="9144000" y="2057400"/>
+            <a:ext cx="2670048" cy="82296"/>
+          </a:xfrm>
+          <a:prstGeom prst="rect">
+            <a:avLst/>
+          </a:prstGeom>
+          <a:solidFill>
+            <a:srgbClr val="4A9EFF"/>
+          </a:solidFill>
+          <a:ln>
+            <a:noFill/>
+          </a:ln>
+          <a:effectLst/>
+        </p:spPr>
+        <p:txBody>
+          <a:bodyPr rtlCol="0" anchor="ctr"/>
+          <a:lstStyle/>
+          <a:p>
+            <a:pPr algn="ctr"/>
+          </a:p>
+        </p:txBody>
+      </p:sp>
+      <p:sp>
+        <p:nvSpPr>
+          <p:cNvPr id="23" name="TextBox 22"/>
           <p:cNvSpPr txBox="1"/>
           <p:nvPr/>
         </p:nvSpPr>
         <p:spPr>
           <a:xfrm>
-            <a:off x="10332720" y="6400800"/>
-            <a:ext cx="731520" cy="274320"/>
+            <a:off x="9326880" y="2514600"/>
+            <a:ext cx="2304288" cy="914400"/>
           </a:xfrm>
           <a:prstGeom prst="rect">
             <a:avLst/>
@@ -11834,36 +10147,36 @@
           </a:bodyPr>
           <a:lstStyle/>
           <a:p>
-            <a:pPr algn="l">
-              <a:spcBef>
-                <a:spcPts val="0"/>
-              </a:spcBef>
-              <a:spcAft>
-                <a:spcPts val="0"/>
-              </a:spcAft>
-            </a:pPr>
-            <a:r>
-              <a:rPr sz="1000" b="1" i="0" spc="100">
-                <a:solidFill>
-                  <a:srgbClr val="9AA7BD"/>
-                </a:solidFill>
-                <a:latin typeface="Calibri"/>
-              </a:rPr>
-              <a:t>07</a:t>
-            </a:r>
-          </a:p>
-        </p:txBody>
-      </p:sp>
-      <p:sp>
-        <p:nvSpPr>
-          <p:cNvPr id="26" name="TextBox 25"/>
+            <a:pPr algn="ctr">
+              <a:spcBef>
+                <a:spcPts val="0"/>
+              </a:spcBef>
+              <a:spcAft>
+                <a:spcPts val="0"/>
+              </a:spcAft>
+            </a:pPr>
+            <a:r>
+              <a:rPr sz="4000" b="1" i="0">
+                <a:solidFill>
+                  <a:srgbClr val="4A9EFF"/>
+                </a:solidFill>
+                <a:latin typeface="Arial"/>
+              </a:rPr>
+              <a:t>20%+</a:t>
+            </a:r>
+          </a:p>
+        </p:txBody>
+      </p:sp>
+      <p:sp>
+        <p:nvSpPr>
+          <p:cNvPr id="24" name="TextBox 23"/>
           <p:cNvSpPr txBox="1"/>
           <p:nvPr/>
         </p:nvSpPr>
         <p:spPr>
           <a:xfrm>
-            <a:off x="548640" y="6400800"/>
-            <a:ext cx="3657600" cy="274320"/>
+            <a:off x="9326880" y="3474720"/>
+            <a:ext cx="2304288" cy="457200"/>
           </a:xfrm>
           <a:prstGeom prst="rect">
             <a:avLst/>
@@ -11876,6 +10189,135 @@
           </a:bodyPr>
           <a:lstStyle/>
           <a:p>
+            <a:pPr algn="ctr">
+              <a:spcBef>
+                <a:spcPts val="0"/>
+              </a:spcBef>
+              <a:spcAft>
+                <a:spcPts val="0"/>
+              </a:spcAft>
+            </a:pPr>
+            <a:r>
+              <a:rPr sz="1500" b="1" i="0">
+                <a:solidFill>
+                  <a:srgbClr val="F4F7FC"/>
+                </a:solidFill>
+                <a:latin typeface="Arial"/>
+              </a:rPr>
+              <a:t>fewer knock-on delays</a:t>
+            </a:r>
+          </a:p>
+        </p:txBody>
+      </p:sp>
+      <p:sp>
+        <p:nvSpPr>
+          <p:cNvPr id="25" name="TextBox 24"/>
+          <p:cNvSpPr txBox="1"/>
+          <p:nvPr/>
+        </p:nvSpPr>
+        <p:spPr>
+          <a:xfrm>
+            <a:off x="9326880" y="3931920"/>
+            <a:ext cx="2304288" cy="640080"/>
+          </a:xfrm>
+          <a:prstGeom prst="rect">
+            <a:avLst/>
+          </a:prstGeom>
+          <a:noFill/>
+        </p:spPr>
+        <p:txBody>
+          <a:bodyPr wrap="square" anchor="t" lIns="0" rIns="0" tIns="0" bIns="0">
+            <a:spAutoFit/>
+          </a:bodyPr>
+          <a:lstStyle/>
+          <a:p>
+            <a:pPr algn="ctr">
+              <a:lnSpc>
+                <a:spcPct val="100000"/>
+              </a:lnSpc>
+              <a:spcBef>
+                <a:spcPts val="0"/>
+              </a:spcBef>
+              <a:spcAft>
+                <a:spcPts val="0"/>
+              </a:spcAft>
+            </a:pPr>
+            <a:r>
+              <a:rPr sz="1150" b="0" i="0">
+                <a:solidFill>
+                  <a:srgbClr val="9AA7BD"/>
+                </a:solidFill>
+                <a:latin typeface="Arial"/>
+              </a:rPr>
+              <a:t>cascade reduction across the corridor</a:t>
+            </a:r>
+          </a:p>
+        </p:txBody>
+      </p:sp>
+      <p:sp>
+        <p:nvSpPr>
+          <p:cNvPr id="26" name="TextBox 25"/>
+          <p:cNvSpPr txBox="1"/>
+          <p:nvPr/>
+        </p:nvSpPr>
+        <p:spPr>
+          <a:xfrm>
+            <a:off x="640080" y="5212080"/>
+            <a:ext cx="10881360" cy="457200"/>
+          </a:xfrm>
+          <a:prstGeom prst="rect">
+            <a:avLst/>
+          </a:prstGeom>
+          <a:noFill/>
+        </p:spPr>
+        <p:txBody>
+          <a:bodyPr wrap="square" anchor="t" lIns="0" rIns="0" tIns="0" bIns="0">
+            <a:spAutoFit/>
+          </a:bodyPr>
+          <a:lstStyle/>
+          <a:p>
+            <a:pPr algn="ctr">
+              <a:spcBef>
+                <a:spcPts val="0"/>
+              </a:spcBef>
+              <a:spcAft>
+                <a:spcPts val="0"/>
+              </a:spcAft>
+            </a:pPr>
+            <a:r>
+              <a:rPr sz="1300" b="0" i="1">
+                <a:solidFill>
+                  <a:srgbClr val="9AA7BD"/>
+                </a:solidFill>
+                <a:latin typeface="Arial"/>
+              </a:rPr>
+              <a:t>Simulated results. Pilot validation planned.</a:t>
+            </a:r>
+          </a:p>
+        </p:txBody>
+      </p:sp>
+      <p:sp>
+        <p:nvSpPr>
+          <p:cNvPr id="27" name="TextBox 26"/>
+          <p:cNvSpPr txBox="1"/>
+          <p:nvPr/>
+        </p:nvSpPr>
+        <p:spPr>
+          <a:xfrm>
+            <a:off x="10332720" y="6400800"/>
+            <a:ext cx="731520" cy="274320"/>
+          </a:xfrm>
+          <a:prstGeom prst="rect">
+            <a:avLst/>
+          </a:prstGeom>
+          <a:noFill/>
+        </p:spPr>
+        <p:txBody>
+          <a:bodyPr wrap="square" anchor="t" lIns="0" rIns="0" tIns="0" bIns="0">
+            <a:spAutoFit/>
+          </a:bodyPr>
+          <a:lstStyle/>
+          <a:p>
             <a:pPr algn="l">
               <a:spcBef>
                 <a:spcPts val="0"/>
@@ -11889,7 +10331,1264 @@
                 <a:solidFill>
                   <a:srgbClr val="9AA7BD"/>
                 </a:solidFill>
-                <a:latin typeface="Calibri"/>
+                <a:latin typeface="Arial"/>
+              </a:rPr>
+              <a:t>07</a:t>
+            </a:r>
+          </a:p>
+        </p:txBody>
+      </p:sp>
+      <p:sp>
+        <p:nvSpPr>
+          <p:cNvPr id="28" name="TextBox 27"/>
+          <p:cNvSpPr txBox="1"/>
+          <p:nvPr/>
+        </p:nvSpPr>
+        <p:spPr>
+          <a:xfrm>
+            <a:off x="548640" y="6400800"/>
+            <a:ext cx="3657600" cy="274320"/>
+          </a:xfrm>
+          <a:prstGeom prst="rect">
+            <a:avLst/>
+          </a:prstGeom>
+          <a:noFill/>
+        </p:spPr>
+        <p:txBody>
+          <a:bodyPr wrap="square" anchor="t" lIns="0" rIns="0" tIns="0" bIns="0">
+            <a:spAutoFit/>
+          </a:bodyPr>
+          <a:lstStyle/>
+          <a:p>
+            <a:pPr algn="l">
+              <a:spcBef>
+                <a:spcPts val="0"/>
+              </a:spcBef>
+              <a:spcAft>
+                <a:spcPts val="0"/>
+              </a:spcAft>
+            </a:pPr>
+            <a:r>
+              <a:rPr sz="1000" b="1" i="0" spc="100">
+                <a:solidFill>
+                  <a:srgbClr val="9AA7BD"/>
+                </a:solidFill>
+                <a:latin typeface="Arial"/>
+              </a:rPr>
+              <a:t>Rail Saarthi</a:t>
+            </a:r>
+          </a:p>
+        </p:txBody>
+      </p:sp>
+    </p:spTree>
+  </p:cSld>
+  <p:clrMapOvr>
+    <a:masterClrMapping/>
+  </p:clrMapOvr>
+</p:sld>
+</file>
+
+<file path=ppt/slides/slide9.xml><?xml version="1.0" encoding="utf-8"?>
+<p:sld xmlns:a="http://schemas.openxmlformats.org/drawingml/2006/main" xmlns:p="http://schemas.openxmlformats.org/presentationml/2006/main" xmlns:r="http://schemas.openxmlformats.org/officeDocument/2006/relationships">
+  <p:cSld>
+    <p:spTree>
+      <p:nvGrpSpPr>
+        <p:cNvPr id="1" name=""/>
+        <p:cNvGrpSpPr/>
+        <p:nvPr/>
+      </p:nvGrpSpPr>
+      <p:grpSpPr/>
+      <p:sp>
+        <p:nvSpPr>
+          <p:cNvPr id="2" name="Rectangle 1"/>
+          <p:cNvSpPr/>
+          <p:nvPr/>
+        </p:nvSpPr>
+        <p:spPr>
+          <a:xfrm>
+            <a:off x="0" y="0"/>
+            <a:ext cx="12192000" cy="6858000"/>
+          </a:xfrm>
+          <a:prstGeom prst="rect">
+            <a:avLst/>
+          </a:prstGeom>
+          <a:solidFill>
+            <a:srgbClr val="010715"/>
+          </a:solidFill>
+          <a:ln>
+            <a:noFill/>
+          </a:ln>
+          <a:effectLst/>
+        </p:spPr>
+        <p:txBody>
+          <a:bodyPr rtlCol="0" anchor="ctr"/>
+          <a:lstStyle/>
+          <a:p>
+            <a:pPr algn="ctr"/>
+          </a:p>
+        </p:txBody>
+      </p:sp>
+      <p:sp>
+        <p:nvSpPr>
+          <p:cNvPr id="3" name="Rectangle 2"/>
+          <p:cNvSpPr/>
+          <p:nvPr/>
+        </p:nvSpPr>
+        <p:spPr>
+          <a:xfrm>
+            <a:off x="640080" y="585216"/>
+            <a:ext cx="292608" cy="64008"/>
+          </a:xfrm>
+          <a:prstGeom prst="rect">
+            <a:avLst/>
+          </a:prstGeom>
+          <a:solidFill>
+            <a:srgbClr val="4A9EFF"/>
+          </a:solidFill>
+          <a:ln>
+            <a:noFill/>
+          </a:ln>
+          <a:effectLst/>
+        </p:spPr>
+        <p:txBody>
+          <a:bodyPr rtlCol="0" anchor="ctr"/>
+          <a:lstStyle/>
+          <a:p>
+            <a:pPr algn="ctr"/>
+          </a:p>
+        </p:txBody>
+      </p:sp>
+      <p:sp>
+        <p:nvSpPr>
+          <p:cNvPr id="4" name="TextBox 3"/>
+          <p:cNvSpPr txBox="1"/>
+          <p:nvPr/>
+        </p:nvSpPr>
+        <p:spPr>
+          <a:xfrm>
+            <a:off x="1051560" y="484632"/>
+            <a:ext cx="5486400" cy="365760"/>
+          </a:xfrm>
+          <a:prstGeom prst="rect">
+            <a:avLst/>
+          </a:prstGeom>
+          <a:noFill/>
+        </p:spPr>
+        <p:txBody>
+          <a:bodyPr wrap="square" anchor="t" lIns="0" rIns="0" tIns="0" bIns="0">
+            <a:spAutoFit/>
+          </a:bodyPr>
+          <a:lstStyle/>
+          <a:p>
+            <a:pPr algn="l">
+              <a:spcBef>
+                <a:spcPts val="0"/>
+              </a:spcBef>
+              <a:spcAft>
+                <a:spcPts val="0"/>
+              </a:spcAft>
+            </a:pPr>
+            <a:r>
+              <a:rPr sz="1200" b="1" i="0" spc="250">
+                <a:solidFill>
+                  <a:srgbClr val="4A9EFF"/>
+                </a:solidFill>
+                <a:latin typeface="Arial"/>
+              </a:rPr>
+              <a:t>ROADMAP</a:t>
+            </a:r>
+          </a:p>
+        </p:txBody>
+      </p:sp>
+      <p:sp>
+        <p:nvSpPr>
+          <p:cNvPr id="5" name="TextBox 4"/>
+          <p:cNvSpPr txBox="1"/>
+          <p:nvPr/>
+        </p:nvSpPr>
+        <p:spPr>
+          <a:xfrm>
+            <a:off x="640080" y="960120"/>
+            <a:ext cx="10881360" cy="822960"/>
+          </a:xfrm>
+          <a:prstGeom prst="rect">
+            <a:avLst/>
+          </a:prstGeom>
+          <a:noFill/>
+        </p:spPr>
+        <p:txBody>
+          <a:bodyPr wrap="square" anchor="t" lIns="0" rIns="0" tIns="0" bIns="0">
+            <a:spAutoFit/>
+          </a:bodyPr>
+          <a:lstStyle/>
+          <a:p>
+            <a:pPr algn="l">
+              <a:spcBef>
+                <a:spcPts val="0"/>
+              </a:spcBef>
+              <a:spcAft>
+                <a:spcPts val="0"/>
+              </a:spcAft>
+            </a:pPr>
+            <a:r>
+              <a:rPr sz="3200" b="1" i="0">
+                <a:solidFill>
+                  <a:srgbClr val="F4F7FC"/>
+                </a:solidFill>
+                <a:latin typeface="Arial"/>
+              </a:rPr>
+              <a:t>One corridor today, the network tomorrow</a:t>
+            </a:r>
+          </a:p>
+        </p:txBody>
+      </p:sp>
+      <p:sp>
+        <p:nvSpPr>
+          <p:cNvPr id="6" name="Rectangle 5"/>
+          <p:cNvSpPr/>
+          <p:nvPr/>
+        </p:nvSpPr>
+        <p:spPr>
+          <a:xfrm>
+            <a:off x="822959" y="2029967"/>
+            <a:ext cx="10515600" cy="36576"/>
+          </a:xfrm>
+          <a:prstGeom prst="rect">
+            <a:avLst/>
+          </a:prstGeom>
+          <a:solidFill>
+            <a:srgbClr val="243352"/>
+          </a:solidFill>
+          <a:ln>
+            <a:noFill/>
+          </a:ln>
+          <a:effectLst/>
+        </p:spPr>
+        <p:txBody>
+          <a:bodyPr rtlCol="0" anchor="ctr"/>
+          <a:lstStyle/>
+          <a:p>
+            <a:pPr algn="ctr"/>
+          </a:p>
+        </p:txBody>
+      </p:sp>
+      <p:sp>
+        <p:nvSpPr>
+          <p:cNvPr id="7" name="Oval 6"/>
+          <p:cNvSpPr/>
+          <p:nvPr/>
+        </p:nvSpPr>
+        <p:spPr>
+          <a:xfrm>
+            <a:off x="822959" y="1901952"/>
+            <a:ext cx="256032" cy="256032"/>
+          </a:xfrm>
+          <a:prstGeom prst="ellipse">
+            <a:avLst/>
+          </a:prstGeom>
+          <a:solidFill>
+            <a:srgbClr val="4A9EFF"/>
+          </a:solidFill>
+          <a:ln>
+            <a:noFill/>
+          </a:ln>
+          <a:effectLst/>
+        </p:spPr>
+        <p:txBody>
+          <a:bodyPr rtlCol="0" anchor="ctr"/>
+          <a:lstStyle/>
+          <a:p>
+            <a:pPr algn="ctr"/>
+          </a:p>
+        </p:txBody>
+      </p:sp>
+      <p:sp>
+        <p:nvSpPr>
+          <p:cNvPr id="8" name="Rounded Rectangle 7"/>
+          <p:cNvSpPr/>
+          <p:nvPr/>
+        </p:nvSpPr>
+        <p:spPr>
+          <a:xfrm>
+            <a:off x="640080" y="2286000"/>
+            <a:ext cx="3502152" cy="3200400"/>
+          </a:xfrm>
+          <a:prstGeom prst="roundRect">
+            <a:avLst>
+              <a:gd name="adj" fmla="val 8000"/>
+            </a:avLst>
+          </a:prstGeom>
+          <a:solidFill>
+            <a:srgbClr val="121B30"/>
+          </a:solidFill>
+          <a:ln w="12700">
+            <a:solidFill>
+              <a:srgbClr val="243352"/>
+            </a:solidFill>
+          </a:ln>
+          <a:effectLst/>
+        </p:spPr>
+        <p:txBody>
+          <a:bodyPr rtlCol="0" anchor="ctr"/>
+          <a:lstStyle/>
+          <a:p>
+            <a:pPr algn="ctr"/>
+          </a:p>
+        </p:txBody>
+      </p:sp>
+      <p:sp>
+        <p:nvSpPr>
+          <p:cNvPr id="9" name="Rectangle 8"/>
+          <p:cNvSpPr/>
+          <p:nvPr/>
+        </p:nvSpPr>
+        <p:spPr>
+          <a:xfrm>
+            <a:off x="640080" y="2286000"/>
+            <a:ext cx="3502152" cy="82296"/>
+          </a:xfrm>
+          <a:prstGeom prst="rect">
+            <a:avLst/>
+          </a:prstGeom>
+          <a:solidFill>
+            <a:srgbClr val="4A9EFF"/>
+          </a:solidFill>
+          <a:ln>
+            <a:noFill/>
+          </a:ln>
+          <a:effectLst/>
+        </p:spPr>
+        <p:txBody>
+          <a:bodyPr rtlCol="0" anchor="ctr"/>
+          <a:lstStyle/>
+          <a:p>
+            <a:pPr algn="ctr"/>
+          </a:p>
+        </p:txBody>
+      </p:sp>
+      <p:sp>
+        <p:nvSpPr>
+          <p:cNvPr id="10" name="TextBox 9"/>
+          <p:cNvSpPr txBox="1"/>
+          <p:nvPr/>
+        </p:nvSpPr>
+        <p:spPr>
+          <a:xfrm>
+            <a:off x="932688" y="2560320"/>
+            <a:ext cx="2953512" cy="365760"/>
+          </a:xfrm>
+          <a:prstGeom prst="rect">
+            <a:avLst/>
+          </a:prstGeom>
+          <a:noFill/>
+        </p:spPr>
+        <p:txBody>
+          <a:bodyPr wrap="square" anchor="t" lIns="0" rIns="0" tIns="0" bIns="0">
+            <a:spAutoFit/>
+          </a:bodyPr>
+          <a:lstStyle/>
+          <a:p>
+            <a:pPr algn="l">
+              <a:spcBef>
+                <a:spcPts val="0"/>
+              </a:spcBef>
+              <a:spcAft>
+                <a:spcPts val="0"/>
+              </a:spcAft>
+            </a:pPr>
+            <a:r>
+              <a:rPr sz="1200" b="1" i="0" spc="200">
+                <a:solidFill>
+                  <a:srgbClr val="4A9EFF"/>
+                </a:solidFill>
+                <a:latin typeface="Arial"/>
+              </a:rPr>
+              <a:t>PHASE 1</a:t>
+            </a:r>
+          </a:p>
+        </p:txBody>
+      </p:sp>
+      <p:sp>
+        <p:nvSpPr>
+          <p:cNvPr id="11" name="TextBox 10"/>
+          <p:cNvSpPr txBox="1"/>
+          <p:nvPr/>
+        </p:nvSpPr>
+        <p:spPr>
+          <a:xfrm>
+            <a:off x="932688" y="2907791"/>
+            <a:ext cx="2953512" cy="457200"/>
+          </a:xfrm>
+          <a:prstGeom prst="rect">
+            <a:avLst/>
+          </a:prstGeom>
+          <a:noFill/>
+        </p:spPr>
+        <p:txBody>
+          <a:bodyPr wrap="square" anchor="t" lIns="0" rIns="0" tIns="0" bIns="0">
+            <a:spAutoFit/>
+          </a:bodyPr>
+          <a:lstStyle/>
+          <a:p>
+            <a:pPr algn="l">
+              <a:spcBef>
+                <a:spcPts val="0"/>
+              </a:spcBef>
+              <a:spcAft>
+                <a:spcPts val="0"/>
+              </a:spcAft>
+            </a:pPr>
+            <a:r>
+              <a:rPr sz="2000" b="1" i="0">
+                <a:solidFill>
+                  <a:srgbClr val="F4F7FC"/>
+                </a:solidFill>
+                <a:latin typeface="Arial"/>
+              </a:rPr>
+              <a:t>Hackathon MVP</a:t>
+            </a:r>
+          </a:p>
+        </p:txBody>
+      </p:sp>
+      <p:sp>
+        <p:nvSpPr>
+          <p:cNvPr id="12" name="TextBox 11"/>
+          <p:cNvSpPr txBox="1"/>
+          <p:nvPr/>
+        </p:nvSpPr>
+        <p:spPr>
+          <a:xfrm>
+            <a:off x="932688" y="3566160"/>
+            <a:ext cx="2953512" cy="1828800"/>
+          </a:xfrm>
+          <a:prstGeom prst="rect">
+            <a:avLst/>
+          </a:prstGeom>
+          <a:noFill/>
+        </p:spPr>
+        <p:txBody>
+          <a:bodyPr wrap="square" anchor="t" lIns="0" rIns="0" tIns="0" bIns="0">
+            <a:spAutoFit/>
+          </a:bodyPr>
+          <a:lstStyle/>
+          <a:p>
+            <a:pPr algn="l">
+              <a:spcBef>
+                <a:spcPts val="0"/>
+              </a:spcBef>
+              <a:spcAft>
+                <a:spcPts val="700"/>
+              </a:spcAft>
+            </a:pPr>
+            <a:r>
+              <a:rPr sz="1300" b="1" i="0">
+                <a:solidFill>
+                  <a:srgbClr val="4A9EFF"/>
+                </a:solidFill>
+                <a:latin typeface="Arial"/>
+              </a:rPr>
+              <a:t>•  </a:t>
+            </a:r>
+            <a:r>
+              <a:rPr sz="1350" b="0" i="0">
+                <a:solidFill>
+                  <a:srgbClr val="F4F7FC"/>
+                </a:solidFill>
+                <a:latin typeface="Arial"/>
+              </a:rPr>
+              <a:t>Corridor simulation</a:t>
+            </a:r>
+          </a:p>
+          <a:p>
+            <a:pPr algn="l">
+              <a:spcBef>
+                <a:spcPts val="0"/>
+              </a:spcBef>
+              <a:spcAft>
+                <a:spcPts val="700"/>
+              </a:spcAft>
+            </a:pPr>
+            <a:r>
+              <a:rPr sz="1300" b="1" i="0">
+                <a:solidFill>
+                  <a:srgbClr val="4A9EFF"/>
+                </a:solidFill>
+                <a:latin typeface="Arial"/>
+              </a:rPr>
+              <a:t>•  </a:t>
+            </a:r>
+            <a:r>
+              <a:rPr sz="1350" b="0" i="0">
+                <a:solidFill>
+                  <a:srgbClr val="F4F7FC"/>
+                </a:solidFill>
+                <a:latin typeface="Arial"/>
+              </a:rPr>
+              <a:t>Delay injection</a:t>
+            </a:r>
+          </a:p>
+          <a:p>
+            <a:pPr algn="l">
+              <a:spcBef>
+                <a:spcPts val="0"/>
+              </a:spcBef>
+              <a:spcAft>
+                <a:spcPts val="700"/>
+              </a:spcAft>
+            </a:pPr>
+            <a:r>
+              <a:rPr sz="1300" b="1" i="0">
+                <a:solidFill>
+                  <a:srgbClr val="4A9EFF"/>
+                </a:solidFill>
+                <a:latin typeface="Arial"/>
+              </a:rPr>
+              <a:t>•  </a:t>
+            </a:r>
+            <a:r>
+              <a:rPr sz="1350" b="0" i="0">
+                <a:solidFill>
+                  <a:srgbClr val="F4F7FC"/>
+                </a:solidFill>
+                <a:latin typeface="Arial"/>
+              </a:rPr>
+              <a:t>Platform reassignment</a:t>
+            </a:r>
+          </a:p>
+          <a:p>
+            <a:pPr algn="l">
+              <a:spcBef>
+                <a:spcPts val="0"/>
+              </a:spcBef>
+              <a:spcAft>
+                <a:spcPts val="700"/>
+              </a:spcAft>
+            </a:pPr>
+            <a:r>
+              <a:rPr sz="1300" b="1" i="0">
+                <a:solidFill>
+                  <a:srgbClr val="4A9EFF"/>
+                </a:solidFill>
+                <a:latin typeface="Arial"/>
+              </a:rPr>
+              <a:t>•  </a:t>
+            </a:r>
+            <a:r>
+              <a:rPr sz="1350" b="0" i="0">
+                <a:solidFill>
+                  <a:srgbClr val="F4F7FC"/>
+                </a:solidFill>
+                <a:latin typeface="Arial"/>
+              </a:rPr>
+              <a:t>Live agent control room</a:t>
+            </a:r>
+          </a:p>
+        </p:txBody>
+      </p:sp>
+      <p:sp>
+        <p:nvSpPr>
+          <p:cNvPr id="13" name="Oval 12"/>
+          <p:cNvSpPr/>
+          <p:nvPr/>
+        </p:nvSpPr>
+        <p:spPr>
+          <a:xfrm>
+            <a:off x="4507992" y="1901952"/>
+            <a:ext cx="256032" cy="256032"/>
+          </a:xfrm>
+          <a:prstGeom prst="ellipse">
+            <a:avLst/>
+          </a:prstGeom>
+          <a:solidFill>
+            <a:srgbClr val="FF9E1B"/>
+          </a:solidFill>
+          <a:ln>
+            <a:noFill/>
+          </a:ln>
+          <a:effectLst/>
+        </p:spPr>
+        <p:txBody>
+          <a:bodyPr rtlCol="0" anchor="ctr"/>
+          <a:lstStyle/>
+          <a:p>
+            <a:pPr algn="ctr"/>
+          </a:p>
+        </p:txBody>
+      </p:sp>
+      <p:sp>
+        <p:nvSpPr>
+          <p:cNvPr id="14" name="Rounded Rectangle 13"/>
+          <p:cNvSpPr/>
+          <p:nvPr/>
+        </p:nvSpPr>
+        <p:spPr>
+          <a:xfrm>
+            <a:off x="4325112" y="2286000"/>
+            <a:ext cx="3502152" cy="3200400"/>
+          </a:xfrm>
+          <a:prstGeom prst="roundRect">
+            <a:avLst>
+              <a:gd name="adj" fmla="val 8000"/>
+            </a:avLst>
+          </a:prstGeom>
+          <a:solidFill>
+            <a:srgbClr val="121B30"/>
+          </a:solidFill>
+          <a:ln w="12700">
+            <a:solidFill>
+              <a:srgbClr val="243352"/>
+            </a:solidFill>
+          </a:ln>
+          <a:effectLst/>
+        </p:spPr>
+        <p:txBody>
+          <a:bodyPr rtlCol="0" anchor="ctr"/>
+          <a:lstStyle/>
+          <a:p>
+            <a:pPr algn="ctr"/>
+          </a:p>
+        </p:txBody>
+      </p:sp>
+      <p:sp>
+        <p:nvSpPr>
+          <p:cNvPr id="15" name="Rectangle 14"/>
+          <p:cNvSpPr/>
+          <p:nvPr/>
+        </p:nvSpPr>
+        <p:spPr>
+          <a:xfrm>
+            <a:off x="4325112" y="2286000"/>
+            <a:ext cx="3502152" cy="82296"/>
+          </a:xfrm>
+          <a:prstGeom prst="rect">
+            <a:avLst/>
+          </a:prstGeom>
+          <a:solidFill>
+            <a:srgbClr val="FF9E1B"/>
+          </a:solidFill>
+          <a:ln>
+            <a:noFill/>
+          </a:ln>
+          <a:effectLst/>
+        </p:spPr>
+        <p:txBody>
+          <a:bodyPr rtlCol="0" anchor="ctr"/>
+          <a:lstStyle/>
+          <a:p>
+            <a:pPr algn="ctr"/>
+          </a:p>
+        </p:txBody>
+      </p:sp>
+      <p:sp>
+        <p:nvSpPr>
+          <p:cNvPr id="16" name="TextBox 15"/>
+          <p:cNvSpPr txBox="1"/>
+          <p:nvPr/>
+        </p:nvSpPr>
+        <p:spPr>
+          <a:xfrm>
+            <a:off x="4617720" y="2560320"/>
+            <a:ext cx="2953512" cy="365760"/>
+          </a:xfrm>
+          <a:prstGeom prst="rect">
+            <a:avLst/>
+          </a:prstGeom>
+          <a:noFill/>
+        </p:spPr>
+        <p:txBody>
+          <a:bodyPr wrap="square" anchor="t" lIns="0" rIns="0" tIns="0" bIns="0">
+            <a:spAutoFit/>
+          </a:bodyPr>
+          <a:lstStyle/>
+          <a:p>
+            <a:pPr algn="l">
+              <a:spcBef>
+                <a:spcPts val="0"/>
+              </a:spcBef>
+              <a:spcAft>
+                <a:spcPts val="0"/>
+              </a:spcAft>
+            </a:pPr>
+            <a:r>
+              <a:rPr sz="1200" b="1" i="0" spc="200">
+                <a:solidFill>
+                  <a:srgbClr val="FF9E1B"/>
+                </a:solidFill>
+                <a:latin typeface="Arial"/>
+              </a:rPr>
+              <a:t>PHASE 2</a:t>
+            </a:r>
+          </a:p>
+        </p:txBody>
+      </p:sp>
+      <p:sp>
+        <p:nvSpPr>
+          <p:cNvPr id="17" name="TextBox 16"/>
+          <p:cNvSpPr txBox="1"/>
+          <p:nvPr/>
+        </p:nvSpPr>
+        <p:spPr>
+          <a:xfrm>
+            <a:off x="4617720" y="2907791"/>
+            <a:ext cx="2953512" cy="457200"/>
+          </a:xfrm>
+          <a:prstGeom prst="rect">
+            <a:avLst/>
+          </a:prstGeom>
+          <a:noFill/>
+        </p:spPr>
+        <p:txBody>
+          <a:bodyPr wrap="square" anchor="t" lIns="0" rIns="0" tIns="0" bIns="0">
+            <a:spAutoFit/>
+          </a:bodyPr>
+          <a:lstStyle/>
+          <a:p>
+            <a:pPr algn="l">
+              <a:spcBef>
+                <a:spcPts val="0"/>
+              </a:spcBef>
+              <a:spcAft>
+                <a:spcPts val="0"/>
+              </a:spcAft>
+            </a:pPr>
+            <a:r>
+              <a:rPr sz="2000" b="1" i="0">
+                <a:solidFill>
+                  <a:srgbClr val="F4F7FC"/>
+                </a:solidFill>
+                <a:latin typeface="Arial"/>
+              </a:rPr>
+              <a:t>Pilot</a:t>
+            </a:r>
+          </a:p>
+        </p:txBody>
+      </p:sp>
+      <p:sp>
+        <p:nvSpPr>
+          <p:cNvPr id="18" name="TextBox 17"/>
+          <p:cNvSpPr txBox="1"/>
+          <p:nvPr/>
+        </p:nvSpPr>
+        <p:spPr>
+          <a:xfrm>
+            <a:off x="4617720" y="3566160"/>
+            <a:ext cx="2953512" cy="1828800"/>
+          </a:xfrm>
+          <a:prstGeom prst="rect">
+            <a:avLst/>
+          </a:prstGeom>
+          <a:noFill/>
+        </p:spPr>
+        <p:txBody>
+          <a:bodyPr wrap="square" anchor="t" lIns="0" rIns="0" tIns="0" bIns="0">
+            <a:spAutoFit/>
+          </a:bodyPr>
+          <a:lstStyle/>
+          <a:p>
+            <a:pPr algn="l">
+              <a:spcBef>
+                <a:spcPts val="0"/>
+              </a:spcBef>
+              <a:spcAft>
+                <a:spcPts val="700"/>
+              </a:spcAft>
+            </a:pPr>
+            <a:r>
+              <a:rPr sz="1300" b="1" i="0">
+                <a:solidFill>
+                  <a:srgbClr val="FF9E1B"/>
+                </a:solidFill>
+                <a:latin typeface="Arial"/>
+              </a:rPr>
+              <a:t>•  </a:t>
+            </a:r>
+            <a:r>
+              <a:rPr sz="1350" b="0" i="0">
+                <a:solidFill>
+                  <a:srgbClr val="F4F7FC"/>
+                </a:solidFill>
+                <a:latin typeface="Arial"/>
+              </a:rPr>
+              <a:t>5-station live corridor</a:t>
+            </a:r>
+          </a:p>
+          <a:p>
+            <a:pPr algn="l">
+              <a:spcBef>
+                <a:spcPts val="0"/>
+              </a:spcBef>
+              <a:spcAft>
+                <a:spcPts val="700"/>
+              </a:spcAft>
+            </a:pPr>
+            <a:r>
+              <a:rPr sz="1300" b="1" i="0">
+                <a:solidFill>
+                  <a:srgbClr val="FF9E1B"/>
+                </a:solidFill>
+                <a:latin typeface="Arial"/>
+              </a:rPr>
+              <a:t>•  </a:t>
+            </a:r>
+            <a:r>
+              <a:rPr sz="1350" b="0" i="0">
+                <a:solidFill>
+                  <a:srgbClr val="F4F7FC"/>
+                </a:solidFill>
+                <a:latin typeface="Arial"/>
+              </a:rPr>
+              <a:t>NTES integration</a:t>
+            </a:r>
+          </a:p>
+          <a:p>
+            <a:pPr algn="l">
+              <a:spcBef>
+                <a:spcPts val="0"/>
+              </a:spcBef>
+              <a:spcAft>
+                <a:spcPts val="700"/>
+              </a:spcAft>
+            </a:pPr>
+            <a:r>
+              <a:rPr sz="1300" b="1" i="0">
+                <a:solidFill>
+                  <a:srgbClr val="FF9E1B"/>
+                </a:solidFill>
+                <a:latin typeface="Arial"/>
+              </a:rPr>
+              <a:t>•  </a:t>
+            </a:r>
+            <a:r>
+              <a:rPr sz="1350" b="0" i="0">
+                <a:solidFill>
+                  <a:srgbClr val="F4F7FC"/>
+                </a:solidFill>
+                <a:latin typeface="Arial"/>
+              </a:rPr>
+              <a:t>Real crew &amp; duty data</a:t>
+            </a:r>
+          </a:p>
+          <a:p>
+            <a:pPr algn="l">
+              <a:spcBef>
+                <a:spcPts val="0"/>
+              </a:spcBef>
+              <a:spcAft>
+                <a:spcPts val="700"/>
+              </a:spcAft>
+            </a:pPr>
+            <a:r>
+              <a:rPr sz="1300" b="1" i="0">
+                <a:solidFill>
+                  <a:srgbClr val="FF9E1B"/>
+                </a:solidFill>
+                <a:latin typeface="Arial"/>
+              </a:rPr>
+              <a:t>•  </a:t>
+            </a:r>
+            <a:r>
+              <a:rPr sz="1350" b="0" i="0">
+                <a:solidFill>
+                  <a:srgbClr val="F4F7FC"/>
+                </a:solidFill>
+                <a:latin typeface="Arial"/>
+              </a:rPr>
+              <a:t>Operator-in-the-loop</a:t>
+            </a:r>
+          </a:p>
+        </p:txBody>
+      </p:sp>
+      <p:sp>
+        <p:nvSpPr>
+          <p:cNvPr id="19" name="Oval 18"/>
+          <p:cNvSpPr/>
+          <p:nvPr/>
+        </p:nvSpPr>
+        <p:spPr>
+          <a:xfrm>
+            <a:off x="8193023" y="1901952"/>
+            <a:ext cx="256032" cy="256032"/>
+          </a:xfrm>
+          <a:prstGeom prst="ellipse">
+            <a:avLst/>
+          </a:prstGeom>
+          <a:solidFill>
+            <a:srgbClr val="35D07F"/>
+          </a:solidFill>
+          <a:ln>
+            <a:noFill/>
+          </a:ln>
+          <a:effectLst/>
+        </p:spPr>
+        <p:txBody>
+          <a:bodyPr rtlCol="0" anchor="ctr"/>
+          <a:lstStyle/>
+          <a:p>
+            <a:pPr algn="ctr"/>
+          </a:p>
+        </p:txBody>
+      </p:sp>
+      <p:sp>
+        <p:nvSpPr>
+          <p:cNvPr id="20" name="Rounded Rectangle 19"/>
+          <p:cNvSpPr/>
+          <p:nvPr/>
+        </p:nvSpPr>
+        <p:spPr>
+          <a:xfrm>
+            <a:off x="8010144" y="2286000"/>
+            <a:ext cx="3502152" cy="3200400"/>
+          </a:xfrm>
+          <a:prstGeom prst="roundRect">
+            <a:avLst>
+              <a:gd name="adj" fmla="val 8000"/>
+            </a:avLst>
+          </a:prstGeom>
+          <a:solidFill>
+            <a:srgbClr val="121B30"/>
+          </a:solidFill>
+          <a:ln w="12700">
+            <a:solidFill>
+              <a:srgbClr val="243352"/>
+            </a:solidFill>
+          </a:ln>
+          <a:effectLst/>
+        </p:spPr>
+        <p:txBody>
+          <a:bodyPr rtlCol="0" anchor="ctr"/>
+          <a:lstStyle/>
+          <a:p>
+            <a:pPr algn="ctr"/>
+          </a:p>
+        </p:txBody>
+      </p:sp>
+      <p:sp>
+        <p:nvSpPr>
+          <p:cNvPr id="21" name="Rectangle 20"/>
+          <p:cNvSpPr/>
+          <p:nvPr/>
+        </p:nvSpPr>
+        <p:spPr>
+          <a:xfrm>
+            <a:off x="8010144" y="2286000"/>
+            <a:ext cx="3502152" cy="82296"/>
+          </a:xfrm>
+          <a:prstGeom prst="rect">
+            <a:avLst/>
+          </a:prstGeom>
+          <a:solidFill>
+            <a:srgbClr val="35D07F"/>
+          </a:solidFill>
+          <a:ln>
+            <a:noFill/>
+          </a:ln>
+          <a:effectLst/>
+        </p:spPr>
+        <p:txBody>
+          <a:bodyPr rtlCol="0" anchor="ctr"/>
+          <a:lstStyle/>
+          <a:p>
+            <a:pPr algn="ctr"/>
+          </a:p>
+        </p:txBody>
+      </p:sp>
+      <p:sp>
+        <p:nvSpPr>
+          <p:cNvPr id="22" name="TextBox 21"/>
+          <p:cNvSpPr txBox="1"/>
+          <p:nvPr/>
+        </p:nvSpPr>
+        <p:spPr>
+          <a:xfrm>
+            <a:off x="8302752" y="2560320"/>
+            <a:ext cx="2953512" cy="365760"/>
+          </a:xfrm>
+          <a:prstGeom prst="rect">
+            <a:avLst/>
+          </a:prstGeom>
+          <a:noFill/>
+        </p:spPr>
+        <p:txBody>
+          <a:bodyPr wrap="square" anchor="t" lIns="0" rIns="0" tIns="0" bIns="0">
+            <a:spAutoFit/>
+          </a:bodyPr>
+          <a:lstStyle/>
+          <a:p>
+            <a:pPr algn="l">
+              <a:spcBef>
+                <a:spcPts val="0"/>
+              </a:spcBef>
+              <a:spcAft>
+                <a:spcPts val="0"/>
+              </a:spcAft>
+            </a:pPr>
+            <a:r>
+              <a:rPr sz="1200" b="1" i="0" spc="200">
+                <a:solidFill>
+                  <a:srgbClr val="35D07F"/>
+                </a:solidFill>
+                <a:latin typeface="Arial"/>
+              </a:rPr>
+              <a:t>PHASE 3</a:t>
+            </a:r>
+          </a:p>
+        </p:txBody>
+      </p:sp>
+      <p:sp>
+        <p:nvSpPr>
+          <p:cNvPr id="23" name="TextBox 22"/>
+          <p:cNvSpPr txBox="1"/>
+          <p:nvPr/>
+        </p:nvSpPr>
+        <p:spPr>
+          <a:xfrm>
+            <a:off x="8302752" y="2907791"/>
+            <a:ext cx="2953512" cy="457200"/>
+          </a:xfrm>
+          <a:prstGeom prst="rect">
+            <a:avLst/>
+          </a:prstGeom>
+          <a:noFill/>
+        </p:spPr>
+        <p:txBody>
+          <a:bodyPr wrap="square" anchor="t" lIns="0" rIns="0" tIns="0" bIns="0">
+            <a:spAutoFit/>
+          </a:bodyPr>
+          <a:lstStyle/>
+          <a:p>
+            <a:pPr algn="l">
+              <a:spcBef>
+                <a:spcPts val="0"/>
+              </a:spcBef>
+              <a:spcAft>
+                <a:spcPts val="0"/>
+              </a:spcAft>
+            </a:pPr>
+            <a:r>
+              <a:rPr sz="2000" b="1" i="0">
+                <a:solidFill>
+                  <a:srgbClr val="F4F7FC"/>
+                </a:solidFill>
+                <a:latin typeface="Arial"/>
+              </a:rPr>
+              <a:t>Scale</a:t>
+            </a:r>
+          </a:p>
+        </p:txBody>
+      </p:sp>
+      <p:sp>
+        <p:nvSpPr>
+          <p:cNvPr id="24" name="TextBox 23"/>
+          <p:cNvSpPr txBox="1"/>
+          <p:nvPr/>
+        </p:nvSpPr>
+        <p:spPr>
+          <a:xfrm>
+            <a:off x="8302752" y="3566160"/>
+            <a:ext cx="2953512" cy="1828800"/>
+          </a:xfrm>
+          <a:prstGeom prst="rect">
+            <a:avLst/>
+          </a:prstGeom>
+          <a:noFill/>
+        </p:spPr>
+        <p:txBody>
+          <a:bodyPr wrap="square" anchor="t" lIns="0" rIns="0" tIns="0" bIns="0">
+            <a:spAutoFit/>
+          </a:bodyPr>
+          <a:lstStyle/>
+          <a:p>
+            <a:pPr algn="l">
+              <a:spcBef>
+                <a:spcPts val="0"/>
+              </a:spcBef>
+              <a:spcAft>
+                <a:spcPts val="700"/>
+              </a:spcAft>
+            </a:pPr>
+            <a:r>
+              <a:rPr sz="1300" b="1" i="0">
+                <a:solidFill>
+                  <a:srgbClr val="35D07F"/>
+                </a:solidFill>
+                <a:latin typeface="Arial"/>
+              </a:rPr>
+              <a:t>•  </a:t>
+            </a:r>
+            <a:r>
+              <a:rPr sz="1350" b="0" i="0">
+                <a:solidFill>
+                  <a:srgbClr val="F4F7FC"/>
+                </a:solidFill>
+                <a:latin typeface="Arial"/>
+              </a:rPr>
+              <a:t>National rollout</a:t>
+            </a:r>
+          </a:p>
+          <a:p>
+            <a:pPr algn="l">
+              <a:spcBef>
+                <a:spcPts val="0"/>
+              </a:spcBef>
+              <a:spcAft>
+                <a:spcPts val="700"/>
+              </a:spcAft>
+            </a:pPr>
+            <a:r>
+              <a:rPr sz="1300" b="1" i="0">
+                <a:solidFill>
+                  <a:srgbClr val="35D07F"/>
+                </a:solidFill>
+                <a:latin typeface="Arial"/>
+              </a:rPr>
+              <a:t>•  </a:t>
+            </a:r>
+            <a:r>
+              <a:rPr sz="1350" b="0" i="0">
+                <a:solidFill>
+                  <a:srgbClr val="F4F7FC"/>
+                </a:solidFill>
+                <a:latin typeface="Arial"/>
+              </a:rPr>
+              <a:t>RL-based dispatch</a:t>
+            </a:r>
+          </a:p>
+          <a:p>
+            <a:pPr algn="l">
+              <a:spcBef>
+                <a:spcPts val="0"/>
+              </a:spcBef>
+              <a:spcAft>
+                <a:spcPts val="700"/>
+              </a:spcAft>
+            </a:pPr>
+            <a:r>
+              <a:rPr sz="1300" b="1" i="0">
+                <a:solidFill>
+                  <a:srgbClr val="35D07F"/>
+                </a:solidFill>
+                <a:latin typeface="Arial"/>
+              </a:rPr>
+              <a:t>•  </a:t>
+            </a:r>
+            <a:r>
+              <a:rPr sz="1350" b="0" i="0">
+                <a:solidFill>
+                  <a:srgbClr val="F4F7FC"/>
+                </a:solidFill>
+                <a:latin typeface="Arial"/>
+              </a:rPr>
+              <a:t>Passenger AI chatbot</a:t>
+            </a:r>
+          </a:p>
+          <a:p>
+            <a:pPr algn="l">
+              <a:spcBef>
+                <a:spcPts val="0"/>
+              </a:spcBef>
+              <a:spcAft>
+                <a:spcPts val="700"/>
+              </a:spcAft>
+            </a:pPr>
+            <a:r>
+              <a:rPr sz="1300" b="1" i="0">
+                <a:solidFill>
+                  <a:srgbClr val="35D07F"/>
+                </a:solidFill>
+                <a:latin typeface="Arial"/>
+              </a:rPr>
+              <a:t>•  </a:t>
+            </a:r>
+            <a:r>
+              <a:rPr sz="1350" b="0" i="0">
+                <a:solidFill>
+                  <a:srgbClr val="F4F7FC"/>
+                </a:solidFill>
+                <a:latin typeface="Arial"/>
+              </a:rPr>
+              <a:t>Rail Madad integration</a:t>
+            </a:r>
+          </a:p>
+        </p:txBody>
+      </p:sp>
+      <p:sp>
+        <p:nvSpPr>
+          <p:cNvPr id="25" name="TextBox 24"/>
+          <p:cNvSpPr txBox="1"/>
+          <p:nvPr/>
+        </p:nvSpPr>
+        <p:spPr>
+          <a:xfrm>
+            <a:off x="10332720" y="6400800"/>
+            <a:ext cx="731520" cy="274320"/>
+          </a:xfrm>
+          <a:prstGeom prst="rect">
+            <a:avLst/>
+          </a:prstGeom>
+          <a:noFill/>
+        </p:spPr>
+        <p:txBody>
+          <a:bodyPr wrap="square" anchor="t" lIns="0" rIns="0" tIns="0" bIns="0">
+            <a:spAutoFit/>
+          </a:bodyPr>
+          <a:lstStyle/>
+          <a:p>
+            <a:pPr algn="l">
+              <a:spcBef>
+                <a:spcPts val="0"/>
+              </a:spcBef>
+              <a:spcAft>
+                <a:spcPts val="0"/>
+              </a:spcAft>
+            </a:pPr>
+            <a:r>
+              <a:rPr sz="1000" b="1" i="0" spc="100">
+                <a:solidFill>
+                  <a:srgbClr val="9AA7BD"/>
+                </a:solidFill>
+                <a:latin typeface="Arial"/>
+              </a:rPr>
+              <a:t>08</a:t>
+            </a:r>
+          </a:p>
+        </p:txBody>
+      </p:sp>
+      <p:sp>
+        <p:nvSpPr>
+          <p:cNvPr id="26" name="TextBox 25"/>
+          <p:cNvSpPr txBox="1"/>
+          <p:nvPr/>
+        </p:nvSpPr>
+        <p:spPr>
+          <a:xfrm>
+            <a:off x="548640" y="6400800"/>
+            <a:ext cx="3657600" cy="274320"/>
+          </a:xfrm>
+          <a:prstGeom prst="rect">
+            <a:avLst/>
+          </a:prstGeom>
+          <a:noFill/>
+        </p:spPr>
+        <p:txBody>
+          <a:bodyPr wrap="square" anchor="t" lIns="0" rIns="0" tIns="0" bIns="0">
+            <a:spAutoFit/>
+          </a:bodyPr>
+          <a:lstStyle/>
+          <a:p>
+            <a:pPr algn="l">
+              <a:spcBef>
+                <a:spcPts val="0"/>
+              </a:spcBef>
+              <a:spcAft>
+                <a:spcPts val="0"/>
+              </a:spcAft>
+            </a:pPr>
+            <a:r>
+              <a:rPr sz="1000" b="1" i="0" spc="100">
+                <a:solidFill>
+                  <a:srgbClr val="9AA7BD"/>
+                </a:solidFill>
+                <a:latin typeface="Arial"/>
               </a:rPr>
               <a:t>Rail Saarthi</a:t>
             </a:r>
